--- a/cross_marketing_notta_presentation.pptx
+++ b/cross_marketing_notta_presentation.pptx
@@ -15,6 +15,7 @@
     <p:sldId id="263" r:id="rId15"/>
     <p:sldId id="264" r:id="rId16"/>
     <p:sldId id="265" r:id="rId17"/>
+    <p:sldId id="266" r:id="rId18"/>
   </p:sldIdLst>
   <p:sldSz cx="12188952" cy="6858000" type="screen4x3"/>
   <p:notesSz cx="6858000" cy="9144000"/>
@@ -511,7 +512,77 @@
           <a:lstStyle/>
           <a:p>
             <a:r>
-              <a:t>冒頭で参加者の自己紹介と本日のゴール確認を行う</a:t>
+              <a:t>冒頭で議論の全体像を共有し、資料の読み方を説明する</a:t>
+            </a:r>
+          </a:p>
+        </p:txBody>
+      </p:sp>
+      <p:sp>
+        <p:nvSpPr>
+          <p:cNvPr id="4" name="Slide Number Placeholder 3"/>
+          <p:cNvSpPr>
+            <a:spLocks noGrp="1"/>
+          </p:cNvSpPr>
+          <p:nvPr>
+            <p:ph type="sldNum" idx="5" sz="quarter"/>
+          </p:nvPr>
+        </p:nvSpPr>
+        <p:spPr/>
+      </p:sp>
+    </p:spTree>
+  </p:cSld>
+  <p:clrMapOvr>
+    <a:masterClrMapping/>
+  </p:clrMapOvr>
+</p:notes>
+</file>
+
+<file path=ppt/notesSlides/notesSlide10.xml><?xml version="1.0" encoding="utf-8"?>
+<p:notes xmlns:a="http://schemas.openxmlformats.org/drawingml/2006/main" xmlns:p="http://schemas.openxmlformats.org/presentationml/2006/main" xmlns:r="http://schemas.openxmlformats.org/officeDocument/2006/relationships">
+  <p:cSld>
+    <p:spTree>
+      <p:nvGrpSpPr>
+        <p:cNvPr id="1" name=""/>
+        <p:cNvGrpSpPr/>
+        <p:nvPr/>
+      </p:nvGrpSpPr>
+      <p:grpSpPr>
+        <a:xfrm>
+          <a:off x="0" y="0"/>
+          <a:ext cx="0" cy="0"/>
+          <a:chOff x="0" y="0"/>
+          <a:chExt cx="0" cy="0"/>
+        </a:xfrm>
+      </p:grpSpPr>
+      <p:sp>
+        <p:nvSpPr>
+          <p:cNvPr id="2" name="Slide Image Placeholder 1"/>
+          <p:cNvSpPr>
+            <a:spLocks noGrp="1"/>
+          </p:cNvSpPr>
+          <p:nvPr>
+            <p:ph type="sldImg" idx="2"/>
+          </p:nvPr>
+        </p:nvSpPr>
+        <p:spPr/>
+      </p:sp>
+      <p:sp>
+        <p:nvSpPr>
+          <p:cNvPr id="3" name="Notes Placeholder 2"/>
+          <p:cNvSpPr>
+            <a:spLocks noGrp="1"/>
+          </p:cNvSpPr>
+          <p:nvPr>
+            <p:ph type="body" idx="3" sz="quarter"/>
+          </p:nvPr>
+        </p:nvSpPr>
+        <p:spPr/>
+        <p:txBody>
+          <a:bodyPr/>
+          <a:lstStyle/>
+          <a:p>
+            <a:r>
+              <a:t>アクションオーナーと期限を明確にして次回MTGで進捗確認できるようにする</a:t>
             </a:r>
           </a:p>
         </p:txBody>
@@ -581,7 +652,7 @@
           <a:lstStyle/>
           <a:p>
             <a:r>
-              <a:t>CMG の事業規模（年間調査件数・社員数）をヒアリングして数値を更新する</a:t>
+              <a:t>CMGが自ら認識している事業シュリンクリスクを客観的に示す</a:t>
             </a:r>
           </a:p>
         </p:txBody>
@@ -651,7 +722,7 @@
           <a:lstStyle/>
           <a:p>
             <a:r>
-              <a:t>デモ動画を用意して実際の使用感を見せると効果的</a:t>
+              <a:t>CMGの中期経営計画「マーケティングDX」と直結していることを強調</a:t>
             </a:r>
           </a:p>
         </p:txBody>
@@ -721,7 +792,7 @@
           <a:lstStyle/>
           <a:p>
             <a:r>
-              <a:t>各部門の担当キーパーソンへの個別訴求ポイントを準備しておく</a:t>
+              <a:t>クライアント側の課題として、CMG経由でエンドユーザー企業の痛みポイントを示す</a:t>
             </a:r>
           </a:p>
         </p:txBody>
@@ -791,7 +862,7 @@
           <a:lstStyle/>
           <a:p>
             <a:r>
-              <a:t>CMG の実際の外注費・社員数を確認して数値を更新する</a:t>
+              <a:t>フロー図を別途用意して視覚的に説明できると効果的</a:t>
             </a:r>
           </a:p>
         </p:txBody>
@@ -861,7 +932,7 @@
           <a:lstStyle/>
           <a:p>
             <a:r>
-              <a:t>情報セキュリティ担当者が関与する場合は詳細資料を別途用意</a:t>
+              <a:t>セグメント比率はCMGの岡崎様発言（85%：15%）をそのまま引用</a:t>
             </a:r>
           </a:p>
         </p:txBody>
@@ -931,7 +1002,7 @@
           <a:lstStyle/>
           <a:p>
             <a:r>
-              <a:t>パイロット部門の選定についてヒアリングを行う</a:t>
+              <a:t>後戻りできない大規模開発を避け、スモールスタートで検証する方針</a:t>
             </a:r>
           </a:p>
         </p:txBody>
@@ -1001,7 +1072,7 @@
           <a:lstStyle/>
           <a:p>
             <a:r>
-              <a:t>CMG の規模には Business または Enterprise が最適。具体的な見積もりを次回提示予定</a:t>
+              <a:t>双方にとっての戦略的意義を対等に示すことで協業モチベーションを高める</a:t>
             </a:r>
           </a:p>
         </p:txBody>
@@ -1071,7 +1142,7 @@
           <a:lstStyle/>
           <a:p>
             <a:r>
-              <a:t>クロージング：本日中に担当者へトライアルアカウントを発行する旨を確認</a:t>
+              <a:t>予算感（数百万円規模）はCMG岡崎様の言及に基づく。次回MTGで具体化</a:t>
             </a:r>
           </a:p>
         </p:txBody>
@@ -4156,7 +4227,8 @@
                 </a:solidFill>
                 <a:latin typeface="Noto Sans"/>
               </a:rPr>
-              <a:t>Notta 導入提案書</a:t>
+              <a:t>Notta × クロスマーケティンググループ
+協業提案書</a:t>
             </a:r>
           </a:p>
         </p:txBody>
@@ -4232,8 +4304,7 @@
                 </a:solidFill>
                 <a:latin typeface="Noto Sans"/>
               </a:rPr>
-              <a:t>クロスマーケティンググループ様向け
-AI 文字起こし・議事録自動生成ソリューション
+              <a:t>音声データ起点の次世代リサーチプラットフォーム構想
 2026年3月</a:t>
             </a:r>
           </a:p>
@@ -4293,7 +4364,7 @@
                 </a:solidFill>
                 <a:latin typeface="Noto Sans"/>
               </a:rPr>
-              <a:t>次のステップ</a:t>
+              <a:t>PoC設計の方向性</a:t>
             </a:r>
           </a:p>
         </p:txBody>
@@ -4369,7 +4440,7 @@
                 </a:solidFill>
                 <a:latin typeface="Noto Sans"/>
               </a:rPr>
-              <a:t>まずは無料トライアルでリサーチ現場での効果を実感してください</a:t>
+              <a:t>数百万円規模の小さな投資で技術検証を完了し、双方がリスクを限定しながら協業の実現可能性を確認する</a:t>
             </a:r>
           </a:p>
         </p:txBody>
@@ -4383,16 +4454,18 @@
         <p:spPr>
           <a:xfrm>
             <a:off x="548640" y="1897380"/>
-            <a:ext cx="3587496" cy="4640580"/>
+            <a:ext cx="5463540" cy="2237994"/>
           </a:xfrm>
           <a:prstGeom prst="rect">
             <a:avLst/>
           </a:prstGeom>
           <a:solidFill>
-            <a:srgbClr val="F5F5F5"/>
+            <a:srgbClr val="FFFFFF"/>
           </a:solidFill>
-          <a:ln>
-            <a:noFill/>
+          <a:ln w="9525">
+            <a:solidFill>
+              <a:srgbClr val="E0E0E0"/>
+            </a:solidFill>
           </a:ln>
         </p:spPr>
         <p:style>
@@ -4426,7 +4499,7 @@
         <p:spPr>
           <a:xfrm>
             <a:off x="713232" y="2061972"/>
-            <a:ext cx="3258312" cy="347472"/>
+            <a:ext cx="5134356" cy="347472"/>
           </a:xfrm>
           <a:prstGeom prst="rect">
             <a:avLst/>
@@ -4445,7 +4518,7 @@
                 </a:solidFill>
                 <a:latin typeface="Noto Sans"/>
               </a:rPr>
-              <a:t>無料トライアル申込</a:t>
+              <a:t>検証対象フロー</a:t>
             </a:r>
           </a:p>
         </p:txBody>
@@ -4459,7 +4532,7 @@
         <p:spPr>
           <a:xfrm>
             <a:off x="713232" y="2446020"/>
-            <a:ext cx="3258312" cy="3927348"/>
+            <a:ext cx="5134356" cy="1524762"/>
           </a:xfrm>
           <a:prstGeom prst="rect">
             <a:avLst/>
@@ -4478,8 +4551,7 @@
                 </a:solidFill>
                 <a:latin typeface="Noto Sans"/>
               </a:rPr>
-              <a:t>14 日間・全機能無料トライアル。クレジットカード不要。
-本日中にアカウント発行可能</a:t>
+              <a:t>「会議音声 → Notta文字起こし → CMG調査設計AI → 秋雲配信」の一気通貫フローをプロトタイプ実装</a:t>
             </a:r>
           </a:p>
         </p:txBody>
@@ -4492,17 +4564,19 @@
         </p:nvSpPr>
         <p:spPr>
           <a:xfrm>
-            <a:off x="4300728" y="1897380"/>
-            <a:ext cx="3587496" cy="4640580"/>
+            <a:off x="6176772" y="1897380"/>
+            <a:ext cx="5463540" cy="2237994"/>
           </a:xfrm>
           <a:prstGeom prst="rect">
             <a:avLst/>
           </a:prstGeom>
           <a:solidFill>
-            <a:srgbClr val="F5F5F5"/>
+            <a:srgbClr val="FFFFFF"/>
           </a:solidFill>
-          <a:ln>
-            <a:noFill/>
+          <a:ln w="9525">
+            <a:solidFill>
+              <a:srgbClr val="E0E0E0"/>
+            </a:solidFill>
           </a:ln>
         </p:spPr>
         <p:style>
@@ -4535,8 +4609,8 @@
         </p:nvSpPr>
         <p:spPr>
           <a:xfrm>
-            <a:off x="4465320" y="2061972"/>
-            <a:ext cx="3258312" cy="347472"/>
+            <a:off x="6341364" y="2061972"/>
+            <a:ext cx="5134356" cy="347472"/>
           </a:xfrm>
           <a:prstGeom prst="rect">
             <a:avLst/>
@@ -4555,7 +4629,7 @@
                 </a:solidFill>
                 <a:latin typeface="Noto Sans"/>
               </a:rPr>
-              <a:t>パイロット設計ミーティング</a:t>
+              <a:t>CMG側の準備</a:t>
             </a:r>
           </a:p>
         </p:txBody>
@@ -4568,8 +4642,8 @@
         </p:nvSpPr>
         <p:spPr>
           <a:xfrm>
-            <a:off x="4465320" y="2446020"/>
-            <a:ext cx="3258312" cy="3927348"/>
+            <a:off x="6341364" y="2446020"/>
+            <a:ext cx="5134356" cy="1524762"/>
           </a:xfrm>
           <a:prstGeom prst="rect">
             <a:avLst/>
@@ -4588,7 +4662,8 @@
                 </a:solidFill>
                 <a:latin typeface="Noto Sans"/>
               </a:rPr>
-              <a:t>トライアル対象部門・KPI・ユースケースを確定する打合せを来週設定</a:t>
+              <a:t>・2つのプロダクト（秋雲・リサーチャー向けプロトタイプ）のデモを次回Notta側に共有
+・調査設計AIの入力仕様・出力仕様を整理</a:t>
             </a:r>
           </a:p>
         </p:txBody>
@@ -4601,17 +4676,19 @@
         </p:nvSpPr>
         <p:spPr>
           <a:xfrm>
-            <a:off x="8052816" y="1897380"/>
-            <a:ext cx="3587496" cy="4640580"/>
+            <a:off x="548640" y="4299966"/>
+            <a:ext cx="5463540" cy="2237994"/>
           </a:xfrm>
           <a:prstGeom prst="rect">
             <a:avLst/>
           </a:prstGeom>
           <a:solidFill>
-            <a:srgbClr val="F5F5F5"/>
+            <a:srgbClr val="FFFFFF"/>
           </a:solidFill>
-          <a:ln>
-            <a:noFill/>
+          <a:ln w="9525">
+            <a:solidFill>
+              <a:srgbClr val="E0E0E0"/>
+            </a:solidFill>
           </a:ln>
         </p:spPr>
         <p:style>
@@ -4644,8 +4721,8 @@
         </p:nvSpPr>
         <p:spPr>
           <a:xfrm>
-            <a:off x="8217408" y="2061972"/>
-            <a:ext cx="3258312" cy="347472"/>
+            <a:off x="713232" y="4464558"/>
+            <a:ext cx="5134356" cy="347472"/>
           </a:xfrm>
           <a:prstGeom prst="rect">
             <a:avLst/>
@@ -4664,7 +4741,7 @@
                 </a:solidFill>
                 <a:latin typeface="Noto Sans"/>
               </a:rPr>
-              <a:t>技術・セキュリティレビュー</a:t>
+              <a:t>Notta側の準備</a:t>
             </a:r>
           </a:p>
         </p:txBody>
@@ -4677,8 +4754,8 @@
         </p:nvSpPr>
         <p:spPr>
           <a:xfrm>
-            <a:off x="8217408" y="2446020"/>
-            <a:ext cx="3258312" cy="3927348"/>
+            <a:off x="713232" y="4848606"/>
+            <a:ext cx="5134356" cy="1524762"/>
           </a:xfrm>
           <a:prstGeom prst="rect">
             <a:avLst/>
@@ -4697,7 +4774,701 @@
                 </a:solidFill>
                 <a:latin typeface="Noto Sans"/>
               </a:rPr>
-              <a:t>IT / 情報セキュリティ部門向けの詳細資料・Q&amp;A セッションを別途実施</a:t>
+              <a:t>・CMGユースケース向けのプロンプトテンプレート設計
+・API出力フォーマット（JSON）の設計
+・Nottaブレインのカスタム設定オプション整備</a:t>
+            </a:r>
+          </a:p>
+        </p:txBody>
+      </p:sp>
+      <p:sp>
+        <p:nvSpPr>
+          <p:cNvPr id="14" name="Rectangle 13"/>
+          <p:cNvSpPr/>
+          <p:nvPr/>
+        </p:nvSpPr>
+        <p:spPr>
+          <a:xfrm>
+            <a:off x="6176772" y="4299966"/>
+            <a:ext cx="5463540" cy="2237994"/>
+          </a:xfrm>
+          <a:prstGeom prst="rect">
+            <a:avLst/>
+          </a:prstGeom>
+          <a:solidFill>
+            <a:srgbClr val="FFFFFF"/>
+          </a:solidFill>
+          <a:ln w="9525">
+            <a:solidFill>
+              <a:srgbClr val="E0E0E0"/>
+            </a:solidFill>
+          </a:ln>
+        </p:spPr>
+        <p:style>
+          <a:lnRef idx="1">
+            <a:schemeClr val="accent1"/>
+          </a:lnRef>
+          <a:fillRef idx="3">
+            <a:schemeClr val="accent1"/>
+          </a:fillRef>
+          <a:effectRef idx="2">
+            <a:schemeClr val="accent1"/>
+          </a:effectRef>
+          <a:fontRef idx="minor">
+            <a:schemeClr val="lt1"/>
+          </a:fontRef>
+        </p:style>
+        <p:txBody>
+          <a:bodyPr rtlCol="0" anchor="ctr"/>
+          <a:lstStyle/>
+          <a:p>
+            <a:pPr algn="ctr"/>
+          </a:p>
+        </p:txBody>
+      </p:sp>
+      <p:sp>
+        <p:nvSpPr>
+          <p:cNvPr id="15" name="TextBox 14"/>
+          <p:cNvSpPr txBox="1"/>
+          <p:nvPr/>
+        </p:nvSpPr>
+        <p:spPr>
+          <a:xfrm>
+            <a:off x="6341364" y="4464558"/>
+            <a:ext cx="5134356" cy="347472"/>
+          </a:xfrm>
+          <a:prstGeom prst="rect">
+            <a:avLst/>
+          </a:prstGeom>
+          <a:noFill/>
+        </p:spPr>
+        <p:txBody>
+          <a:bodyPr wrap="square"/>
+          <a:lstStyle/>
+          <a:p>
+            <a:pPr algn="l"/>
+            <a:r>
+              <a:rPr sz="1800" b="1">
+                <a:solidFill>
+                  <a:srgbClr val="2180FF"/>
+                </a:solidFill>
+                <a:latin typeface="Noto Sans"/>
+              </a:rPr>
+              <a:t>成功基準（KPI）</a:t>
+            </a:r>
+          </a:p>
+        </p:txBody>
+      </p:sp>
+      <p:sp>
+        <p:nvSpPr>
+          <p:cNvPr id="16" name="TextBox 15"/>
+          <p:cNvSpPr txBox="1"/>
+          <p:nvPr/>
+        </p:nvSpPr>
+        <p:spPr>
+          <a:xfrm>
+            <a:off x="6341364" y="4848606"/>
+            <a:ext cx="5134356" cy="1524762"/>
+          </a:xfrm>
+          <a:prstGeom prst="rect">
+            <a:avLst/>
+          </a:prstGeom>
+          <a:noFill/>
+        </p:spPr>
+        <p:txBody>
+          <a:bodyPr wrap="square"/>
+          <a:lstStyle/>
+          <a:p>
+            <a:pPr algn="l"/>
+            <a:r>
+              <a:rPr sz="1200" b="0">
+                <a:solidFill>
+                  <a:srgbClr val="262626"/>
+                </a:solidFill>
+                <a:latin typeface="Noto Sans"/>
+              </a:rPr>
+              <a:t>・調査設計リードタイム：現状比70%短縮
+・設問品質スコア：リサーチャー評価による
+・ユーザビリティ：マーケター層の操作完結率</a:t>
+            </a:r>
+          </a:p>
+        </p:txBody>
+      </p:sp>
+    </p:spTree>
+  </p:cSld>
+  <p:clrMapOvr>
+    <a:masterClrMapping/>
+  </p:clrMapOvr>
+</p:sld>
+</file>
+
+<file path=ppt/slides/slide11.xml><?xml version="1.0" encoding="utf-8"?>
+<p:sld xmlns:a="http://schemas.openxmlformats.org/drawingml/2006/main" xmlns:p="http://schemas.openxmlformats.org/presentationml/2006/main" xmlns:r="http://schemas.openxmlformats.org/officeDocument/2006/relationships">
+  <p:cSld>
+    <p:bg>
+      <p:bgPr>
+        <a:solidFill>
+          <a:srgbClr val="FFFFFF"/>
+        </a:solidFill>
+        <a:effectLst/>
+      </p:bgPr>
+    </p:bg>
+    <p:spTree>
+      <p:nvGrpSpPr>
+        <p:cNvPr id="1" name=""/>
+        <p:cNvGrpSpPr/>
+        <p:nvPr/>
+      </p:nvGrpSpPr>
+      <p:grpSpPr/>
+      <p:sp>
+        <p:nvSpPr>
+          <p:cNvPr id="2" name="TextBox 1"/>
+          <p:cNvSpPr txBox="1"/>
+          <p:nvPr/>
+        </p:nvSpPr>
+        <p:spPr>
+          <a:xfrm>
+            <a:off x="548640" y="320040"/>
+            <a:ext cx="11091672" cy="411480"/>
+          </a:xfrm>
+          <a:prstGeom prst="rect">
+            <a:avLst/>
+          </a:prstGeom>
+          <a:noFill/>
+        </p:spPr>
+        <p:txBody>
+          <a:bodyPr wrap="square"/>
+          <a:lstStyle/>
+          <a:p>
+            <a:pPr algn="l"/>
+            <a:r>
+              <a:rPr sz="1600" b="0">
+                <a:solidFill>
+                  <a:srgbClr val="2180FF"/>
+                </a:solidFill>
+                <a:latin typeface="Noto Sans"/>
+              </a:rPr>
+              <a:t>次のアクション</a:t>
+            </a:r>
+          </a:p>
+        </p:txBody>
+      </p:sp>
+      <p:sp>
+        <p:nvSpPr>
+          <p:cNvPr id="3" name="Rectangle 2"/>
+          <p:cNvSpPr/>
+          <p:nvPr/>
+        </p:nvSpPr>
+        <p:spPr>
+          <a:xfrm>
+            <a:off x="548640" y="841248"/>
+            <a:ext cx="11091672" cy="13716"/>
+          </a:xfrm>
+          <a:prstGeom prst="rect">
+            <a:avLst/>
+          </a:prstGeom>
+          <a:solidFill>
+            <a:srgbClr val="D0D0D0"/>
+          </a:solidFill>
+          <a:ln>
+            <a:noFill/>
+          </a:ln>
+        </p:spPr>
+        <p:style>
+          <a:lnRef idx="1">
+            <a:schemeClr val="accent1"/>
+          </a:lnRef>
+          <a:fillRef idx="3">
+            <a:schemeClr val="accent1"/>
+          </a:fillRef>
+          <a:effectRef idx="2">
+            <a:schemeClr val="accent1"/>
+          </a:effectRef>
+          <a:fontRef idx="minor">
+            <a:schemeClr val="lt1"/>
+          </a:fontRef>
+        </p:style>
+        <p:txBody>
+          <a:bodyPr rtlCol="0" anchor="ctr"/>
+          <a:lstStyle/>
+          <a:p>
+            <a:pPr algn="ctr"/>
+          </a:p>
+        </p:txBody>
+      </p:sp>
+      <p:sp>
+        <p:nvSpPr>
+          <p:cNvPr id="4" name="TextBox 3"/>
+          <p:cNvSpPr txBox="1"/>
+          <p:nvPr/>
+        </p:nvSpPr>
+        <p:spPr>
+          <a:xfrm>
+            <a:off x="548640" y="982980"/>
+            <a:ext cx="11091672" cy="685800"/>
+          </a:xfrm>
+          <a:prstGeom prst="rect">
+            <a:avLst/>
+          </a:prstGeom>
+          <a:noFill/>
+        </p:spPr>
+        <p:txBody>
+          <a:bodyPr wrap="square"/>
+          <a:lstStyle/>
+          <a:p>
+            <a:pPr algn="l"/>
+            <a:r>
+              <a:rPr sz="2000" b="1">
+                <a:solidFill>
+                  <a:srgbClr val="262626"/>
+                </a:solidFill>
+                <a:latin typeface="Noto Sans"/>
+              </a:rPr>
+              <a:t>4月頭のMTGまでに両社が準備を完了し、具体的なPoC設計・予算合意へ進む</a:t>
+            </a:r>
+          </a:p>
+        </p:txBody>
+      </p:sp>
+      <p:sp>
+        <p:nvSpPr>
+          <p:cNvPr id="5" name="Rectangle 4"/>
+          <p:cNvSpPr/>
+          <p:nvPr/>
+        </p:nvSpPr>
+        <p:spPr>
+          <a:xfrm>
+            <a:off x="548640" y="1897380"/>
+            <a:ext cx="5463540" cy="2237994"/>
+          </a:xfrm>
+          <a:prstGeom prst="rect">
+            <a:avLst/>
+          </a:prstGeom>
+          <a:solidFill>
+            <a:srgbClr val="FFFFFF"/>
+          </a:solidFill>
+          <a:ln w="9525">
+            <a:solidFill>
+              <a:srgbClr val="E0E0E0"/>
+            </a:solidFill>
+          </a:ln>
+        </p:spPr>
+        <p:style>
+          <a:lnRef idx="1">
+            <a:schemeClr val="accent1"/>
+          </a:lnRef>
+          <a:fillRef idx="3">
+            <a:schemeClr val="accent1"/>
+          </a:fillRef>
+          <a:effectRef idx="2">
+            <a:schemeClr val="accent1"/>
+          </a:effectRef>
+          <a:fontRef idx="minor">
+            <a:schemeClr val="lt1"/>
+          </a:fontRef>
+        </p:style>
+        <p:txBody>
+          <a:bodyPr rtlCol="0" anchor="ctr"/>
+          <a:lstStyle/>
+          <a:p>
+            <a:pPr algn="ctr"/>
+          </a:p>
+        </p:txBody>
+      </p:sp>
+      <p:sp>
+        <p:nvSpPr>
+          <p:cNvPr id="6" name="TextBox 5"/>
+          <p:cNvSpPr txBox="1"/>
+          <p:nvPr/>
+        </p:nvSpPr>
+        <p:spPr>
+          <a:xfrm>
+            <a:off x="713232" y="2061972"/>
+            <a:ext cx="5134356" cy="347472"/>
+          </a:xfrm>
+          <a:prstGeom prst="rect">
+            <a:avLst/>
+          </a:prstGeom>
+          <a:noFill/>
+        </p:spPr>
+        <p:txBody>
+          <a:bodyPr wrap="square"/>
+          <a:lstStyle/>
+          <a:p>
+            <a:pPr algn="l"/>
+            <a:r>
+              <a:rPr sz="1800" b="1">
+                <a:solidFill>
+                  <a:srgbClr val="2180FF"/>
+                </a:solidFill>
+                <a:latin typeface="Noto Sans"/>
+              </a:rPr>
+              <a:t>【CMG】プロダクトデモ準備</a:t>
+            </a:r>
+          </a:p>
+        </p:txBody>
+      </p:sp>
+      <p:sp>
+        <p:nvSpPr>
+          <p:cNvPr id="7" name="TextBox 6"/>
+          <p:cNvSpPr txBox="1"/>
+          <p:nvPr/>
+        </p:nvSpPr>
+        <p:spPr>
+          <a:xfrm>
+            <a:off x="713232" y="2446020"/>
+            <a:ext cx="5134356" cy="1524762"/>
+          </a:xfrm>
+          <a:prstGeom prst="rect">
+            <a:avLst/>
+          </a:prstGeom>
+          <a:noFill/>
+        </p:spPr>
+        <p:txBody>
+          <a:bodyPr wrap="square"/>
+          <a:lstStyle/>
+          <a:p>
+            <a:pPr algn="l"/>
+            <a:r>
+              <a:rPr sz="1200" b="0">
+                <a:solidFill>
+                  <a:srgbClr val="262626"/>
+                </a:solidFill>
+                <a:latin typeface="Noto Sans"/>
+              </a:rPr>
+              <a:t>秋雲・リサーチャー向けプロトタイプの画面デモをNotta側に共有。API連携の技術要件を整理（担当：岡崎様）</a:t>
+            </a:r>
+          </a:p>
+        </p:txBody>
+      </p:sp>
+      <p:sp>
+        <p:nvSpPr>
+          <p:cNvPr id="8" name="Rectangle 7"/>
+          <p:cNvSpPr/>
+          <p:nvPr/>
+        </p:nvSpPr>
+        <p:spPr>
+          <a:xfrm>
+            <a:off x="6176772" y="1897380"/>
+            <a:ext cx="5463540" cy="2237994"/>
+          </a:xfrm>
+          <a:prstGeom prst="rect">
+            <a:avLst/>
+          </a:prstGeom>
+          <a:solidFill>
+            <a:srgbClr val="FFFFFF"/>
+          </a:solidFill>
+          <a:ln w="9525">
+            <a:solidFill>
+              <a:srgbClr val="E0E0E0"/>
+            </a:solidFill>
+          </a:ln>
+        </p:spPr>
+        <p:style>
+          <a:lnRef idx="1">
+            <a:schemeClr val="accent1"/>
+          </a:lnRef>
+          <a:fillRef idx="3">
+            <a:schemeClr val="accent1"/>
+          </a:fillRef>
+          <a:effectRef idx="2">
+            <a:schemeClr val="accent1"/>
+          </a:effectRef>
+          <a:fontRef idx="minor">
+            <a:schemeClr val="lt1"/>
+          </a:fontRef>
+        </p:style>
+        <p:txBody>
+          <a:bodyPr rtlCol="0" anchor="ctr"/>
+          <a:lstStyle/>
+          <a:p>
+            <a:pPr algn="ctr"/>
+          </a:p>
+        </p:txBody>
+      </p:sp>
+      <p:sp>
+        <p:nvSpPr>
+          <p:cNvPr id="9" name="TextBox 8"/>
+          <p:cNvSpPr txBox="1"/>
+          <p:nvPr/>
+        </p:nvSpPr>
+        <p:spPr>
+          <a:xfrm>
+            <a:off x="6341364" y="2061972"/>
+            <a:ext cx="5134356" cy="347472"/>
+          </a:xfrm>
+          <a:prstGeom prst="rect">
+            <a:avLst/>
+          </a:prstGeom>
+          <a:noFill/>
+        </p:spPr>
+        <p:txBody>
+          <a:bodyPr wrap="square"/>
+          <a:lstStyle/>
+          <a:p>
+            <a:pPr algn="l"/>
+            <a:r>
+              <a:rPr sz="1800" b="1">
+                <a:solidFill>
+                  <a:srgbClr val="2180FF"/>
+                </a:solidFill>
+                <a:latin typeface="Noto Sans"/>
+              </a:rPr>
+              <a:t>【Notta】PoC提案書作成</a:t>
+            </a:r>
+          </a:p>
+        </p:txBody>
+      </p:sp>
+      <p:sp>
+        <p:nvSpPr>
+          <p:cNvPr id="10" name="TextBox 9"/>
+          <p:cNvSpPr txBox="1"/>
+          <p:nvPr/>
+        </p:nvSpPr>
+        <p:spPr>
+          <a:xfrm>
+            <a:off x="6341364" y="2446020"/>
+            <a:ext cx="5134356" cy="1524762"/>
+          </a:xfrm>
+          <a:prstGeom prst="rect">
+            <a:avLst/>
+          </a:prstGeom>
+          <a:noFill/>
+        </p:spPr>
+        <p:txBody>
+          <a:bodyPr wrap="square"/>
+          <a:lstStyle/>
+          <a:p>
+            <a:pPr algn="l"/>
+            <a:r>
+              <a:rPr sz="1200" b="0">
+                <a:solidFill>
+                  <a:srgbClr val="262626"/>
+                </a:solidFill>
+                <a:latin typeface="Noto Sans"/>
+              </a:rPr>
+              <a:t>本日の議論を踏まえたPoC設計書を作成。スコープ・工数・予算感・KPIを明記（担当：河野・奥寺）</a:t>
+            </a:r>
+          </a:p>
+        </p:txBody>
+      </p:sp>
+      <p:sp>
+        <p:nvSpPr>
+          <p:cNvPr id="11" name="Rectangle 10"/>
+          <p:cNvSpPr/>
+          <p:nvPr/>
+        </p:nvSpPr>
+        <p:spPr>
+          <a:xfrm>
+            <a:off x="548640" y="4299966"/>
+            <a:ext cx="5463540" cy="2237994"/>
+          </a:xfrm>
+          <a:prstGeom prst="rect">
+            <a:avLst/>
+          </a:prstGeom>
+          <a:solidFill>
+            <a:srgbClr val="FFFFFF"/>
+          </a:solidFill>
+          <a:ln w="9525">
+            <a:solidFill>
+              <a:srgbClr val="E0E0E0"/>
+            </a:solidFill>
+          </a:ln>
+        </p:spPr>
+        <p:style>
+          <a:lnRef idx="1">
+            <a:schemeClr val="accent1"/>
+          </a:lnRef>
+          <a:fillRef idx="3">
+            <a:schemeClr val="accent1"/>
+          </a:fillRef>
+          <a:effectRef idx="2">
+            <a:schemeClr val="accent1"/>
+          </a:effectRef>
+          <a:fontRef idx="minor">
+            <a:schemeClr val="lt1"/>
+          </a:fontRef>
+        </p:style>
+        <p:txBody>
+          <a:bodyPr rtlCol="0" anchor="ctr"/>
+          <a:lstStyle/>
+          <a:p>
+            <a:pPr algn="ctr"/>
+          </a:p>
+        </p:txBody>
+      </p:sp>
+      <p:sp>
+        <p:nvSpPr>
+          <p:cNvPr id="12" name="TextBox 11"/>
+          <p:cNvSpPr txBox="1"/>
+          <p:nvPr/>
+        </p:nvSpPr>
+        <p:spPr>
+          <a:xfrm>
+            <a:off x="713232" y="4464558"/>
+            <a:ext cx="5134356" cy="347472"/>
+          </a:xfrm>
+          <a:prstGeom prst="rect">
+            <a:avLst/>
+          </a:prstGeom>
+          <a:noFill/>
+        </p:spPr>
+        <p:txBody>
+          <a:bodyPr wrap="square"/>
+          <a:lstStyle/>
+          <a:p>
+            <a:pPr algn="l"/>
+            <a:r>
+              <a:rPr sz="1800" b="1">
+                <a:solidFill>
+                  <a:srgbClr val="2180FF"/>
+                </a:solidFill>
+                <a:latin typeface="Noto Sans"/>
+              </a:rPr>
+              <a:t>【双方】次回MTG設定</a:t>
+            </a:r>
+          </a:p>
+        </p:txBody>
+      </p:sp>
+      <p:sp>
+        <p:nvSpPr>
+          <p:cNvPr id="13" name="TextBox 12"/>
+          <p:cNvSpPr txBox="1"/>
+          <p:nvPr/>
+        </p:nvSpPr>
+        <p:spPr>
+          <a:xfrm>
+            <a:off x="713232" y="4848606"/>
+            <a:ext cx="5134356" cy="1524762"/>
+          </a:xfrm>
+          <a:prstGeom prst="rect">
+            <a:avLst/>
+          </a:prstGeom>
+          <a:noFill/>
+        </p:spPr>
+        <p:txBody>
+          <a:bodyPr wrap="square"/>
+          <a:lstStyle/>
+          <a:p>
+            <a:pPr algn="l"/>
+            <a:r>
+              <a:rPr sz="1200" b="0">
+                <a:solidFill>
+                  <a:srgbClr val="262626"/>
+                </a:solidFill>
+                <a:latin typeface="Noto Sans"/>
+              </a:rPr>
+              <a:t>4月第1週にPoC設計確認MTGを設定。技術担当者同士のテクニカルレビューも並行して実施</a:t>
+            </a:r>
+          </a:p>
+        </p:txBody>
+      </p:sp>
+      <p:sp>
+        <p:nvSpPr>
+          <p:cNvPr id="14" name="Rectangle 13"/>
+          <p:cNvSpPr/>
+          <p:nvPr/>
+        </p:nvSpPr>
+        <p:spPr>
+          <a:xfrm>
+            <a:off x="6176772" y="4299966"/>
+            <a:ext cx="5463540" cy="2237994"/>
+          </a:xfrm>
+          <a:prstGeom prst="rect">
+            <a:avLst/>
+          </a:prstGeom>
+          <a:solidFill>
+            <a:srgbClr val="FFFFFF"/>
+          </a:solidFill>
+          <a:ln w="9525">
+            <a:solidFill>
+              <a:srgbClr val="E0E0E0"/>
+            </a:solidFill>
+          </a:ln>
+        </p:spPr>
+        <p:style>
+          <a:lnRef idx="1">
+            <a:schemeClr val="accent1"/>
+          </a:lnRef>
+          <a:fillRef idx="3">
+            <a:schemeClr val="accent1"/>
+          </a:fillRef>
+          <a:effectRef idx="2">
+            <a:schemeClr val="accent1"/>
+          </a:effectRef>
+          <a:fontRef idx="minor">
+            <a:schemeClr val="lt1"/>
+          </a:fontRef>
+        </p:style>
+        <p:txBody>
+          <a:bodyPr rtlCol="0" anchor="ctr"/>
+          <a:lstStyle/>
+          <a:p>
+            <a:pPr algn="ctr"/>
+          </a:p>
+        </p:txBody>
+      </p:sp>
+      <p:sp>
+        <p:nvSpPr>
+          <p:cNvPr id="15" name="TextBox 14"/>
+          <p:cNvSpPr txBox="1"/>
+          <p:nvPr/>
+        </p:nvSpPr>
+        <p:spPr>
+          <a:xfrm>
+            <a:off x="6341364" y="4464558"/>
+            <a:ext cx="5134356" cy="347472"/>
+          </a:xfrm>
+          <a:prstGeom prst="rect">
+            <a:avLst/>
+          </a:prstGeom>
+          <a:noFill/>
+        </p:spPr>
+        <p:txBody>
+          <a:bodyPr wrap="square"/>
+          <a:lstStyle/>
+          <a:p>
+            <a:pPr algn="l"/>
+            <a:r>
+              <a:rPr sz="1800" b="1">
+                <a:solidFill>
+                  <a:srgbClr val="2180FF"/>
+                </a:solidFill>
+                <a:latin typeface="Noto Sans"/>
+              </a:rPr>
+              <a:t>【双方】社内稟議・予算確保</a:t>
+            </a:r>
+          </a:p>
+        </p:txBody>
+      </p:sp>
+      <p:sp>
+        <p:nvSpPr>
+          <p:cNvPr id="16" name="TextBox 15"/>
+          <p:cNvSpPr txBox="1"/>
+          <p:nvPr/>
+        </p:nvSpPr>
+        <p:spPr>
+          <a:xfrm>
+            <a:off x="6341364" y="4848606"/>
+            <a:ext cx="5134356" cy="1524762"/>
+          </a:xfrm>
+          <a:prstGeom prst="rect">
+            <a:avLst/>
+          </a:prstGeom>
+          <a:noFill/>
+        </p:spPr>
+        <p:txBody>
+          <a:bodyPr wrap="square"/>
+          <a:lstStyle/>
+          <a:p>
+            <a:pPr algn="l"/>
+            <a:r>
+              <a:rPr sz="1200" b="0">
+                <a:solidFill>
+                  <a:srgbClr val="262626"/>
+                </a:solidFill>
+                <a:latin typeface="Noto Sans"/>
+              </a:rPr>
+              <a:t>PoC実施に向けた社内承認プロセスを開始。Notta側は開発リソースの確保、CMG側は新規事業予算の確認</a:t>
             </a:r>
           </a:p>
         </p:txBody>
@@ -4756,7 +5527,7 @@
                 </a:solidFill>
                 <a:latin typeface="Noto Sans"/>
               </a:rPr>
-              <a:t>本日のアジェンダ</a:t>
+              <a:t>本日の議論サマリー</a:t>
             </a:r>
           </a:p>
         </p:txBody>
@@ -4832,7 +5603,7 @@
                 </a:solidFill>
                 <a:latin typeface="Noto Sans"/>
               </a:rPr>
-              <a:t>Notta が CMG の業務効率化と情報活用をどう変えるかをご提案します</a:t>
+              <a:t>50分の議論を通じ、音声データを起点とした「リサーチ自動化フロー」の方向性が合致。次回PoC設計へ進む</a:t>
             </a:r>
           </a:p>
         </p:txBody>
@@ -4910,7 +5681,7 @@
                 </a:solidFill>
                 <a:latin typeface="Noto Sans"/>
               </a:rPr>
-              <a:t>01　課題の整理</a:t>
+              <a:t>課題認識の一致</a:t>
             </a:r>
           </a:p>
         </p:txBody>
@@ -4943,7 +5714,7 @@
                 </a:solidFill>
                 <a:latin typeface="Noto Sans"/>
               </a:rPr>
-              <a:t>CMG が抱える会議・リサーチ業務の非効率ポイントを確認</a:t>
+              <a:t>CMGの調査業務における人手依存・属人化・長いリードタイムについて認識が共有された</a:t>
             </a:r>
           </a:p>
         </p:txBody>
@@ -5021,7 +5792,7 @@
                 </a:solidFill>
                 <a:latin typeface="Noto Sans"/>
               </a:rPr>
-              <a:t>02　Notta ソリューション</a:t>
+              <a:t>協業スコープの絞り込み</a:t>
             </a:r>
           </a:p>
         </p:txBody>
@@ -5054,7 +5825,7 @@
                 </a:solidFill>
                 <a:latin typeface="Noto Sans"/>
               </a:rPr>
-              <a:t>AI 文字起こし・要約・翻訳機能のご紹介</a:t>
+              <a:t>「会議音声 → 調査設計AI → アンケート配信」のフロー連携をミニマムスコープとして合意</a:t>
             </a:r>
           </a:p>
         </p:txBody>
@@ -5132,7 +5903,7 @@
                 </a:solidFill>
                 <a:latin typeface="Noto Sans"/>
               </a:rPr>
-              <a:t>03　導入効果・ROI</a:t>
+              <a:t>インターフェース方針</a:t>
             </a:r>
           </a:p>
         </p:txBody>
@@ -5165,7 +5936,7 @@
                 </a:solidFill>
                 <a:latin typeface="Noto Sans"/>
               </a:rPr>
-              <a:t>時間削減・品質向上・コスト試算</a:t>
+              <a:t>NottaのUI/UXをそのままクライアントに提供し、データ連携はAPI経由で行うモデルに合意</a:t>
             </a:r>
           </a:p>
         </p:txBody>
@@ -5243,7 +6014,7 @@
                 </a:solidFill>
                 <a:latin typeface="Noto Sans"/>
               </a:rPr>
-              <a:t>04　導入ステップ</a:t>
+              <a:t>次のアクション</a:t>
             </a:r>
           </a:p>
         </p:txBody>
@@ -5276,7 +6047,7 @@
                 </a:solidFill>
                 <a:latin typeface="Noto Sans"/>
               </a:rPr>
-              <a:t>パイロット導入から全社展開までのロードマップ</a:t>
+              <a:t>4月頭に両社プロダクトのデモ・要件整理MTGを設定。PoC予算感も含めて議論</a:t>
             </a:r>
           </a:p>
         </p:txBody>
@@ -5335,7 +6106,7 @@
                 </a:solidFill>
                 <a:latin typeface="Noto Sans"/>
               </a:rPr>
-              <a:t>CMG の現状課題</a:t>
+              <a:t>CMGを取り巻く市場環境</a:t>
             </a:r>
           </a:p>
         </p:txBody>
@@ -5411,7 +6182,7 @@
                 </a:solidFill>
                 <a:latin typeface="Noto Sans"/>
               </a:rPr>
-              <a:t>年間数千件の調査・面談で発生する「記録コスト」が業務全体の生産性を圧迫している</a:t>
+              <a:t>従来型リサーチ市場はAI・XMプラットフォームの台頭でシュリンク局面へ。プラットフォームへの転換が急務</a:t>
             </a:r>
           </a:p>
         </p:txBody>
@@ -5489,7 +6260,7 @@
                 </a:solidFill>
                 <a:latin typeface="Noto Sans"/>
               </a:rPr>
-              <a:t>手動議事録の工数</a:t>
+              <a:t>定量調査のセルフ化加速</a:t>
             </a:r>
           </a:p>
         </p:txBody>
@@ -5522,7 +6293,7 @@
                 </a:solidFill>
                 <a:latin typeface="Noto Sans"/>
               </a:rPr>
-              <a:t>1時間の面談につき平均 30〜60 分の清書時間が発生。月換算で数十時間のロス</a:t>
+              <a:t>Qualtrics等のXMプラットフォームが国内でも拡大。従来の受託アドホック調査のシェアが低下局面に入っている</a:t>
             </a:r>
           </a:p>
         </p:txBody>
@@ -5600,7 +6371,7 @@
                 </a:solidFill>
                 <a:latin typeface="Noto Sans"/>
               </a:rPr>
-              <a:t>情報の属人化</a:t>
+              <a:t>定性調査にも「速さ×深さ」要求</a:t>
             </a:r>
           </a:p>
         </p:txBody>
@@ -5633,7 +6404,7 @@
                 </a:solidFill>
                 <a:latin typeface="Noto Sans"/>
               </a:rPr>
-              <a:t>担当者が異なると記録の粒度や表現にばらつき。ナレッジ共有が困難</a:t>
+              <a:t>FGI・IDIの結果を待つ余裕がなくなり、リアルタイムに近い意思決定インサイトが求められている</a:t>
             </a:r>
           </a:p>
         </p:txBody>
@@ -5711,7 +6482,7 @@
                 </a:solidFill>
                 <a:latin typeface="Noto Sans"/>
               </a:rPr>
-              <a:t>多言語対応コスト</a:t>
+              <a:t>AIが調査設計を代替し始めた</a:t>
             </a:r>
           </a:p>
         </p:txBody>
@@ -5744,7 +6515,7 @@
                 </a:solidFill>
                 <a:latin typeface="Noto Sans"/>
               </a:rPr>
-              <a:t>海外クライアント案件での翻訳依頼に都度コストが発生</a:t>
+              <a:t>CMG社内検証でも「10年のリサーチャーと同水準の調査設計」をAIが実現。高付加価値領域のAI代替が現実化</a:t>
             </a:r>
           </a:p>
         </p:txBody>
@@ -5822,7 +6593,7 @@
                 </a:solidFill>
                 <a:latin typeface="Noto Sans"/>
               </a:rPr>
-              <a:t>データ活用の機会損失</a:t>
+              <a:t>リードタイムへの圧力</a:t>
             </a:r>
           </a:p>
         </p:txBody>
@@ -5855,7 +6626,7 @@
                 </a:solidFill>
                 <a:latin typeface="Noto Sans"/>
               </a:rPr>
-              <a:t>録音・テキストが整備されていないため、過去案件のインサイト再利用ができていない</a:t>
+              <a:t>調査企画から納品まで7ステップ以上・数週間を要する現状に対し、クライアントの意思決定スピードは加速。構造的なミスマッチ</a:t>
             </a:r>
           </a:p>
         </p:txBody>
@@ -5914,7 +6685,7 @@
                 </a:solidFill>
                 <a:latin typeface="Noto Sans"/>
               </a:rPr>
-              <a:t>Notta とは</a:t>
+              <a:t>CMGの戦略的方向性</a:t>
             </a:r>
           </a:p>
         </p:txBody>
@@ -5990,7 +6761,7 @@
                 </a:solidFill>
                 <a:latin typeface="Noto Sans"/>
               </a:rPr>
-              <a:t>世界 100 カ国・700 万ユーザーが利用する、音声→テキスト→インサイト変換の AI プラットフォーム</a:t>
+              <a:t>受託リサーチからリサーチ・プラットフォームへ。クライアントの意思決定全プロセスを自動化する「国産XM」を目指す</a:t>
             </a:r>
           </a:p>
         </p:txBody>
@@ -6068,7 +6839,7 @@
                 </a:solidFill>
                 <a:latin typeface="Noto Sans"/>
               </a:rPr>
-              <a:t>リアルタイム文字起こし</a:t>
+              <a:t>コンパウンドプロダクト戦略</a:t>
             </a:r>
           </a:p>
         </p:txBody>
@@ -6101,7 +6872,7 @@
                 </a:solidFill>
                 <a:latin typeface="Noto Sans"/>
               </a:rPr>
-              <a:t>Zoom / Teams / Google Meet と連携。話しながらその場でテキスト化。精度 95% 以上（日本語）</a:t>
+              <a:t>「秋雲（セルフアンケート）」「リサーチャー向けプロダクト（プロト完成）」「顧客ポータル」を統合したプラットフォームへ</a:t>
             </a:r>
           </a:p>
         </p:txBody>
@@ -6179,7 +6950,7 @@
                 </a:solidFill>
                 <a:latin typeface="Noto Sans"/>
               </a:rPr>
-              <a:t>AI 要約・議事録生成</a:t>
+              <a:t>調査プロセスの自動化</a:t>
             </a:r>
           </a:p>
         </p:txBody>
@@ -6212,7 +6983,7 @@
                 </a:solidFill>
                 <a:latin typeface="Noto Sans"/>
               </a:rPr>
-              <a:t>会議終了後 1 分で要約・アクションアイテム・決定事項を自動抽出</a:t>
+              <a:t>現状7ステップ（課題認識→仮説化→調査設計→配信→回収→分析→レポート）を「設計確認」「結果確認」の2ステップに圧縮</a:t>
             </a:r>
           </a:p>
         </p:txBody>
@@ -6290,7 +7061,7 @@
                 </a:solidFill>
                 <a:latin typeface="Noto Sans"/>
               </a:rPr>
-              <a:t>58 言語対応・翻訳</a:t>
+              <a:t>グループ30社への横展開</a:t>
             </a:r>
           </a:p>
         </p:txBody>
@@ -6323,7 +7094,7 @@
                 </a:solidFill>
                 <a:latin typeface="Noto Sans"/>
               </a:rPr>
-              <a:t>日英中韓など 58 言語の文字起こし・翻訳に対応。グローバル案件もワンストップ</a:t>
+              <a:t>子会社30社にわたるグループ会社のナレッジ・データを統合し、横断的な競争優位を構築</a:t>
             </a:r>
           </a:p>
         </p:txBody>
@@ -6401,7 +7172,7 @@
                 </a:solidFill>
                 <a:latin typeface="Noto Sans"/>
               </a:rPr>
-              <a:t>チーム共有・検索</a:t>
+              <a:t>収益モデルの転換</a:t>
             </a:r>
           </a:p>
         </p:txBody>
@@ -6434,7 +7205,7 @@
                 </a:solidFill>
                 <a:latin typeface="Noto Sans"/>
               </a:rPr>
-              <a:t>全録音・テキストをクラウド保管。キーワード検索で過去案件を即座に参照可能</a:t>
+              <a:t>単発受託（数十万〜100万円）からSaaSプラットフォーム型の継続収益へ。クライアントの自走化を支援する新たなマネタイズ軸</a:t>
             </a:r>
           </a:p>
         </p:txBody>
@@ -6493,7 +7264,7 @@
                 </a:solidFill>
                 <a:latin typeface="Noto Sans"/>
               </a:rPr>
-              <a:t>CMG × Notta：主な活用シーン</a:t>
+              <a:t>CMGの現場課題：音声データ周辺のボトルネック</a:t>
             </a:r>
           </a:p>
         </p:txBody>
@@ -6569,7 +7340,7 @@
                 </a:solidFill>
                 <a:latin typeface="Noto Sans"/>
               </a:rPr>
-              <a:t>リサーチ・営業・コーポレートの全部門で導入効果が見込める</a:t>
+              <a:t>調査の最上流「会議・ブリーフィング」のデータが構造化されないまま失われ、下流全体の品質とスピードを制約している</a:t>
             </a:r>
           </a:p>
         </p:txBody>
@@ -6647,7 +7418,7 @@
                 </a:solidFill>
                 <a:latin typeface="Noto Sans"/>
               </a:rPr>
-              <a:t>定性調査（FGI・IDI）</a:t>
+              <a:t>会議データが分断・消滅</a:t>
             </a:r>
           </a:p>
         </p:txBody>
@@ -6680,7 +7451,7 @@
                 </a:solidFill>
                 <a:latin typeface="Noto Sans"/>
               </a:rPr>
-              <a:t>インタビュー音声を自動文字起こし→コーダー工数を大幅削減。テープ起こし外注費の内製化</a:t>
+              <a:t>商品企画会議・クライアントブリーフィングはGoogle Meet等で実施されるが、音声データは蓄積されず意思決定の文脈が失われる</a:t>
             </a:r>
           </a:p>
         </p:txBody>
@@ -6758,7 +7529,7 @@
                 </a:solidFill>
                 <a:latin typeface="Noto Sans"/>
               </a:rPr>
-              <a:t>クライアント面談・提案</a:t>
+              <a:t>調査設計の属人化</a:t>
             </a:r>
           </a:p>
         </p:txBody>
@@ -6791,7 +7562,7 @@
                 </a:solidFill>
                 <a:latin typeface="Noto Sans"/>
               </a:rPr>
-              <a:t>商談録音→要約を即日共有。営業レポート作成時間を 70% 削減</a:t>
+              <a:t>録音→文字起こし→分析→コーディングの各工程が担当者依存。品質・スピードにばらつきが生じている</a:t>
             </a:r>
           </a:p>
         </p:txBody>
@@ -6869,7 +7640,7 @@
                 </a:solidFill>
                 <a:latin typeface="Noto Sans"/>
               </a:rPr>
-              <a:t>社内会議・プロジェクト管理</a:t>
+              <a:t>調査票の質が不安定</a:t>
             </a:r>
           </a:p>
         </p:txBody>
@@ -6902,7 +7673,7 @@
                 </a:solidFill>
                 <a:latin typeface="Noto Sans"/>
               </a:rPr>
-              <a:t>議事録の作成・共有・検索を自動化。情報共有ミスをゼロに</a:t>
+              <a:t>マーケター・新規事業担当はリサーチの専門家ではないため、聞きたいことが適切に質問化できていないケースが多い</a:t>
             </a:r>
           </a:p>
         </p:txBody>
@@ -6980,7 +7751,7 @@
                 </a:solidFill>
                 <a:latin typeface="Noto Sans"/>
               </a:rPr>
-              <a:t>海外案件・グローバル連携</a:t>
+              <a:t>上流の意思決定のベクトルズレ</a:t>
             </a:r>
           </a:p>
         </p:txBody>
@@ -7013,7 +7784,7 @@
                 </a:solidFill>
                 <a:latin typeface="Noto Sans"/>
               </a:rPr>
-              <a:t>多言語文字起こしで海外クライアントとのコミュニケーションコストを削減</a:t>
+              <a:t>部長以上が求めるインサイトと、下流で設計された調査票のベクトルがずれて納品されるケースが頻発</a:t>
             </a:r>
           </a:p>
         </p:txBody>
@@ -7072,7 +7843,7 @@
                 </a:solidFill>
                 <a:latin typeface="Noto Sans"/>
               </a:rPr>
-              <a:t>導入効果・ROI シミュレーション</a:t>
+              <a:t>協業で実現する「音声起点リサーチ自動化フロー」</a:t>
             </a:r>
           </a:p>
         </p:txBody>
@@ -7148,7 +7919,7 @@
                 </a:solidFill>
                 <a:latin typeface="Noto Sans"/>
               </a:rPr>
-              <a:t>100 名導入で年間約 2,400 時間・1,200 万円相当の工数削減効果が見込める</a:t>
+              <a:t>会議の音声データをNottaが構造化し、CMGの調査設計AIに渡すことで、ミーティング終了即・調査設計完成を実現する</a:t>
             </a:r>
           </a:p>
         </p:txBody>
@@ -7226,7 +7997,7 @@
                 </a:solidFill>
                 <a:latin typeface="Noto Sans"/>
               </a:rPr>
-              <a:t>議事録作成工数</a:t>
+              <a:t>STEP 1｜音声取得・構造化（Notta）</a:t>
             </a:r>
           </a:p>
         </p:txBody>
@@ -7259,8 +8030,7 @@
                 </a:solidFill>
                 <a:latin typeface="Noto Sans"/>
               </a:rPr>
-              <a:t>1人あたり月 4 時間削減 × 100名 = 月 400 時間削減
-（時給 5,000 円換算で月 200 万円相当）</a:t>
+              <a:t>クライアントの商品企画会議・ブリーフィングをNottaで録音→高精度日本語ASRで文字起こし→話者分離・要約・示唆抽出</a:t>
             </a:r>
           </a:p>
         </p:txBody>
@@ -7338,7 +8108,7 @@
                 </a:solidFill>
                 <a:latin typeface="Noto Sans"/>
               </a:rPr>
-              <a:t>テープ起こし外注費</a:t>
+              <a:t>STEP 2｜調査設計AI連携（CMG）</a:t>
             </a:r>
           </a:p>
         </p:txBody>
@@ -7371,8 +8141,7 @@
                 </a:solidFill>
                 <a:latin typeface="Noto Sans"/>
               </a:rPr>
-              <a:t>年間外注費の最大 80% を内製化。
-仮に年 300 万円の外注費なら → 240 万円削減</a:t>
+              <a:t>Nottaが出力したテキスト/JSONをCMGの調査設計AIに渡し、調査手法・設問・分岐ロジックを自動生成。人間は「承認」のみ</a:t>
             </a:r>
           </a:p>
         </p:txBody>
@@ -7450,7 +8219,7 @@
                 </a:solidFill>
                 <a:latin typeface="Noto Sans"/>
               </a:rPr>
-              <a:t>翻訳コスト削減</a:t>
+              <a:t>STEP 3｜配信・回収（CMG「秋雲」等）</a:t>
             </a:r>
           </a:p>
         </p:txBody>
@@ -7483,8 +8252,7 @@
                 </a:solidFill>
                 <a:latin typeface="Noto Sans"/>
               </a:rPr>
-              <a:t>AI 翻訳機能活用で翻訳依頼件数を 50% 削減。
-年間 100 万円規模のコスト圧縮</a:t>
+              <a:t>設計済みアンケートをMA/秋雲で自動配信。N数確保・回収も自動化。インターフェースはCMGの既存サービスをそのまま活用</a:t>
             </a:r>
           </a:p>
         </p:txBody>
@@ -7562,7 +8330,7 @@
                 </a:solidFill>
                 <a:latin typeface="Noto Sans"/>
               </a:rPr>
-              <a:t>Notta 年間費用（試算）</a:t>
+              <a:t>STEP 4｜レポート・意思決定（クライアント）</a:t>
             </a:r>
           </a:p>
         </p:txBody>
@@ -7595,9 +8363,7 @@
                 </a:solidFill>
                 <a:latin typeface="Noto Sans"/>
               </a:rPr>
-              <a:t>Business プラン：¥2,200/月/名 × 100名
-= 年間 264 万円
-→ ROI は初年度から黒字化</a:t>
+              <a:t>回答データからLLMがレポートのたたき台を自動生成。クライアントが確認・意思決定→次の企画サイクルへ即座に移行</a:t>
             </a:r>
           </a:p>
         </p:txBody>
@@ -7656,7 +8422,7 @@
                 </a:solidFill>
                 <a:latin typeface="Noto Sans"/>
               </a:rPr>
-              <a:t>セキュリティ・コンプライアンス</a:t>
+              <a:t>ユーザーセグメント別の価値提供</a:t>
             </a:r>
           </a:p>
         </p:txBody>
@@ -7732,7 +8498,7 @@
                 </a:solidFill>
                 <a:latin typeface="Noto Sans"/>
               </a:rPr>
-              <a:t>機密性の高いリサーチデータも安心して預けられるエンタープライズグレードのセキュリティ</a:t>
+              <a:t>85%の「自動化ニーズ」層と15%の「コントロールニーズ」層に対し、テンプレートとカスタム設定で対応を分ける</a:t>
             </a:r>
           </a:p>
         </p:txBody>
@@ -7810,7 +8576,7 @@
                 </a:solidFill>
                 <a:latin typeface="Noto Sans"/>
               </a:rPr>
-              <a:t>データ暗号化</a:t>
+              <a:t>85%｜マーケター・新規事業担当</a:t>
             </a:r>
           </a:p>
         </p:txBody>
@@ -7843,7 +8609,7 @@
                 </a:solidFill>
                 <a:latin typeface="Noto Sans"/>
               </a:rPr>
-              <a:t>転送・保存ともに AES-256 暗号化。通信は TLS 1.2 以上</a:t>
+              <a:t>調査のプロではない層。「目的・背景・経緯を入力したら調査設計が自動完成」を求める。テンプレート化されたフローで完全自動化</a:t>
             </a:r>
           </a:p>
         </p:txBody>
@@ -7921,7 +8687,7 @@
                 </a:solidFill>
                 <a:latin typeface="Noto Sans"/>
               </a:rPr>
-              <a:t>アクセス制御</a:t>
+              <a:t>15%｜リサーチャー・コンサル上位層</a:t>
             </a:r>
           </a:p>
         </p:txBody>
@@ -7954,7 +8720,7 @@
                 </a:solidFill>
                 <a:latin typeface="Noto Sans"/>
               </a:rPr>
-              <a:t>ロールベースアクセス管理（RBAC）。部門・プロジェクト単位での権限設定が可能</a:t>
+              <a:t>仮説検証のプロ。LLMのアウトプットに対して自ら仮説を立てて検証したい。Nottaブレインのプロンプトカスタマイズで対応</a:t>
             </a:r>
           </a:p>
         </p:txBody>
@@ -8032,7 +8798,7 @@
                 </a:solidFill>
                 <a:latin typeface="Noto Sans"/>
               </a:rPr>
-              <a:t>個人情報保護</a:t>
+              <a:t>Notta側のプロンプトテンプレ活用</a:t>
             </a:r>
           </a:p>
         </p:txBody>
@@ -8065,7 +8831,7 @@
                 </a:solidFill>
                 <a:latin typeface="Noto Sans"/>
               </a:rPr>
-              <a:t>GDPR・個人情報保護法に準拠。データの保存地域（日本/米国）を選択可能</a:t>
+              <a:t>CMGリサーチャーが設計済みのプロンプトテンプレートをNottaブレインに組み込み、アウトプットの方向性・粒度を標準化</a:t>
             </a:r>
           </a:p>
         </p:txBody>
@@ -8143,7 +8909,7 @@
                 </a:solidFill>
                 <a:latin typeface="Noto Sans"/>
               </a:rPr>
-              <a:t>SOC2 Type II 認証</a:t>
+              <a:t>過去データによる品質担保</a:t>
             </a:r>
           </a:p>
         </p:txBody>
@@ -8176,7 +8942,7 @@
                 </a:solidFill>
                 <a:latin typeface="Noto Sans"/>
               </a:rPr>
-              <a:t>第三者機関によるセキュリティ監査済み。エンタープライズ契約では NDA・DPA も締結可能</a:t>
+              <a:t>CMGが保有する過去調査テキストデータをRAG的に活用。「同種調査ならこの設計が有効」という経験則をAIに継承</a:t>
             </a:r>
           </a:p>
         </p:txBody>
@@ -8235,7 +9001,7 @@
                 </a:solidFill>
                 <a:latin typeface="Noto Sans"/>
               </a:rPr>
-              <a:t>導入ステップ</a:t>
+              <a:t>インターフェース・技術連携方針</a:t>
             </a:r>
           </a:p>
         </p:txBody>
@@ -8311,7 +9077,7 @@
                 </a:solidFill>
                 <a:latin typeface="Noto Sans"/>
               </a:rPr>
-              <a:t>最短 2 週間のパイロットから始め、3 ヶ月で全社展開を実現するロードマップ</a:t>
+              <a:t>NottaのUI/UXをそのままクライアントに提供。CMGはAPIでデータを受け取り後工程を自走させるエコシステム型連携</a:t>
             </a:r>
           </a:p>
         </p:txBody>
@@ -8325,16 +9091,18 @@
         <p:spPr>
           <a:xfrm>
             <a:off x="548640" y="1897380"/>
-            <a:ext cx="3587496" cy="4640580"/>
+            <a:ext cx="5463540" cy="2237994"/>
           </a:xfrm>
           <a:prstGeom prst="rect">
             <a:avLst/>
           </a:prstGeom>
           <a:solidFill>
-            <a:srgbClr val="F5F5F5"/>
+            <a:srgbClr val="FFFFFF"/>
           </a:solidFill>
-          <a:ln>
-            <a:noFill/>
+          <a:ln w="9525">
+            <a:solidFill>
+              <a:srgbClr val="E0E0E0"/>
+            </a:solidFill>
           </a:ln>
         </p:spPr>
         <p:style>
@@ -8368,7 +9136,7 @@
         <p:spPr>
           <a:xfrm>
             <a:off x="713232" y="2061972"/>
-            <a:ext cx="3258312" cy="347472"/>
+            <a:ext cx="5134356" cy="347472"/>
           </a:xfrm>
           <a:prstGeom prst="rect">
             <a:avLst/>
@@ -8387,7 +9155,7 @@
                 </a:solidFill>
                 <a:latin typeface="Noto Sans"/>
               </a:rPr>
-              <a:t>Phase 1｜パイロット導入（〜1ヶ月）</a:t>
+              <a:t>UI：Notta as Front-end</a:t>
             </a:r>
           </a:p>
         </p:txBody>
@@ -8401,7 +9169,7 @@
         <p:spPr>
           <a:xfrm>
             <a:off x="713232" y="2446020"/>
-            <a:ext cx="3258312" cy="3927348"/>
+            <a:ext cx="5134356" cy="1524762"/>
           </a:xfrm>
           <a:prstGeom prst="rect">
             <a:avLst/>
@@ -8420,7 +9188,7 @@
                 </a:solidFill>
                 <a:latin typeface="Noto Sans"/>
               </a:rPr>
-              <a:t>対象部門 10〜20 名でトライアル実施。使用感・業務フィット確認。導入サポート・トレーニング提供</a:t>
+              <a:t>クライアントはNottaをそのまま使用。CMGが独自UIを開発するコストを削減し、Nottaの既存ユーザーベースもそのまま活用可能</a:t>
             </a:r>
           </a:p>
         </p:txBody>
@@ -8433,17 +9201,19 @@
         </p:nvSpPr>
         <p:spPr>
           <a:xfrm>
-            <a:off x="4300728" y="1897380"/>
-            <a:ext cx="3587496" cy="4640580"/>
+            <a:off x="6176772" y="1897380"/>
+            <a:ext cx="5463540" cy="2237994"/>
           </a:xfrm>
           <a:prstGeom prst="rect">
             <a:avLst/>
           </a:prstGeom>
           <a:solidFill>
-            <a:srgbClr val="F5F5F5"/>
+            <a:srgbClr val="FFFFFF"/>
           </a:solidFill>
-          <a:ln>
-            <a:noFill/>
+          <a:ln w="9525">
+            <a:solidFill>
+              <a:srgbClr val="E0E0E0"/>
+            </a:solidFill>
           </a:ln>
         </p:spPr>
         <p:style>
@@ -8476,8 +9246,8 @@
         </p:nvSpPr>
         <p:spPr>
           <a:xfrm>
-            <a:off x="4465320" y="2061972"/>
-            <a:ext cx="3258312" cy="347472"/>
+            <a:off x="6341364" y="2061972"/>
+            <a:ext cx="5134356" cy="347472"/>
           </a:xfrm>
           <a:prstGeom prst="rect">
             <a:avLst/>
@@ -8496,7 +9266,7 @@
                 </a:solidFill>
                 <a:latin typeface="Noto Sans"/>
               </a:rPr>
-              <a:t>Phase 2｜効果測定・最適化（2ヶ月目）</a:t>
+              <a:t>データ連携：API/データ出力</a:t>
             </a:r>
           </a:p>
         </p:txBody>
@@ -8509,8 +9279,8 @@
         </p:nvSpPr>
         <p:spPr>
           <a:xfrm>
-            <a:off x="4465320" y="2446020"/>
-            <a:ext cx="3258312" cy="3927348"/>
+            <a:off x="6341364" y="2446020"/>
+            <a:ext cx="5134356" cy="1524762"/>
           </a:xfrm>
           <a:prstGeom prst="rect">
             <a:avLst/>
@@ -8529,7 +9299,7 @@
                 </a:solidFill>
                 <a:latin typeface="Noto Sans"/>
               </a:rPr>
-              <a:t>KPI（時間削減・満足度）を計測。ワークフロー・テンプレートをカスタマイズ</a:t>
+              <a:t>NottaがテキストデータをAPI・JSONで出力→CMGの調査設計AI・秋雲・顧客ポータルに連携。後工程はCMG側システムが自律稼働</a:t>
             </a:r>
           </a:p>
         </p:txBody>
@@ -8542,17 +9312,19 @@
         </p:nvSpPr>
         <p:spPr>
           <a:xfrm>
-            <a:off x="8052816" y="1897380"/>
-            <a:ext cx="3587496" cy="4640580"/>
+            <a:off x="548640" y="4299966"/>
+            <a:ext cx="5463540" cy="2237994"/>
           </a:xfrm>
           <a:prstGeom prst="rect">
             <a:avLst/>
           </a:prstGeom>
           <a:solidFill>
-            <a:srgbClr val="F5F5F5"/>
+            <a:srgbClr val="FFFFFF"/>
           </a:solidFill>
-          <a:ln>
-            <a:noFill/>
+          <a:ln w="9525">
+            <a:solidFill>
+              <a:srgbClr val="E0E0E0"/>
+            </a:solidFill>
           </a:ln>
         </p:spPr>
         <p:style>
@@ -8585,8 +9357,8 @@
         </p:nvSpPr>
         <p:spPr>
           <a:xfrm>
-            <a:off x="8217408" y="2061972"/>
-            <a:ext cx="3258312" cy="347472"/>
+            <a:off x="713232" y="4464558"/>
+            <a:ext cx="5134356" cy="347472"/>
           </a:xfrm>
           <a:prstGeom prst="rect">
             <a:avLst/>
@@ -8605,7 +9377,7 @@
                 </a:solidFill>
                 <a:latin typeface="Noto Sans"/>
               </a:rPr>
-              <a:t>Phase 3｜全社展開（3ヶ月目〜）</a:t>
+              <a:t>ハードウェアはスコープ外</a:t>
             </a:r>
           </a:p>
         </p:txBody>
@@ -8618,8 +9390,8 @@
         </p:nvSpPr>
         <p:spPr>
           <a:xfrm>
-            <a:off x="8217408" y="2446020"/>
-            <a:ext cx="3258312" cy="3927348"/>
+            <a:off x="713232" y="4848606"/>
+            <a:ext cx="5134356" cy="1524762"/>
           </a:xfrm>
           <a:prstGeom prst="rect">
             <a:avLst/>
@@ -8638,7 +9410,118 @@
                 </a:solidFill>
                 <a:latin typeface="Noto Sans"/>
               </a:rPr>
-              <a:t>全部門へのロールアウト。IT 部門との SSO / API 連携。管理者研修の実施</a:t>
+              <a:t>Meeting Owl等のハードウェア連携はコスト・情報管理の観点から現段階ではスコープ外。ソフトウェアレイヤーで解決する方針に合意</a:t>
+            </a:r>
+          </a:p>
+        </p:txBody>
+      </p:sp>
+      <p:sp>
+        <p:nvSpPr>
+          <p:cNvPr id="14" name="Rectangle 13"/>
+          <p:cNvSpPr/>
+          <p:nvPr/>
+        </p:nvSpPr>
+        <p:spPr>
+          <a:xfrm>
+            <a:off x="6176772" y="4299966"/>
+            <a:ext cx="5463540" cy="2237994"/>
+          </a:xfrm>
+          <a:prstGeom prst="rect">
+            <a:avLst/>
+          </a:prstGeom>
+          <a:solidFill>
+            <a:srgbClr val="FFFFFF"/>
+          </a:solidFill>
+          <a:ln w="9525">
+            <a:solidFill>
+              <a:srgbClr val="E0E0E0"/>
+            </a:solidFill>
+          </a:ln>
+        </p:spPr>
+        <p:style>
+          <a:lnRef idx="1">
+            <a:schemeClr val="accent1"/>
+          </a:lnRef>
+          <a:fillRef idx="3">
+            <a:schemeClr val="accent1"/>
+          </a:fillRef>
+          <a:effectRef idx="2">
+            <a:schemeClr val="accent1"/>
+          </a:effectRef>
+          <a:fontRef idx="minor">
+            <a:schemeClr val="lt1"/>
+          </a:fontRef>
+        </p:style>
+        <p:txBody>
+          <a:bodyPr rtlCol="0" anchor="ctr"/>
+          <a:lstStyle/>
+          <a:p>
+            <a:pPr algn="ctr"/>
+          </a:p>
+        </p:txBody>
+      </p:sp>
+      <p:sp>
+        <p:nvSpPr>
+          <p:cNvPr id="15" name="TextBox 14"/>
+          <p:cNvSpPr txBox="1"/>
+          <p:nvPr/>
+        </p:nvSpPr>
+        <p:spPr>
+          <a:xfrm>
+            <a:off x="6341364" y="4464558"/>
+            <a:ext cx="5134356" cy="347472"/>
+          </a:xfrm>
+          <a:prstGeom prst="rect">
+            <a:avLst/>
+          </a:prstGeom>
+          <a:noFill/>
+        </p:spPr>
+        <p:txBody>
+          <a:bodyPr wrap="square"/>
+          <a:lstStyle/>
+          <a:p>
+            <a:pPr algn="l"/>
+            <a:r>
+              <a:rPr sz="1800" b="1">
+                <a:solidFill>
+                  <a:srgbClr val="2180FF"/>
+                </a:solidFill>
+                <a:latin typeface="Noto Sans"/>
+              </a:rPr>
+              <a:t>開発スピードへの配慮</a:t>
+            </a:r>
+          </a:p>
+        </p:txBody>
+      </p:sp>
+      <p:sp>
+        <p:nvSpPr>
+          <p:cNvPr id="16" name="TextBox 15"/>
+          <p:cNvSpPr txBox="1"/>
+          <p:nvPr/>
+        </p:nvSpPr>
+        <p:spPr>
+          <a:xfrm>
+            <a:off x="6341364" y="4848606"/>
+            <a:ext cx="5134356" cy="1524762"/>
+          </a:xfrm>
+          <a:prstGeom prst="rect">
+            <a:avLst/>
+          </a:prstGeom>
+          <a:noFill/>
+        </p:spPr>
+        <p:txBody>
+          <a:bodyPr wrap="square"/>
+          <a:lstStyle/>
+          <a:p>
+            <a:pPr algn="l"/>
+            <a:r>
+              <a:rPr sz="1200" b="0">
+                <a:solidFill>
+                  <a:srgbClr val="262626"/>
+                </a:solidFill>
+                <a:latin typeface="Noto Sans"/>
+              </a:rPr>
+              <a:t>CMG側のエンジニアリソースは限定的。Notta側はAPI・SDK・プロンプトテンプレートを提供し、CMG側の実装コストを最小化</a:t>
             </a:r>
           </a:p>
         </p:txBody>
@@ -8697,7 +9580,7 @@
                 </a:solidFill>
                 <a:latin typeface="Noto Sans"/>
               </a:rPr>
-              <a:t>プラン・価格</a:t>
+              <a:t>協業がもたらす競争優位性</a:t>
             </a:r>
           </a:p>
         </p:txBody>
@@ -8773,7 +9656,7 @@
                 </a:solidFill>
                 <a:latin typeface="Noto Sans"/>
               </a:rPr>
-              <a:t>チーム規模と用途に合わせた柔軟なプランで、スモールスタートから全社展開まで対応</a:t>
+              <a:t>Notta × CMGで「国産XMプラットフォーム」のファーストペンギンとなり、リサーチ業界のAI活用をリードする</a:t>
             </a:r>
           </a:p>
         </p:txBody>
@@ -8787,16 +9670,18 @@
         <p:spPr>
           <a:xfrm>
             <a:off x="548640" y="1897380"/>
-            <a:ext cx="3587496" cy="4640580"/>
+            <a:ext cx="5463540" cy="2237994"/>
           </a:xfrm>
           <a:prstGeom prst="rect">
             <a:avLst/>
           </a:prstGeom>
           <a:solidFill>
-            <a:srgbClr val="F5F5F5"/>
+            <a:srgbClr val="FFFFFF"/>
           </a:solidFill>
-          <a:ln>
-            <a:noFill/>
+          <a:ln w="9525">
+            <a:solidFill>
+              <a:srgbClr val="E0E0E0"/>
+            </a:solidFill>
           </a:ln>
         </p:spPr>
         <p:style>
@@ -8830,7 +9715,7 @@
         <p:spPr>
           <a:xfrm>
             <a:off x="713232" y="2061972"/>
-            <a:ext cx="3258312" cy="347472"/>
+            <a:ext cx="5134356" cy="347472"/>
           </a:xfrm>
           <a:prstGeom prst="rect">
             <a:avLst/>
@@ -8849,7 +9734,7 @@
                 </a:solidFill>
                 <a:latin typeface="Noto Sans"/>
               </a:rPr>
-              <a:t>Pro プラン</a:t>
+              <a:t>CMGへのインパクト①｜新収益軸</a:t>
             </a:r>
           </a:p>
         </p:txBody>
@@ -8863,7 +9748,7 @@
         <p:spPr>
           <a:xfrm>
             <a:off x="713232" y="2446020"/>
-            <a:ext cx="3258312" cy="3927348"/>
+            <a:ext cx="5134356" cy="1524762"/>
           </a:xfrm>
           <a:prstGeom prst="rect">
             <a:avLst/>
@@ -8882,9 +9767,7 @@
                 </a:solidFill>
                 <a:latin typeface="Noto Sans"/>
               </a:rPr>
-              <a:t>¥2,200 / 月（年払い）
-文字起こし 1,800 分/月
-個人利用・小規模チーム向け</a:t>
+              <a:t>受託リサーチのシュリンクを補完する「プラットフォームSaaS」収益を確立。クライアントの自走化を支援する新マネタイズモデル</a:t>
             </a:r>
           </a:p>
         </p:txBody>
@@ -8897,17 +9780,19 @@
         </p:nvSpPr>
         <p:spPr>
           <a:xfrm>
-            <a:off x="4300728" y="1897380"/>
-            <a:ext cx="3587496" cy="4640580"/>
+            <a:off x="6176772" y="1897380"/>
+            <a:ext cx="5463540" cy="2237994"/>
           </a:xfrm>
           <a:prstGeom prst="rect">
             <a:avLst/>
           </a:prstGeom>
           <a:solidFill>
-            <a:srgbClr val="F5F5F5"/>
+            <a:srgbClr val="FFFFFF"/>
           </a:solidFill>
-          <a:ln>
-            <a:noFill/>
+          <a:ln w="9525">
+            <a:solidFill>
+              <a:srgbClr val="E0E0E0"/>
+            </a:solidFill>
           </a:ln>
         </p:spPr>
         <p:style>
@@ -8940,8 +9825,8 @@
         </p:nvSpPr>
         <p:spPr>
           <a:xfrm>
-            <a:off x="4465320" y="2061972"/>
-            <a:ext cx="3258312" cy="347472"/>
+            <a:off x="6341364" y="2061972"/>
+            <a:ext cx="5134356" cy="347472"/>
           </a:xfrm>
           <a:prstGeom prst="rect">
             <a:avLst/>
@@ -8960,7 +9845,7 @@
                 </a:solidFill>
                 <a:latin typeface="Noto Sans"/>
               </a:rPr>
-              <a:t>Business プラン</a:t>
+              <a:t>CMGへのインパクト②｜競争優位</a:t>
             </a:r>
           </a:p>
         </p:txBody>
@@ -8973,8 +9858,8 @@
         </p:nvSpPr>
         <p:spPr>
           <a:xfrm>
-            <a:off x="4465320" y="2446020"/>
-            <a:ext cx="3258312" cy="3927348"/>
+            <a:off x="6341364" y="2446020"/>
+            <a:ext cx="5134356" cy="1524762"/>
           </a:xfrm>
           <a:prstGeom prst="rect">
             <a:avLst/>
@@ -8993,9 +9878,7 @@
                 </a:solidFill>
                 <a:latin typeface="Noto Sans"/>
               </a:rPr>
-              <a:t>¥3,300 / 月（年払い）
-文字起こし 無制限
-チーム管理・SSO・優先サポート付き</a:t>
+              <a:t>音声→調査→レポートの完全自動フローを業界で初めて実装。国内リサーチ業界での「AI活用ファーストペンギン」としてのプレゼンス獲得</a:t>
             </a:r>
           </a:p>
         </p:txBody>
@@ -9008,17 +9891,19 @@
         </p:nvSpPr>
         <p:spPr>
           <a:xfrm>
-            <a:off x="8052816" y="1897380"/>
-            <a:ext cx="3587496" cy="4640580"/>
+            <a:off x="548640" y="4299966"/>
+            <a:ext cx="5463540" cy="2237994"/>
           </a:xfrm>
           <a:prstGeom prst="rect">
             <a:avLst/>
           </a:prstGeom>
           <a:solidFill>
-            <a:srgbClr val="F5F5F5"/>
+            <a:srgbClr val="FFFFFF"/>
           </a:solidFill>
-          <a:ln>
-            <a:noFill/>
+          <a:ln w="9525">
+            <a:solidFill>
+              <a:srgbClr val="E0E0E0"/>
+            </a:solidFill>
           </a:ln>
         </p:spPr>
         <p:style>
@@ -9051,8 +9936,8 @@
         </p:nvSpPr>
         <p:spPr>
           <a:xfrm>
-            <a:off x="8217408" y="2061972"/>
-            <a:ext cx="3258312" cy="347472"/>
+            <a:off x="713232" y="4464558"/>
+            <a:ext cx="5134356" cy="347472"/>
           </a:xfrm>
           <a:prstGeom prst="rect">
             <a:avLst/>
@@ -9071,7 +9956,7 @@
                 </a:solidFill>
                 <a:latin typeface="Noto Sans"/>
               </a:rPr>
-              <a:t>Enterprise プラン</a:t>
+              <a:t>Nottaへのインパクト①｜垂直統合</a:t>
             </a:r>
           </a:p>
         </p:txBody>
@@ -9084,8 +9969,8 @@
         </p:nvSpPr>
         <p:spPr>
           <a:xfrm>
-            <a:off x="8217408" y="2446020"/>
-            <a:ext cx="3258312" cy="3927348"/>
+            <a:off x="713232" y="4848606"/>
+            <a:ext cx="5134356" cy="1524762"/>
           </a:xfrm>
           <a:prstGeom prst="rect">
             <a:avLst/>
@@ -9104,9 +9989,118 @@
                 </a:solidFill>
                 <a:latin typeface="Noto Sans"/>
               </a:rPr>
-              <a:t>カスタム価格
-専任 CSM・SLA 保証
-オンプレ対応・API 連携・カスタム機能開発</a:t>
+              <a:t>リサーチ業界への深い垂直統合。単なる文字起こしツールからリサーチバリューチェーンの中核インフラへの進化</a:t>
+            </a:r>
+          </a:p>
+        </p:txBody>
+      </p:sp>
+      <p:sp>
+        <p:nvSpPr>
+          <p:cNvPr id="14" name="Rectangle 13"/>
+          <p:cNvSpPr/>
+          <p:nvPr/>
+        </p:nvSpPr>
+        <p:spPr>
+          <a:xfrm>
+            <a:off x="6176772" y="4299966"/>
+            <a:ext cx="5463540" cy="2237994"/>
+          </a:xfrm>
+          <a:prstGeom prst="rect">
+            <a:avLst/>
+          </a:prstGeom>
+          <a:solidFill>
+            <a:srgbClr val="FFFFFF"/>
+          </a:solidFill>
+          <a:ln w="9525">
+            <a:solidFill>
+              <a:srgbClr val="E0E0E0"/>
+            </a:solidFill>
+          </a:ln>
+        </p:spPr>
+        <p:style>
+          <a:lnRef idx="1">
+            <a:schemeClr val="accent1"/>
+          </a:lnRef>
+          <a:fillRef idx="3">
+            <a:schemeClr val="accent1"/>
+          </a:fillRef>
+          <a:effectRef idx="2">
+            <a:schemeClr val="accent1"/>
+          </a:effectRef>
+          <a:fontRef idx="minor">
+            <a:schemeClr val="lt1"/>
+          </a:fontRef>
+        </p:style>
+        <p:txBody>
+          <a:bodyPr rtlCol="0" anchor="ctr"/>
+          <a:lstStyle/>
+          <a:p>
+            <a:pPr algn="ctr"/>
+          </a:p>
+        </p:txBody>
+      </p:sp>
+      <p:sp>
+        <p:nvSpPr>
+          <p:cNvPr id="15" name="TextBox 14"/>
+          <p:cNvSpPr txBox="1"/>
+          <p:nvPr/>
+        </p:nvSpPr>
+        <p:spPr>
+          <a:xfrm>
+            <a:off x="6341364" y="4464558"/>
+            <a:ext cx="5134356" cy="347472"/>
+          </a:xfrm>
+          <a:prstGeom prst="rect">
+            <a:avLst/>
+          </a:prstGeom>
+          <a:noFill/>
+        </p:spPr>
+        <p:txBody>
+          <a:bodyPr wrap="square"/>
+          <a:lstStyle/>
+          <a:p>
+            <a:pPr algn="l"/>
+            <a:r>
+              <a:rPr sz="1800" b="1">
+                <a:solidFill>
+                  <a:srgbClr val="2180FF"/>
+                </a:solidFill>
+                <a:latin typeface="Noto Sans"/>
+              </a:rPr>
+              <a:t>Nottaへのインパクト②｜市場拡大</a:t>
+            </a:r>
+          </a:p>
+        </p:txBody>
+      </p:sp>
+      <p:sp>
+        <p:nvSpPr>
+          <p:cNvPr id="16" name="TextBox 15"/>
+          <p:cNvSpPr txBox="1"/>
+          <p:nvPr/>
+        </p:nvSpPr>
+        <p:spPr>
+          <a:xfrm>
+            <a:off x="6341364" y="4848606"/>
+            <a:ext cx="5134356" cy="1524762"/>
+          </a:xfrm>
+          <a:prstGeom prst="rect">
+            <a:avLst/>
+          </a:prstGeom>
+          <a:noFill/>
+        </p:spPr>
+        <p:txBody>
+          <a:bodyPr wrap="square"/>
+          <a:lstStyle/>
+          <a:p>
+            <a:pPr algn="l"/>
+            <a:r>
+              <a:rPr sz="1200" b="0">
+                <a:solidFill>
+                  <a:srgbClr val="262626"/>
+                </a:solidFill>
+                <a:latin typeface="Noto Sans"/>
+              </a:rPr>
+              <a:t>CMGの顧客基盤（事業会社マーケター・新規事業担当）への販路拡大。CMGとのジョイントソリューションで新規開拓を加速</a:t>
             </a:r>
           </a:p>
         </p:txBody>

--- a/cross_marketing_notta_presentation.pptx
+++ b/cross_marketing_notta_presentation.pptx
@@ -10,12 +10,6 @@
     <p:sldId id="258" r:id="rId10"/>
     <p:sldId id="259" r:id="rId11"/>
     <p:sldId id="260" r:id="rId12"/>
-    <p:sldId id="261" r:id="rId13"/>
-    <p:sldId id="262" r:id="rId14"/>
-    <p:sldId id="263" r:id="rId15"/>
-    <p:sldId id="264" r:id="rId16"/>
-    <p:sldId id="265" r:id="rId17"/>
-    <p:sldId id="266" r:id="rId18"/>
   </p:sldIdLst>
   <p:sldSz cx="12188952" cy="6858000" type="screen4x3"/>
   <p:notesSz cx="6858000" cy="9144000"/>
@@ -512,77 +506,7 @@
           <a:lstStyle/>
           <a:p>
             <a:r>
-              <a:t>冒頭で議論の全体像を共有し、資料の読み方を説明する</a:t>
-            </a:r>
-          </a:p>
-        </p:txBody>
-      </p:sp>
-      <p:sp>
-        <p:nvSpPr>
-          <p:cNvPr id="4" name="Slide Number Placeholder 3"/>
-          <p:cNvSpPr>
-            <a:spLocks noGrp="1"/>
-          </p:cNvSpPr>
-          <p:nvPr>
-            <p:ph type="sldNum" idx="5" sz="quarter"/>
-          </p:nvPr>
-        </p:nvSpPr>
-        <p:spPr/>
-      </p:sp>
-    </p:spTree>
-  </p:cSld>
-  <p:clrMapOvr>
-    <a:masterClrMapping/>
-  </p:clrMapOvr>
-</p:notes>
-</file>
-
-<file path=ppt/notesSlides/notesSlide10.xml><?xml version="1.0" encoding="utf-8"?>
-<p:notes xmlns:a="http://schemas.openxmlformats.org/drawingml/2006/main" xmlns:p="http://schemas.openxmlformats.org/presentationml/2006/main" xmlns:r="http://schemas.openxmlformats.org/officeDocument/2006/relationships">
-  <p:cSld>
-    <p:spTree>
-      <p:nvGrpSpPr>
-        <p:cNvPr id="1" name=""/>
-        <p:cNvGrpSpPr/>
-        <p:nvPr/>
-      </p:nvGrpSpPr>
-      <p:grpSpPr>
-        <a:xfrm>
-          <a:off x="0" y="0"/>
-          <a:ext cx="0" cy="0"/>
-          <a:chOff x="0" y="0"/>
-          <a:chExt cx="0" cy="0"/>
-        </a:xfrm>
-      </p:grpSpPr>
-      <p:sp>
-        <p:nvSpPr>
-          <p:cNvPr id="2" name="Slide Image Placeholder 1"/>
-          <p:cNvSpPr>
-            <a:spLocks noGrp="1"/>
-          </p:cNvSpPr>
-          <p:nvPr>
-            <p:ph type="sldImg" idx="2"/>
-          </p:nvPr>
-        </p:nvSpPr>
-        <p:spPr/>
-      </p:sp>
-      <p:sp>
-        <p:nvSpPr>
-          <p:cNvPr id="3" name="Notes Placeholder 2"/>
-          <p:cNvSpPr>
-            <a:spLocks noGrp="1"/>
-          </p:cNvSpPr>
-          <p:nvPr>
-            <p:ph type="body" idx="3" sz="quarter"/>
-          </p:nvPr>
-        </p:nvSpPr>
-        <p:spPr/>
-        <p:txBody>
-          <a:bodyPr/>
-          <a:lstStyle/>
-          <a:p>
-            <a:r>
-              <a:t>アクションオーナーと期限を明確にして次回MTGで進捗確認できるようにする</a:t>
+              <a:t>50分の実商談から合意事項を6点に集約。全員が同じ認識を持っていることを確認するためのアライメントスライド</a:t>
             </a:r>
           </a:p>
         </p:txBody>
@@ -652,7 +576,7 @@
           <a:lstStyle/>
           <a:p>
             <a:r>
-              <a:t>CMGが自ら認識している事業シュリンクリスクを客観的に示す</a:t>
+              <a:t>現状7ステップ（課題認識→仮説化→設計→配信→回収→分析→レポート）を2ステップに圧縮するインパクトを強調</a:t>
             </a:r>
           </a:p>
         </p:txBody>
@@ -722,7 +646,7 @@
           <a:lstStyle/>
           <a:p>
             <a:r>
-              <a:t>CMGの中期経営計画「マーケティングDX」と直結していることを強調</a:t>
+              <a:t>CMG側エンジニアリソースが限定的である点を踏まえ、Notta側が最大限吸収する設計方針を示す</a:t>
             </a:r>
           </a:p>
         </p:txBody>
@@ -792,357 +716,7 @@
           <a:lstStyle/>
           <a:p>
             <a:r>
-              <a:t>クライアント側の課題として、CMG経由でエンドユーザー企業の痛みポイントを示す</a:t>
-            </a:r>
-          </a:p>
-        </p:txBody>
-      </p:sp>
-      <p:sp>
-        <p:nvSpPr>
-          <p:cNvPr id="4" name="Slide Number Placeholder 3"/>
-          <p:cNvSpPr>
-            <a:spLocks noGrp="1"/>
-          </p:cNvSpPr>
-          <p:nvPr>
-            <p:ph type="sldNum" idx="5" sz="quarter"/>
-          </p:nvPr>
-        </p:nvSpPr>
-        <p:spPr/>
-      </p:sp>
-    </p:spTree>
-  </p:cSld>
-  <p:clrMapOvr>
-    <a:masterClrMapping/>
-  </p:clrMapOvr>
-</p:notes>
-</file>
-
-<file path=ppt/notesSlides/notesSlide5.xml><?xml version="1.0" encoding="utf-8"?>
-<p:notes xmlns:a="http://schemas.openxmlformats.org/drawingml/2006/main" xmlns:p="http://schemas.openxmlformats.org/presentationml/2006/main" xmlns:r="http://schemas.openxmlformats.org/officeDocument/2006/relationships">
-  <p:cSld>
-    <p:spTree>
-      <p:nvGrpSpPr>
-        <p:cNvPr id="1" name=""/>
-        <p:cNvGrpSpPr/>
-        <p:nvPr/>
-      </p:nvGrpSpPr>
-      <p:grpSpPr>
-        <a:xfrm>
-          <a:off x="0" y="0"/>
-          <a:ext cx="0" cy="0"/>
-          <a:chOff x="0" y="0"/>
-          <a:chExt cx="0" cy="0"/>
-        </a:xfrm>
-      </p:grpSpPr>
-      <p:sp>
-        <p:nvSpPr>
-          <p:cNvPr id="2" name="Slide Image Placeholder 1"/>
-          <p:cNvSpPr>
-            <a:spLocks noGrp="1"/>
-          </p:cNvSpPr>
-          <p:nvPr>
-            <p:ph type="sldImg" idx="2"/>
-          </p:nvPr>
-        </p:nvSpPr>
-        <p:spPr/>
-      </p:sp>
-      <p:sp>
-        <p:nvSpPr>
-          <p:cNvPr id="3" name="Notes Placeholder 2"/>
-          <p:cNvSpPr>
-            <a:spLocks noGrp="1"/>
-          </p:cNvSpPr>
-          <p:nvPr>
-            <p:ph type="body" idx="3" sz="quarter"/>
-          </p:nvPr>
-        </p:nvSpPr>
-        <p:spPr/>
-        <p:txBody>
-          <a:bodyPr/>
-          <a:lstStyle/>
-          <a:p>
-            <a:r>
-              <a:t>フロー図を別途用意して視覚的に説明できると効果的</a:t>
-            </a:r>
-          </a:p>
-        </p:txBody>
-      </p:sp>
-      <p:sp>
-        <p:nvSpPr>
-          <p:cNvPr id="4" name="Slide Number Placeholder 3"/>
-          <p:cNvSpPr>
-            <a:spLocks noGrp="1"/>
-          </p:cNvSpPr>
-          <p:nvPr>
-            <p:ph type="sldNum" idx="5" sz="quarter"/>
-          </p:nvPr>
-        </p:nvSpPr>
-        <p:spPr/>
-      </p:sp>
-    </p:spTree>
-  </p:cSld>
-  <p:clrMapOvr>
-    <a:masterClrMapping/>
-  </p:clrMapOvr>
-</p:notes>
-</file>
-
-<file path=ppt/notesSlides/notesSlide6.xml><?xml version="1.0" encoding="utf-8"?>
-<p:notes xmlns:a="http://schemas.openxmlformats.org/drawingml/2006/main" xmlns:p="http://schemas.openxmlformats.org/presentationml/2006/main" xmlns:r="http://schemas.openxmlformats.org/officeDocument/2006/relationships">
-  <p:cSld>
-    <p:spTree>
-      <p:nvGrpSpPr>
-        <p:cNvPr id="1" name=""/>
-        <p:cNvGrpSpPr/>
-        <p:nvPr/>
-      </p:nvGrpSpPr>
-      <p:grpSpPr>
-        <a:xfrm>
-          <a:off x="0" y="0"/>
-          <a:ext cx="0" cy="0"/>
-          <a:chOff x="0" y="0"/>
-          <a:chExt cx="0" cy="0"/>
-        </a:xfrm>
-      </p:grpSpPr>
-      <p:sp>
-        <p:nvSpPr>
-          <p:cNvPr id="2" name="Slide Image Placeholder 1"/>
-          <p:cNvSpPr>
-            <a:spLocks noGrp="1"/>
-          </p:cNvSpPr>
-          <p:nvPr>
-            <p:ph type="sldImg" idx="2"/>
-          </p:nvPr>
-        </p:nvSpPr>
-        <p:spPr/>
-      </p:sp>
-      <p:sp>
-        <p:nvSpPr>
-          <p:cNvPr id="3" name="Notes Placeholder 2"/>
-          <p:cNvSpPr>
-            <a:spLocks noGrp="1"/>
-          </p:cNvSpPr>
-          <p:nvPr>
-            <p:ph type="body" idx="3" sz="quarter"/>
-          </p:nvPr>
-        </p:nvSpPr>
-        <p:spPr/>
-        <p:txBody>
-          <a:bodyPr/>
-          <a:lstStyle/>
-          <a:p>
-            <a:r>
-              <a:t>セグメント比率はCMGの岡崎様発言（85%：15%）をそのまま引用</a:t>
-            </a:r>
-          </a:p>
-        </p:txBody>
-      </p:sp>
-      <p:sp>
-        <p:nvSpPr>
-          <p:cNvPr id="4" name="Slide Number Placeholder 3"/>
-          <p:cNvSpPr>
-            <a:spLocks noGrp="1"/>
-          </p:cNvSpPr>
-          <p:nvPr>
-            <p:ph type="sldNum" idx="5" sz="quarter"/>
-          </p:nvPr>
-        </p:nvSpPr>
-        <p:spPr/>
-      </p:sp>
-    </p:spTree>
-  </p:cSld>
-  <p:clrMapOvr>
-    <a:masterClrMapping/>
-  </p:clrMapOvr>
-</p:notes>
-</file>
-
-<file path=ppt/notesSlides/notesSlide7.xml><?xml version="1.0" encoding="utf-8"?>
-<p:notes xmlns:a="http://schemas.openxmlformats.org/drawingml/2006/main" xmlns:p="http://schemas.openxmlformats.org/presentationml/2006/main" xmlns:r="http://schemas.openxmlformats.org/officeDocument/2006/relationships">
-  <p:cSld>
-    <p:spTree>
-      <p:nvGrpSpPr>
-        <p:cNvPr id="1" name=""/>
-        <p:cNvGrpSpPr/>
-        <p:nvPr/>
-      </p:nvGrpSpPr>
-      <p:grpSpPr>
-        <a:xfrm>
-          <a:off x="0" y="0"/>
-          <a:ext cx="0" cy="0"/>
-          <a:chOff x="0" y="0"/>
-          <a:chExt cx="0" cy="0"/>
-        </a:xfrm>
-      </p:grpSpPr>
-      <p:sp>
-        <p:nvSpPr>
-          <p:cNvPr id="2" name="Slide Image Placeholder 1"/>
-          <p:cNvSpPr>
-            <a:spLocks noGrp="1"/>
-          </p:cNvSpPr>
-          <p:nvPr>
-            <p:ph type="sldImg" idx="2"/>
-          </p:nvPr>
-        </p:nvSpPr>
-        <p:spPr/>
-      </p:sp>
-      <p:sp>
-        <p:nvSpPr>
-          <p:cNvPr id="3" name="Notes Placeholder 2"/>
-          <p:cNvSpPr>
-            <a:spLocks noGrp="1"/>
-          </p:cNvSpPr>
-          <p:nvPr>
-            <p:ph type="body" idx="3" sz="quarter"/>
-          </p:nvPr>
-        </p:nvSpPr>
-        <p:spPr/>
-        <p:txBody>
-          <a:bodyPr/>
-          <a:lstStyle/>
-          <a:p>
-            <a:r>
-              <a:t>後戻りできない大規模開発を避け、スモールスタートで検証する方針</a:t>
-            </a:r>
-          </a:p>
-        </p:txBody>
-      </p:sp>
-      <p:sp>
-        <p:nvSpPr>
-          <p:cNvPr id="4" name="Slide Number Placeholder 3"/>
-          <p:cNvSpPr>
-            <a:spLocks noGrp="1"/>
-          </p:cNvSpPr>
-          <p:nvPr>
-            <p:ph type="sldNum" idx="5" sz="quarter"/>
-          </p:nvPr>
-        </p:nvSpPr>
-        <p:spPr/>
-      </p:sp>
-    </p:spTree>
-  </p:cSld>
-  <p:clrMapOvr>
-    <a:masterClrMapping/>
-  </p:clrMapOvr>
-</p:notes>
-</file>
-
-<file path=ppt/notesSlides/notesSlide8.xml><?xml version="1.0" encoding="utf-8"?>
-<p:notes xmlns:a="http://schemas.openxmlformats.org/drawingml/2006/main" xmlns:p="http://schemas.openxmlformats.org/presentationml/2006/main" xmlns:r="http://schemas.openxmlformats.org/officeDocument/2006/relationships">
-  <p:cSld>
-    <p:spTree>
-      <p:nvGrpSpPr>
-        <p:cNvPr id="1" name=""/>
-        <p:cNvGrpSpPr/>
-        <p:nvPr/>
-      </p:nvGrpSpPr>
-      <p:grpSpPr>
-        <a:xfrm>
-          <a:off x="0" y="0"/>
-          <a:ext cx="0" cy="0"/>
-          <a:chOff x="0" y="0"/>
-          <a:chExt cx="0" cy="0"/>
-        </a:xfrm>
-      </p:grpSpPr>
-      <p:sp>
-        <p:nvSpPr>
-          <p:cNvPr id="2" name="Slide Image Placeholder 1"/>
-          <p:cNvSpPr>
-            <a:spLocks noGrp="1"/>
-          </p:cNvSpPr>
-          <p:nvPr>
-            <p:ph type="sldImg" idx="2"/>
-          </p:nvPr>
-        </p:nvSpPr>
-        <p:spPr/>
-      </p:sp>
-      <p:sp>
-        <p:nvSpPr>
-          <p:cNvPr id="3" name="Notes Placeholder 2"/>
-          <p:cNvSpPr>
-            <a:spLocks noGrp="1"/>
-          </p:cNvSpPr>
-          <p:nvPr>
-            <p:ph type="body" idx="3" sz="quarter"/>
-          </p:nvPr>
-        </p:nvSpPr>
-        <p:spPr/>
-        <p:txBody>
-          <a:bodyPr/>
-          <a:lstStyle/>
-          <a:p>
-            <a:r>
-              <a:t>双方にとっての戦略的意義を対等に示すことで協業モチベーションを高める</a:t>
-            </a:r>
-          </a:p>
-        </p:txBody>
-      </p:sp>
-      <p:sp>
-        <p:nvSpPr>
-          <p:cNvPr id="4" name="Slide Number Placeholder 3"/>
-          <p:cNvSpPr>
-            <a:spLocks noGrp="1"/>
-          </p:cNvSpPr>
-          <p:nvPr>
-            <p:ph type="sldNum" idx="5" sz="quarter"/>
-          </p:nvPr>
-        </p:nvSpPr>
-        <p:spPr/>
-      </p:sp>
-    </p:spTree>
-  </p:cSld>
-  <p:clrMapOvr>
-    <a:masterClrMapping/>
-  </p:clrMapOvr>
-</p:notes>
-</file>
-
-<file path=ppt/notesSlides/notesSlide9.xml><?xml version="1.0" encoding="utf-8"?>
-<p:notes xmlns:a="http://schemas.openxmlformats.org/drawingml/2006/main" xmlns:p="http://schemas.openxmlformats.org/presentationml/2006/main" xmlns:r="http://schemas.openxmlformats.org/officeDocument/2006/relationships">
-  <p:cSld>
-    <p:spTree>
-      <p:nvGrpSpPr>
-        <p:cNvPr id="1" name=""/>
-        <p:cNvGrpSpPr/>
-        <p:nvPr/>
-      </p:nvGrpSpPr>
-      <p:grpSpPr>
-        <a:xfrm>
-          <a:off x="0" y="0"/>
-          <a:ext cx="0" cy="0"/>
-          <a:chOff x="0" y="0"/>
-          <a:chExt cx="0" cy="0"/>
-        </a:xfrm>
-      </p:grpSpPr>
-      <p:sp>
-        <p:nvSpPr>
-          <p:cNvPr id="2" name="Slide Image Placeholder 1"/>
-          <p:cNvSpPr>
-            <a:spLocks noGrp="1"/>
-          </p:cNvSpPr>
-          <p:nvPr>
-            <p:ph type="sldImg" idx="2"/>
-          </p:nvPr>
-        </p:nvSpPr>
-        <p:spPr/>
-      </p:sp>
-      <p:sp>
-        <p:nvSpPr>
-          <p:cNvPr id="3" name="Notes Placeholder 2"/>
-          <p:cNvSpPr>
-            <a:spLocks noGrp="1"/>
-          </p:cNvSpPr>
-          <p:nvPr>
-            <p:ph type="body" idx="3" sz="quarter"/>
-          </p:nvPr>
-        </p:nvSpPr>
-        <p:spPr/>
-        <p:txBody>
-          <a:bodyPr/>
-          <a:lstStyle/>
-          <a:p>
-            <a:r>
-              <a:t>予算感（数百万円規模）はCMG岡崎様の言及に基づく。次回MTGで具体化</a:t>
+              <a:t>岡崎様の「失敗しても数百万円」「開発スピードが遅い」発言を踏まえたリアリスティックな設計。Go/No-Go判断を明確化することがPoC合意の鍵</a:t>
             </a:r>
           </a:p>
         </p:txBody>
@@ -4318,1169 +3892,6 @@
 </p:sld>
 </file>
 
-<file path=ppt/slides/slide10.xml><?xml version="1.0" encoding="utf-8"?>
-<p:sld xmlns:a="http://schemas.openxmlformats.org/drawingml/2006/main" xmlns:p="http://schemas.openxmlformats.org/presentationml/2006/main" xmlns:r="http://schemas.openxmlformats.org/officeDocument/2006/relationships">
-  <p:cSld>
-    <p:bg>
-      <p:bgPr>
-        <a:solidFill>
-          <a:srgbClr val="FFFFFF"/>
-        </a:solidFill>
-        <a:effectLst/>
-      </p:bgPr>
-    </p:bg>
-    <p:spTree>
-      <p:nvGrpSpPr>
-        <p:cNvPr id="1" name=""/>
-        <p:cNvGrpSpPr/>
-        <p:nvPr/>
-      </p:nvGrpSpPr>
-      <p:grpSpPr/>
-      <p:sp>
-        <p:nvSpPr>
-          <p:cNvPr id="2" name="TextBox 1"/>
-          <p:cNvSpPr txBox="1"/>
-          <p:nvPr/>
-        </p:nvSpPr>
-        <p:spPr>
-          <a:xfrm>
-            <a:off x="548640" y="320040"/>
-            <a:ext cx="11091672" cy="411480"/>
-          </a:xfrm>
-          <a:prstGeom prst="rect">
-            <a:avLst/>
-          </a:prstGeom>
-          <a:noFill/>
-        </p:spPr>
-        <p:txBody>
-          <a:bodyPr wrap="square"/>
-          <a:lstStyle/>
-          <a:p>
-            <a:pPr algn="l"/>
-            <a:r>
-              <a:rPr sz="1600" b="0">
-                <a:solidFill>
-                  <a:srgbClr val="2180FF"/>
-                </a:solidFill>
-                <a:latin typeface="Noto Sans"/>
-              </a:rPr>
-              <a:t>PoC設計の方向性</a:t>
-            </a:r>
-          </a:p>
-        </p:txBody>
-      </p:sp>
-      <p:sp>
-        <p:nvSpPr>
-          <p:cNvPr id="3" name="Rectangle 2"/>
-          <p:cNvSpPr/>
-          <p:nvPr/>
-        </p:nvSpPr>
-        <p:spPr>
-          <a:xfrm>
-            <a:off x="548640" y="841248"/>
-            <a:ext cx="11091672" cy="13716"/>
-          </a:xfrm>
-          <a:prstGeom prst="rect">
-            <a:avLst/>
-          </a:prstGeom>
-          <a:solidFill>
-            <a:srgbClr val="D0D0D0"/>
-          </a:solidFill>
-          <a:ln>
-            <a:noFill/>
-          </a:ln>
-        </p:spPr>
-        <p:style>
-          <a:lnRef idx="1">
-            <a:schemeClr val="accent1"/>
-          </a:lnRef>
-          <a:fillRef idx="3">
-            <a:schemeClr val="accent1"/>
-          </a:fillRef>
-          <a:effectRef idx="2">
-            <a:schemeClr val="accent1"/>
-          </a:effectRef>
-          <a:fontRef idx="minor">
-            <a:schemeClr val="lt1"/>
-          </a:fontRef>
-        </p:style>
-        <p:txBody>
-          <a:bodyPr rtlCol="0" anchor="ctr"/>
-          <a:lstStyle/>
-          <a:p>
-            <a:pPr algn="ctr"/>
-          </a:p>
-        </p:txBody>
-      </p:sp>
-      <p:sp>
-        <p:nvSpPr>
-          <p:cNvPr id="4" name="TextBox 3"/>
-          <p:cNvSpPr txBox="1"/>
-          <p:nvPr/>
-        </p:nvSpPr>
-        <p:spPr>
-          <a:xfrm>
-            <a:off x="548640" y="982980"/>
-            <a:ext cx="11091672" cy="685800"/>
-          </a:xfrm>
-          <a:prstGeom prst="rect">
-            <a:avLst/>
-          </a:prstGeom>
-          <a:noFill/>
-        </p:spPr>
-        <p:txBody>
-          <a:bodyPr wrap="square"/>
-          <a:lstStyle/>
-          <a:p>
-            <a:pPr algn="l"/>
-            <a:r>
-              <a:rPr sz="2000" b="1">
-                <a:solidFill>
-                  <a:srgbClr val="262626"/>
-                </a:solidFill>
-                <a:latin typeface="Noto Sans"/>
-              </a:rPr>
-              <a:t>数百万円規模の小さな投資で技術検証を完了し、双方がリスクを限定しながら協業の実現可能性を確認する</a:t>
-            </a:r>
-          </a:p>
-        </p:txBody>
-      </p:sp>
-      <p:sp>
-        <p:nvSpPr>
-          <p:cNvPr id="5" name="Rectangle 4"/>
-          <p:cNvSpPr/>
-          <p:nvPr/>
-        </p:nvSpPr>
-        <p:spPr>
-          <a:xfrm>
-            <a:off x="548640" y="1897380"/>
-            <a:ext cx="5463540" cy="2237994"/>
-          </a:xfrm>
-          <a:prstGeom prst="rect">
-            <a:avLst/>
-          </a:prstGeom>
-          <a:solidFill>
-            <a:srgbClr val="FFFFFF"/>
-          </a:solidFill>
-          <a:ln w="9525">
-            <a:solidFill>
-              <a:srgbClr val="E0E0E0"/>
-            </a:solidFill>
-          </a:ln>
-        </p:spPr>
-        <p:style>
-          <a:lnRef idx="1">
-            <a:schemeClr val="accent1"/>
-          </a:lnRef>
-          <a:fillRef idx="3">
-            <a:schemeClr val="accent1"/>
-          </a:fillRef>
-          <a:effectRef idx="2">
-            <a:schemeClr val="accent1"/>
-          </a:effectRef>
-          <a:fontRef idx="minor">
-            <a:schemeClr val="lt1"/>
-          </a:fontRef>
-        </p:style>
-        <p:txBody>
-          <a:bodyPr rtlCol="0" anchor="ctr"/>
-          <a:lstStyle/>
-          <a:p>
-            <a:pPr algn="ctr"/>
-          </a:p>
-        </p:txBody>
-      </p:sp>
-      <p:sp>
-        <p:nvSpPr>
-          <p:cNvPr id="6" name="TextBox 5"/>
-          <p:cNvSpPr txBox="1"/>
-          <p:nvPr/>
-        </p:nvSpPr>
-        <p:spPr>
-          <a:xfrm>
-            <a:off x="713232" y="2061972"/>
-            <a:ext cx="5134356" cy="347472"/>
-          </a:xfrm>
-          <a:prstGeom prst="rect">
-            <a:avLst/>
-          </a:prstGeom>
-          <a:noFill/>
-        </p:spPr>
-        <p:txBody>
-          <a:bodyPr wrap="square"/>
-          <a:lstStyle/>
-          <a:p>
-            <a:pPr algn="l"/>
-            <a:r>
-              <a:rPr sz="1800" b="1">
-                <a:solidFill>
-                  <a:srgbClr val="2180FF"/>
-                </a:solidFill>
-                <a:latin typeface="Noto Sans"/>
-              </a:rPr>
-              <a:t>検証対象フロー</a:t>
-            </a:r>
-          </a:p>
-        </p:txBody>
-      </p:sp>
-      <p:sp>
-        <p:nvSpPr>
-          <p:cNvPr id="7" name="TextBox 6"/>
-          <p:cNvSpPr txBox="1"/>
-          <p:nvPr/>
-        </p:nvSpPr>
-        <p:spPr>
-          <a:xfrm>
-            <a:off x="713232" y="2446020"/>
-            <a:ext cx="5134356" cy="1524762"/>
-          </a:xfrm>
-          <a:prstGeom prst="rect">
-            <a:avLst/>
-          </a:prstGeom>
-          <a:noFill/>
-        </p:spPr>
-        <p:txBody>
-          <a:bodyPr wrap="square"/>
-          <a:lstStyle/>
-          <a:p>
-            <a:pPr algn="l"/>
-            <a:r>
-              <a:rPr sz="1200" b="0">
-                <a:solidFill>
-                  <a:srgbClr val="262626"/>
-                </a:solidFill>
-                <a:latin typeface="Noto Sans"/>
-              </a:rPr>
-              <a:t>「会議音声 → Notta文字起こし → CMG調査設計AI → 秋雲配信」の一気通貫フローをプロトタイプ実装</a:t>
-            </a:r>
-          </a:p>
-        </p:txBody>
-      </p:sp>
-      <p:sp>
-        <p:nvSpPr>
-          <p:cNvPr id="8" name="Rectangle 7"/>
-          <p:cNvSpPr/>
-          <p:nvPr/>
-        </p:nvSpPr>
-        <p:spPr>
-          <a:xfrm>
-            <a:off x="6176772" y="1897380"/>
-            <a:ext cx="5463540" cy="2237994"/>
-          </a:xfrm>
-          <a:prstGeom prst="rect">
-            <a:avLst/>
-          </a:prstGeom>
-          <a:solidFill>
-            <a:srgbClr val="FFFFFF"/>
-          </a:solidFill>
-          <a:ln w="9525">
-            <a:solidFill>
-              <a:srgbClr val="E0E0E0"/>
-            </a:solidFill>
-          </a:ln>
-        </p:spPr>
-        <p:style>
-          <a:lnRef idx="1">
-            <a:schemeClr val="accent1"/>
-          </a:lnRef>
-          <a:fillRef idx="3">
-            <a:schemeClr val="accent1"/>
-          </a:fillRef>
-          <a:effectRef idx="2">
-            <a:schemeClr val="accent1"/>
-          </a:effectRef>
-          <a:fontRef idx="minor">
-            <a:schemeClr val="lt1"/>
-          </a:fontRef>
-        </p:style>
-        <p:txBody>
-          <a:bodyPr rtlCol="0" anchor="ctr"/>
-          <a:lstStyle/>
-          <a:p>
-            <a:pPr algn="ctr"/>
-          </a:p>
-        </p:txBody>
-      </p:sp>
-      <p:sp>
-        <p:nvSpPr>
-          <p:cNvPr id="9" name="TextBox 8"/>
-          <p:cNvSpPr txBox="1"/>
-          <p:nvPr/>
-        </p:nvSpPr>
-        <p:spPr>
-          <a:xfrm>
-            <a:off x="6341364" y="2061972"/>
-            <a:ext cx="5134356" cy="347472"/>
-          </a:xfrm>
-          <a:prstGeom prst="rect">
-            <a:avLst/>
-          </a:prstGeom>
-          <a:noFill/>
-        </p:spPr>
-        <p:txBody>
-          <a:bodyPr wrap="square"/>
-          <a:lstStyle/>
-          <a:p>
-            <a:pPr algn="l"/>
-            <a:r>
-              <a:rPr sz="1800" b="1">
-                <a:solidFill>
-                  <a:srgbClr val="2180FF"/>
-                </a:solidFill>
-                <a:latin typeface="Noto Sans"/>
-              </a:rPr>
-              <a:t>CMG側の準備</a:t>
-            </a:r>
-          </a:p>
-        </p:txBody>
-      </p:sp>
-      <p:sp>
-        <p:nvSpPr>
-          <p:cNvPr id="10" name="TextBox 9"/>
-          <p:cNvSpPr txBox="1"/>
-          <p:nvPr/>
-        </p:nvSpPr>
-        <p:spPr>
-          <a:xfrm>
-            <a:off x="6341364" y="2446020"/>
-            <a:ext cx="5134356" cy="1524762"/>
-          </a:xfrm>
-          <a:prstGeom prst="rect">
-            <a:avLst/>
-          </a:prstGeom>
-          <a:noFill/>
-        </p:spPr>
-        <p:txBody>
-          <a:bodyPr wrap="square"/>
-          <a:lstStyle/>
-          <a:p>
-            <a:pPr algn="l"/>
-            <a:r>
-              <a:rPr sz="1200" b="0">
-                <a:solidFill>
-                  <a:srgbClr val="262626"/>
-                </a:solidFill>
-                <a:latin typeface="Noto Sans"/>
-              </a:rPr>
-              <a:t>・2つのプロダクト（秋雲・リサーチャー向けプロトタイプ）のデモを次回Notta側に共有
-・調査設計AIの入力仕様・出力仕様を整理</a:t>
-            </a:r>
-          </a:p>
-        </p:txBody>
-      </p:sp>
-      <p:sp>
-        <p:nvSpPr>
-          <p:cNvPr id="11" name="Rectangle 10"/>
-          <p:cNvSpPr/>
-          <p:nvPr/>
-        </p:nvSpPr>
-        <p:spPr>
-          <a:xfrm>
-            <a:off x="548640" y="4299966"/>
-            <a:ext cx="5463540" cy="2237994"/>
-          </a:xfrm>
-          <a:prstGeom prst="rect">
-            <a:avLst/>
-          </a:prstGeom>
-          <a:solidFill>
-            <a:srgbClr val="FFFFFF"/>
-          </a:solidFill>
-          <a:ln w="9525">
-            <a:solidFill>
-              <a:srgbClr val="E0E0E0"/>
-            </a:solidFill>
-          </a:ln>
-        </p:spPr>
-        <p:style>
-          <a:lnRef idx="1">
-            <a:schemeClr val="accent1"/>
-          </a:lnRef>
-          <a:fillRef idx="3">
-            <a:schemeClr val="accent1"/>
-          </a:fillRef>
-          <a:effectRef idx="2">
-            <a:schemeClr val="accent1"/>
-          </a:effectRef>
-          <a:fontRef idx="minor">
-            <a:schemeClr val="lt1"/>
-          </a:fontRef>
-        </p:style>
-        <p:txBody>
-          <a:bodyPr rtlCol="0" anchor="ctr"/>
-          <a:lstStyle/>
-          <a:p>
-            <a:pPr algn="ctr"/>
-          </a:p>
-        </p:txBody>
-      </p:sp>
-      <p:sp>
-        <p:nvSpPr>
-          <p:cNvPr id="12" name="TextBox 11"/>
-          <p:cNvSpPr txBox="1"/>
-          <p:nvPr/>
-        </p:nvSpPr>
-        <p:spPr>
-          <a:xfrm>
-            <a:off x="713232" y="4464558"/>
-            <a:ext cx="5134356" cy="347472"/>
-          </a:xfrm>
-          <a:prstGeom prst="rect">
-            <a:avLst/>
-          </a:prstGeom>
-          <a:noFill/>
-        </p:spPr>
-        <p:txBody>
-          <a:bodyPr wrap="square"/>
-          <a:lstStyle/>
-          <a:p>
-            <a:pPr algn="l"/>
-            <a:r>
-              <a:rPr sz="1800" b="1">
-                <a:solidFill>
-                  <a:srgbClr val="2180FF"/>
-                </a:solidFill>
-                <a:latin typeface="Noto Sans"/>
-              </a:rPr>
-              <a:t>Notta側の準備</a:t>
-            </a:r>
-          </a:p>
-        </p:txBody>
-      </p:sp>
-      <p:sp>
-        <p:nvSpPr>
-          <p:cNvPr id="13" name="TextBox 12"/>
-          <p:cNvSpPr txBox="1"/>
-          <p:nvPr/>
-        </p:nvSpPr>
-        <p:spPr>
-          <a:xfrm>
-            <a:off x="713232" y="4848606"/>
-            <a:ext cx="5134356" cy="1524762"/>
-          </a:xfrm>
-          <a:prstGeom prst="rect">
-            <a:avLst/>
-          </a:prstGeom>
-          <a:noFill/>
-        </p:spPr>
-        <p:txBody>
-          <a:bodyPr wrap="square"/>
-          <a:lstStyle/>
-          <a:p>
-            <a:pPr algn="l"/>
-            <a:r>
-              <a:rPr sz="1200" b="0">
-                <a:solidFill>
-                  <a:srgbClr val="262626"/>
-                </a:solidFill>
-                <a:latin typeface="Noto Sans"/>
-              </a:rPr>
-              <a:t>・CMGユースケース向けのプロンプトテンプレート設計
-・API出力フォーマット（JSON）の設計
-・Nottaブレインのカスタム設定オプション整備</a:t>
-            </a:r>
-          </a:p>
-        </p:txBody>
-      </p:sp>
-      <p:sp>
-        <p:nvSpPr>
-          <p:cNvPr id="14" name="Rectangle 13"/>
-          <p:cNvSpPr/>
-          <p:nvPr/>
-        </p:nvSpPr>
-        <p:spPr>
-          <a:xfrm>
-            <a:off x="6176772" y="4299966"/>
-            <a:ext cx="5463540" cy="2237994"/>
-          </a:xfrm>
-          <a:prstGeom prst="rect">
-            <a:avLst/>
-          </a:prstGeom>
-          <a:solidFill>
-            <a:srgbClr val="FFFFFF"/>
-          </a:solidFill>
-          <a:ln w="9525">
-            <a:solidFill>
-              <a:srgbClr val="E0E0E0"/>
-            </a:solidFill>
-          </a:ln>
-        </p:spPr>
-        <p:style>
-          <a:lnRef idx="1">
-            <a:schemeClr val="accent1"/>
-          </a:lnRef>
-          <a:fillRef idx="3">
-            <a:schemeClr val="accent1"/>
-          </a:fillRef>
-          <a:effectRef idx="2">
-            <a:schemeClr val="accent1"/>
-          </a:effectRef>
-          <a:fontRef idx="minor">
-            <a:schemeClr val="lt1"/>
-          </a:fontRef>
-        </p:style>
-        <p:txBody>
-          <a:bodyPr rtlCol="0" anchor="ctr"/>
-          <a:lstStyle/>
-          <a:p>
-            <a:pPr algn="ctr"/>
-          </a:p>
-        </p:txBody>
-      </p:sp>
-      <p:sp>
-        <p:nvSpPr>
-          <p:cNvPr id="15" name="TextBox 14"/>
-          <p:cNvSpPr txBox="1"/>
-          <p:nvPr/>
-        </p:nvSpPr>
-        <p:spPr>
-          <a:xfrm>
-            <a:off x="6341364" y="4464558"/>
-            <a:ext cx="5134356" cy="347472"/>
-          </a:xfrm>
-          <a:prstGeom prst="rect">
-            <a:avLst/>
-          </a:prstGeom>
-          <a:noFill/>
-        </p:spPr>
-        <p:txBody>
-          <a:bodyPr wrap="square"/>
-          <a:lstStyle/>
-          <a:p>
-            <a:pPr algn="l"/>
-            <a:r>
-              <a:rPr sz="1800" b="1">
-                <a:solidFill>
-                  <a:srgbClr val="2180FF"/>
-                </a:solidFill>
-                <a:latin typeface="Noto Sans"/>
-              </a:rPr>
-              <a:t>成功基準（KPI）</a:t>
-            </a:r>
-          </a:p>
-        </p:txBody>
-      </p:sp>
-      <p:sp>
-        <p:nvSpPr>
-          <p:cNvPr id="16" name="TextBox 15"/>
-          <p:cNvSpPr txBox="1"/>
-          <p:nvPr/>
-        </p:nvSpPr>
-        <p:spPr>
-          <a:xfrm>
-            <a:off x="6341364" y="4848606"/>
-            <a:ext cx="5134356" cy="1524762"/>
-          </a:xfrm>
-          <a:prstGeom prst="rect">
-            <a:avLst/>
-          </a:prstGeom>
-          <a:noFill/>
-        </p:spPr>
-        <p:txBody>
-          <a:bodyPr wrap="square"/>
-          <a:lstStyle/>
-          <a:p>
-            <a:pPr algn="l"/>
-            <a:r>
-              <a:rPr sz="1200" b="0">
-                <a:solidFill>
-                  <a:srgbClr val="262626"/>
-                </a:solidFill>
-                <a:latin typeface="Noto Sans"/>
-              </a:rPr>
-              <a:t>・調査設計リードタイム：現状比70%短縮
-・設問品質スコア：リサーチャー評価による
-・ユーザビリティ：マーケター層の操作完結率</a:t>
-            </a:r>
-          </a:p>
-        </p:txBody>
-      </p:sp>
-    </p:spTree>
-  </p:cSld>
-  <p:clrMapOvr>
-    <a:masterClrMapping/>
-  </p:clrMapOvr>
-</p:sld>
-</file>
-
-<file path=ppt/slides/slide11.xml><?xml version="1.0" encoding="utf-8"?>
-<p:sld xmlns:a="http://schemas.openxmlformats.org/drawingml/2006/main" xmlns:p="http://schemas.openxmlformats.org/presentationml/2006/main" xmlns:r="http://schemas.openxmlformats.org/officeDocument/2006/relationships">
-  <p:cSld>
-    <p:bg>
-      <p:bgPr>
-        <a:solidFill>
-          <a:srgbClr val="FFFFFF"/>
-        </a:solidFill>
-        <a:effectLst/>
-      </p:bgPr>
-    </p:bg>
-    <p:spTree>
-      <p:nvGrpSpPr>
-        <p:cNvPr id="1" name=""/>
-        <p:cNvGrpSpPr/>
-        <p:nvPr/>
-      </p:nvGrpSpPr>
-      <p:grpSpPr/>
-      <p:sp>
-        <p:nvSpPr>
-          <p:cNvPr id="2" name="TextBox 1"/>
-          <p:cNvSpPr txBox="1"/>
-          <p:nvPr/>
-        </p:nvSpPr>
-        <p:spPr>
-          <a:xfrm>
-            <a:off x="548640" y="320040"/>
-            <a:ext cx="11091672" cy="411480"/>
-          </a:xfrm>
-          <a:prstGeom prst="rect">
-            <a:avLst/>
-          </a:prstGeom>
-          <a:noFill/>
-        </p:spPr>
-        <p:txBody>
-          <a:bodyPr wrap="square"/>
-          <a:lstStyle/>
-          <a:p>
-            <a:pPr algn="l"/>
-            <a:r>
-              <a:rPr sz="1600" b="0">
-                <a:solidFill>
-                  <a:srgbClr val="2180FF"/>
-                </a:solidFill>
-                <a:latin typeface="Noto Sans"/>
-              </a:rPr>
-              <a:t>次のアクション</a:t>
-            </a:r>
-          </a:p>
-        </p:txBody>
-      </p:sp>
-      <p:sp>
-        <p:nvSpPr>
-          <p:cNvPr id="3" name="Rectangle 2"/>
-          <p:cNvSpPr/>
-          <p:nvPr/>
-        </p:nvSpPr>
-        <p:spPr>
-          <a:xfrm>
-            <a:off x="548640" y="841248"/>
-            <a:ext cx="11091672" cy="13716"/>
-          </a:xfrm>
-          <a:prstGeom prst="rect">
-            <a:avLst/>
-          </a:prstGeom>
-          <a:solidFill>
-            <a:srgbClr val="D0D0D0"/>
-          </a:solidFill>
-          <a:ln>
-            <a:noFill/>
-          </a:ln>
-        </p:spPr>
-        <p:style>
-          <a:lnRef idx="1">
-            <a:schemeClr val="accent1"/>
-          </a:lnRef>
-          <a:fillRef idx="3">
-            <a:schemeClr val="accent1"/>
-          </a:fillRef>
-          <a:effectRef idx="2">
-            <a:schemeClr val="accent1"/>
-          </a:effectRef>
-          <a:fontRef idx="minor">
-            <a:schemeClr val="lt1"/>
-          </a:fontRef>
-        </p:style>
-        <p:txBody>
-          <a:bodyPr rtlCol="0" anchor="ctr"/>
-          <a:lstStyle/>
-          <a:p>
-            <a:pPr algn="ctr"/>
-          </a:p>
-        </p:txBody>
-      </p:sp>
-      <p:sp>
-        <p:nvSpPr>
-          <p:cNvPr id="4" name="TextBox 3"/>
-          <p:cNvSpPr txBox="1"/>
-          <p:nvPr/>
-        </p:nvSpPr>
-        <p:spPr>
-          <a:xfrm>
-            <a:off x="548640" y="982980"/>
-            <a:ext cx="11091672" cy="685800"/>
-          </a:xfrm>
-          <a:prstGeom prst="rect">
-            <a:avLst/>
-          </a:prstGeom>
-          <a:noFill/>
-        </p:spPr>
-        <p:txBody>
-          <a:bodyPr wrap="square"/>
-          <a:lstStyle/>
-          <a:p>
-            <a:pPr algn="l"/>
-            <a:r>
-              <a:rPr sz="2000" b="1">
-                <a:solidFill>
-                  <a:srgbClr val="262626"/>
-                </a:solidFill>
-                <a:latin typeface="Noto Sans"/>
-              </a:rPr>
-              <a:t>4月頭のMTGまでに両社が準備を完了し、具体的なPoC設計・予算合意へ進む</a:t>
-            </a:r>
-          </a:p>
-        </p:txBody>
-      </p:sp>
-      <p:sp>
-        <p:nvSpPr>
-          <p:cNvPr id="5" name="Rectangle 4"/>
-          <p:cNvSpPr/>
-          <p:nvPr/>
-        </p:nvSpPr>
-        <p:spPr>
-          <a:xfrm>
-            <a:off x="548640" y="1897380"/>
-            <a:ext cx="5463540" cy="2237994"/>
-          </a:xfrm>
-          <a:prstGeom prst="rect">
-            <a:avLst/>
-          </a:prstGeom>
-          <a:solidFill>
-            <a:srgbClr val="FFFFFF"/>
-          </a:solidFill>
-          <a:ln w="9525">
-            <a:solidFill>
-              <a:srgbClr val="E0E0E0"/>
-            </a:solidFill>
-          </a:ln>
-        </p:spPr>
-        <p:style>
-          <a:lnRef idx="1">
-            <a:schemeClr val="accent1"/>
-          </a:lnRef>
-          <a:fillRef idx="3">
-            <a:schemeClr val="accent1"/>
-          </a:fillRef>
-          <a:effectRef idx="2">
-            <a:schemeClr val="accent1"/>
-          </a:effectRef>
-          <a:fontRef idx="minor">
-            <a:schemeClr val="lt1"/>
-          </a:fontRef>
-        </p:style>
-        <p:txBody>
-          <a:bodyPr rtlCol="0" anchor="ctr"/>
-          <a:lstStyle/>
-          <a:p>
-            <a:pPr algn="ctr"/>
-          </a:p>
-        </p:txBody>
-      </p:sp>
-      <p:sp>
-        <p:nvSpPr>
-          <p:cNvPr id="6" name="TextBox 5"/>
-          <p:cNvSpPr txBox="1"/>
-          <p:nvPr/>
-        </p:nvSpPr>
-        <p:spPr>
-          <a:xfrm>
-            <a:off x="713232" y="2061972"/>
-            <a:ext cx="5134356" cy="347472"/>
-          </a:xfrm>
-          <a:prstGeom prst="rect">
-            <a:avLst/>
-          </a:prstGeom>
-          <a:noFill/>
-        </p:spPr>
-        <p:txBody>
-          <a:bodyPr wrap="square"/>
-          <a:lstStyle/>
-          <a:p>
-            <a:pPr algn="l"/>
-            <a:r>
-              <a:rPr sz="1800" b="1">
-                <a:solidFill>
-                  <a:srgbClr val="2180FF"/>
-                </a:solidFill>
-                <a:latin typeface="Noto Sans"/>
-              </a:rPr>
-              <a:t>【CMG】プロダクトデモ準備</a:t>
-            </a:r>
-          </a:p>
-        </p:txBody>
-      </p:sp>
-      <p:sp>
-        <p:nvSpPr>
-          <p:cNvPr id="7" name="TextBox 6"/>
-          <p:cNvSpPr txBox="1"/>
-          <p:nvPr/>
-        </p:nvSpPr>
-        <p:spPr>
-          <a:xfrm>
-            <a:off x="713232" y="2446020"/>
-            <a:ext cx="5134356" cy="1524762"/>
-          </a:xfrm>
-          <a:prstGeom prst="rect">
-            <a:avLst/>
-          </a:prstGeom>
-          <a:noFill/>
-        </p:spPr>
-        <p:txBody>
-          <a:bodyPr wrap="square"/>
-          <a:lstStyle/>
-          <a:p>
-            <a:pPr algn="l"/>
-            <a:r>
-              <a:rPr sz="1200" b="0">
-                <a:solidFill>
-                  <a:srgbClr val="262626"/>
-                </a:solidFill>
-                <a:latin typeface="Noto Sans"/>
-              </a:rPr>
-              <a:t>秋雲・リサーチャー向けプロトタイプの画面デモをNotta側に共有。API連携の技術要件を整理（担当：岡崎様）</a:t>
-            </a:r>
-          </a:p>
-        </p:txBody>
-      </p:sp>
-      <p:sp>
-        <p:nvSpPr>
-          <p:cNvPr id="8" name="Rectangle 7"/>
-          <p:cNvSpPr/>
-          <p:nvPr/>
-        </p:nvSpPr>
-        <p:spPr>
-          <a:xfrm>
-            <a:off x="6176772" y="1897380"/>
-            <a:ext cx="5463540" cy="2237994"/>
-          </a:xfrm>
-          <a:prstGeom prst="rect">
-            <a:avLst/>
-          </a:prstGeom>
-          <a:solidFill>
-            <a:srgbClr val="FFFFFF"/>
-          </a:solidFill>
-          <a:ln w="9525">
-            <a:solidFill>
-              <a:srgbClr val="E0E0E0"/>
-            </a:solidFill>
-          </a:ln>
-        </p:spPr>
-        <p:style>
-          <a:lnRef idx="1">
-            <a:schemeClr val="accent1"/>
-          </a:lnRef>
-          <a:fillRef idx="3">
-            <a:schemeClr val="accent1"/>
-          </a:fillRef>
-          <a:effectRef idx="2">
-            <a:schemeClr val="accent1"/>
-          </a:effectRef>
-          <a:fontRef idx="minor">
-            <a:schemeClr val="lt1"/>
-          </a:fontRef>
-        </p:style>
-        <p:txBody>
-          <a:bodyPr rtlCol="0" anchor="ctr"/>
-          <a:lstStyle/>
-          <a:p>
-            <a:pPr algn="ctr"/>
-          </a:p>
-        </p:txBody>
-      </p:sp>
-      <p:sp>
-        <p:nvSpPr>
-          <p:cNvPr id="9" name="TextBox 8"/>
-          <p:cNvSpPr txBox="1"/>
-          <p:nvPr/>
-        </p:nvSpPr>
-        <p:spPr>
-          <a:xfrm>
-            <a:off x="6341364" y="2061972"/>
-            <a:ext cx="5134356" cy="347472"/>
-          </a:xfrm>
-          <a:prstGeom prst="rect">
-            <a:avLst/>
-          </a:prstGeom>
-          <a:noFill/>
-        </p:spPr>
-        <p:txBody>
-          <a:bodyPr wrap="square"/>
-          <a:lstStyle/>
-          <a:p>
-            <a:pPr algn="l"/>
-            <a:r>
-              <a:rPr sz="1800" b="1">
-                <a:solidFill>
-                  <a:srgbClr val="2180FF"/>
-                </a:solidFill>
-                <a:latin typeface="Noto Sans"/>
-              </a:rPr>
-              <a:t>【Notta】PoC提案書作成</a:t>
-            </a:r>
-          </a:p>
-        </p:txBody>
-      </p:sp>
-      <p:sp>
-        <p:nvSpPr>
-          <p:cNvPr id="10" name="TextBox 9"/>
-          <p:cNvSpPr txBox="1"/>
-          <p:nvPr/>
-        </p:nvSpPr>
-        <p:spPr>
-          <a:xfrm>
-            <a:off x="6341364" y="2446020"/>
-            <a:ext cx="5134356" cy="1524762"/>
-          </a:xfrm>
-          <a:prstGeom prst="rect">
-            <a:avLst/>
-          </a:prstGeom>
-          <a:noFill/>
-        </p:spPr>
-        <p:txBody>
-          <a:bodyPr wrap="square"/>
-          <a:lstStyle/>
-          <a:p>
-            <a:pPr algn="l"/>
-            <a:r>
-              <a:rPr sz="1200" b="0">
-                <a:solidFill>
-                  <a:srgbClr val="262626"/>
-                </a:solidFill>
-                <a:latin typeface="Noto Sans"/>
-              </a:rPr>
-              <a:t>本日の議論を踏まえたPoC設計書を作成。スコープ・工数・予算感・KPIを明記（担当：河野・奥寺）</a:t>
-            </a:r>
-          </a:p>
-        </p:txBody>
-      </p:sp>
-      <p:sp>
-        <p:nvSpPr>
-          <p:cNvPr id="11" name="Rectangle 10"/>
-          <p:cNvSpPr/>
-          <p:nvPr/>
-        </p:nvSpPr>
-        <p:spPr>
-          <a:xfrm>
-            <a:off x="548640" y="4299966"/>
-            <a:ext cx="5463540" cy="2237994"/>
-          </a:xfrm>
-          <a:prstGeom prst="rect">
-            <a:avLst/>
-          </a:prstGeom>
-          <a:solidFill>
-            <a:srgbClr val="FFFFFF"/>
-          </a:solidFill>
-          <a:ln w="9525">
-            <a:solidFill>
-              <a:srgbClr val="E0E0E0"/>
-            </a:solidFill>
-          </a:ln>
-        </p:spPr>
-        <p:style>
-          <a:lnRef idx="1">
-            <a:schemeClr val="accent1"/>
-          </a:lnRef>
-          <a:fillRef idx="3">
-            <a:schemeClr val="accent1"/>
-          </a:fillRef>
-          <a:effectRef idx="2">
-            <a:schemeClr val="accent1"/>
-          </a:effectRef>
-          <a:fontRef idx="minor">
-            <a:schemeClr val="lt1"/>
-          </a:fontRef>
-        </p:style>
-        <p:txBody>
-          <a:bodyPr rtlCol="0" anchor="ctr"/>
-          <a:lstStyle/>
-          <a:p>
-            <a:pPr algn="ctr"/>
-          </a:p>
-        </p:txBody>
-      </p:sp>
-      <p:sp>
-        <p:nvSpPr>
-          <p:cNvPr id="12" name="TextBox 11"/>
-          <p:cNvSpPr txBox="1"/>
-          <p:nvPr/>
-        </p:nvSpPr>
-        <p:spPr>
-          <a:xfrm>
-            <a:off x="713232" y="4464558"/>
-            <a:ext cx="5134356" cy="347472"/>
-          </a:xfrm>
-          <a:prstGeom prst="rect">
-            <a:avLst/>
-          </a:prstGeom>
-          <a:noFill/>
-        </p:spPr>
-        <p:txBody>
-          <a:bodyPr wrap="square"/>
-          <a:lstStyle/>
-          <a:p>
-            <a:pPr algn="l"/>
-            <a:r>
-              <a:rPr sz="1800" b="1">
-                <a:solidFill>
-                  <a:srgbClr val="2180FF"/>
-                </a:solidFill>
-                <a:latin typeface="Noto Sans"/>
-              </a:rPr>
-              <a:t>【双方】次回MTG設定</a:t>
-            </a:r>
-          </a:p>
-        </p:txBody>
-      </p:sp>
-      <p:sp>
-        <p:nvSpPr>
-          <p:cNvPr id="13" name="TextBox 12"/>
-          <p:cNvSpPr txBox="1"/>
-          <p:nvPr/>
-        </p:nvSpPr>
-        <p:spPr>
-          <a:xfrm>
-            <a:off x="713232" y="4848606"/>
-            <a:ext cx="5134356" cy="1524762"/>
-          </a:xfrm>
-          <a:prstGeom prst="rect">
-            <a:avLst/>
-          </a:prstGeom>
-          <a:noFill/>
-        </p:spPr>
-        <p:txBody>
-          <a:bodyPr wrap="square"/>
-          <a:lstStyle/>
-          <a:p>
-            <a:pPr algn="l"/>
-            <a:r>
-              <a:rPr sz="1200" b="0">
-                <a:solidFill>
-                  <a:srgbClr val="262626"/>
-                </a:solidFill>
-                <a:latin typeface="Noto Sans"/>
-              </a:rPr>
-              <a:t>4月第1週にPoC設計確認MTGを設定。技術担当者同士のテクニカルレビューも並行して実施</a:t>
-            </a:r>
-          </a:p>
-        </p:txBody>
-      </p:sp>
-      <p:sp>
-        <p:nvSpPr>
-          <p:cNvPr id="14" name="Rectangle 13"/>
-          <p:cNvSpPr/>
-          <p:nvPr/>
-        </p:nvSpPr>
-        <p:spPr>
-          <a:xfrm>
-            <a:off x="6176772" y="4299966"/>
-            <a:ext cx="5463540" cy="2237994"/>
-          </a:xfrm>
-          <a:prstGeom prst="rect">
-            <a:avLst/>
-          </a:prstGeom>
-          <a:solidFill>
-            <a:srgbClr val="FFFFFF"/>
-          </a:solidFill>
-          <a:ln w="9525">
-            <a:solidFill>
-              <a:srgbClr val="E0E0E0"/>
-            </a:solidFill>
-          </a:ln>
-        </p:spPr>
-        <p:style>
-          <a:lnRef idx="1">
-            <a:schemeClr val="accent1"/>
-          </a:lnRef>
-          <a:fillRef idx="3">
-            <a:schemeClr val="accent1"/>
-          </a:fillRef>
-          <a:effectRef idx="2">
-            <a:schemeClr val="accent1"/>
-          </a:effectRef>
-          <a:fontRef idx="minor">
-            <a:schemeClr val="lt1"/>
-          </a:fontRef>
-        </p:style>
-        <p:txBody>
-          <a:bodyPr rtlCol="0" anchor="ctr"/>
-          <a:lstStyle/>
-          <a:p>
-            <a:pPr algn="ctr"/>
-          </a:p>
-        </p:txBody>
-      </p:sp>
-      <p:sp>
-        <p:nvSpPr>
-          <p:cNvPr id="15" name="TextBox 14"/>
-          <p:cNvSpPr txBox="1"/>
-          <p:nvPr/>
-        </p:nvSpPr>
-        <p:spPr>
-          <a:xfrm>
-            <a:off x="6341364" y="4464558"/>
-            <a:ext cx="5134356" cy="347472"/>
-          </a:xfrm>
-          <a:prstGeom prst="rect">
-            <a:avLst/>
-          </a:prstGeom>
-          <a:noFill/>
-        </p:spPr>
-        <p:txBody>
-          <a:bodyPr wrap="square"/>
-          <a:lstStyle/>
-          <a:p>
-            <a:pPr algn="l"/>
-            <a:r>
-              <a:rPr sz="1800" b="1">
-                <a:solidFill>
-                  <a:srgbClr val="2180FF"/>
-                </a:solidFill>
-                <a:latin typeface="Noto Sans"/>
-              </a:rPr>
-              <a:t>【双方】社内稟議・予算確保</a:t>
-            </a:r>
-          </a:p>
-        </p:txBody>
-      </p:sp>
-      <p:sp>
-        <p:nvSpPr>
-          <p:cNvPr id="16" name="TextBox 15"/>
-          <p:cNvSpPr txBox="1"/>
-          <p:nvPr/>
-        </p:nvSpPr>
-        <p:spPr>
-          <a:xfrm>
-            <a:off x="6341364" y="4848606"/>
-            <a:ext cx="5134356" cy="1524762"/>
-          </a:xfrm>
-          <a:prstGeom prst="rect">
-            <a:avLst/>
-          </a:prstGeom>
-          <a:noFill/>
-        </p:spPr>
-        <p:txBody>
-          <a:bodyPr wrap="square"/>
-          <a:lstStyle/>
-          <a:p>
-            <a:pPr algn="l"/>
-            <a:r>
-              <a:rPr sz="1200" b="0">
-                <a:solidFill>
-                  <a:srgbClr val="262626"/>
-                </a:solidFill>
-                <a:latin typeface="Noto Sans"/>
-              </a:rPr>
-              <a:t>PoC実施に向けた社内承認プロセスを開始。Notta側は開発リソースの確保、CMG側は新規事業予算の確認</a:t>
-            </a:r>
-          </a:p>
-        </p:txBody>
-      </p:sp>
-    </p:spTree>
-  </p:cSld>
-  <p:clrMapOvr>
-    <a:masterClrMapping/>
-  </p:clrMapOvr>
-</p:sld>
-</file>
-
 <file path=ppt/slides/slide2.xml><?xml version="1.0" encoding="utf-8"?>
 <p:sld xmlns:a="http://schemas.openxmlformats.org/drawingml/2006/main" xmlns:p="http://schemas.openxmlformats.org/presentationml/2006/main" xmlns:r="http://schemas.openxmlformats.org/officeDocument/2006/relationships">
   <p:cSld>
@@ -5527,7 +3938,7 @@
                 </a:solidFill>
                 <a:latin typeface="Noto Sans"/>
               </a:rPr>
-              <a:t>本日の議論サマリー</a:t>
+              <a:t>本日の議論サマリー（2026.03.12 / 50分）</a:t>
             </a:r>
           </a:p>
         </p:txBody>
@@ -5603,7 +4014,7 @@
                 </a:solidFill>
                 <a:latin typeface="Noto Sans"/>
               </a:rPr>
-              <a:t>50分の議論を通じ、音声データを起点とした「リサーチ自動化フロー」の方向性が合致。次回PoC設計へ進む</a:t>
+              <a:t>「会議音声→調査設計→配信→レポート」の完全自動化フローについて両社の方向性が合致。4月頭のPoC設計MTGへ移行することを合意</a:t>
             </a:r>
           </a:p>
         </p:txBody>
@@ -5617,18 +4028,16 @@
         <p:spPr>
           <a:xfrm>
             <a:off x="548640" y="1897380"/>
-            <a:ext cx="5463540" cy="2237994"/>
+            <a:ext cx="5463540" cy="1437132"/>
           </a:xfrm>
           <a:prstGeom prst="rect">
             <a:avLst/>
           </a:prstGeom>
           <a:solidFill>
-            <a:srgbClr val="FFFFFF"/>
+            <a:srgbClr val="F5F5F5"/>
           </a:solidFill>
-          <a:ln w="9525">
-            <a:solidFill>
-              <a:srgbClr val="E0E0E0"/>
-            </a:solidFill>
+          <a:ln>
+            <a:noFill/>
           </a:ln>
         </p:spPr>
         <p:style>
@@ -5681,7 +4090,7 @@
                 </a:solidFill>
                 <a:latin typeface="Noto Sans"/>
               </a:rPr>
-              <a:t>課題認識の一致</a:t>
+              <a:t>①ビジネスモデル転換の認識共有</a:t>
             </a:r>
           </a:p>
         </p:txBody>
@@ -5695,7 +4104,7 @@
         <p:spPr>
           <a:xfrm>
             <a:off x="713232" y="2446020"/>
-            <a:ext cx="5134356" cy="1524762"/>
+            <a:ext cx="5134356" cy="723900"/>
           </a:xfrm>
           <a:prstGeom prst="rect">
             <a:avLst/>
@@ -5714,7 +4123,7 @@
                 </a:solidFill>
                 <a:latin typeface="Noto Sans"/>
               </a:rPr>
-              <a:t>CMGの調査業務における人手依存・属人化・長いリードタイムについて認識が共有された</a:t>
+              <a:t>CMGの受託アドホック調査はAI・XMプラットフォームの台頭でシュリンク局面。社内検証で「10年リサーチャーと同水準の調査設計をAIが実現」を確認済み。受託収益への依存を下げSaaSプラットフォームへ転換することが急務という認識を双方で確認した。</a:t>
             </a:r>
           </a:p>
         </p:txBody>
@@ -5728,18 +4137,16 @@
         <p:spPr>
           <a:xfrm>
             <a:off x="6176772" y="1897380"/>
-            <a:ext cx="5463540" cy="2237994"/>
+            <a:ext cx="5463540" cy="1437132"/>
           </a:xfrm>
           <a:prstGeom prst="rect">
             <a:avLst/>
           </a:prstGeom>
           <a:solidFill>
-            <a:srgbClr val="FFFFFF"/>
+            <a:srgbClr val="F5F5F5"/>
           </a:solidFill>
-          <a:ln w="9525">
-            <a:solidFill>
-              <a:srgbClr val="E0E0E0"/>
-            </a:solidFill>
+          <a:ln>
+            <a:noFill/>
           </a:ln>
         </p:spPr>
         <p:style>
@@ -5792,7 +4199,7 @@
                 </a:solidFill>
                 <a:latin typeface="Noto Sans"/>
               </a:rPr>
-              <a:t>協業スコープの絞り込み</a:t>
+              <a:t>②協業スコープの絞り込み</a:t>
             </a:r>
           </a:p>
         </p:txBody>
@@ -5806,7 +4213,7 @@
         <p:spPr>
           <a:xfrm>
             <a:off x="6341364" y="2446020"/>
-            <a:ext cx="5134356" cy="1524762"/>
+            <a:ext cx="5134356" cy="723900"/>
           </a:xfrm>
           <a:prstGeom prst="rect">
             <a:avLst/>
@@ -5825,7 +4232,7 @@
                 </a:solidFill>
                 <a:latin typeface="Noto Sans"/>
               </a:rPr>
-              <a:t>「会議音声 → 調査設計AI → アンケート配信」のフロー連携をミニマムスコープとして合意</a:t>
+              <a:t>当初提案の「グループ30社横断プラットフォーム」から、まず「会議音声→Notta構造化→CMG調査設計AI→秋雲配信」のミニマムフロー検証にスコープを絞ることを合意。現状7ステップの調査プロセスを「設計承認」「結果確認」の2ステップに圧縮するシナリオを設計方針とする。</a:t>
             </a:r>
           </a:p>
         </p:txBody>
@@ -5838,19 +4245,17 @@
         </p:nvSpPr>
         <p:spPr>
           <a:xfrm>
-            <a:off x="548640" y="4299966"/>
-            <a:ext cx="5463540" cy="2237994"/>
+            <a:off x="548640" y="3499104"/>
+            <a:ext cx="5463540" cy="1437132"/>
           </a:xfrm>
           <a:prstGeom prst="rect">
             <a:avLst/>
           </a:prstGeom>
           <a:solidFill>
-            <a:srgbClr val="FFFFFF"/>
+            <a:srgbClr val="F5F5F5"/>
           </a:solidFill>
-          <a:ln w="9525">
-            <a:solidFill>
-              <a:srgbClr val="E0E0E0"/>
-            </a:solidFill>
+          <a:ln>
+            <a:noFill/>
           </a:ln>
         </p:spPr>
         <p:style>
@@ -5883,7 +4288,7 @@
         </p:nvSpPr>
         <p:spPr>
           <a:xfrm>
-            <a:off x="713232" y="4464558"/>
+            <a:off x="713232" y="3663696"/>
             <a:ext cx="5134356" cy="347472"/>
           </a:xfrm>
           <a:prstGeom prst="rect">
@@ -5903,7 +4308,7 @@
                 </a:solidFill>
                 <a:latin typeface="Noto Sans"/>
               </a:rPr>
-              <a:t>インターフェース方針</a:t>
+              <a:t>③ユーザーセグメントの解像度向上</a:t>
             </a:r>
           </a:p>
         </p:txBody>
@@ -5916,8 +4321,8 @@
         </p:nvSpPr>
         <p:spPr>
           <a:xfrm>
-            <a:off x="713232" y="4848606"/>
-            <a:ext cx="5134356" cy="1524762"/>
+            <a:off x="713232" y="4047744"/>
+            <a:ext cx="5134356" cy="723900"/>
           </a:xfrm>
           <a:prstGeom prst="rect">
             <a:avLst/>
@@ -5936,7 +4341,7 @@
                 </a:solidFill>
                 <a:latin typeface="Noto Sans"/>
               </a:rPr>
-              <a:t>NottaのUI/UXをそのままクライアントに提供し、データ連携はAPI経由で行うモデルに合意</a:t>
+              <a:t>CMGユーザーの85%は「目的・背景・経緯を入力するだけで調査設計が自動完成」を求めるノンリサーチャー層（事業会社マーケター・新規事業担当）。残り15%はリサーチャー・上級ユーザーでプロンプトカスタマイズ＋仮説検証フローが必要。2レイヤーの提供方式で対応する。</a:t>
             </a:r>
           </a:p>
         </p:txBody>
@@ -5949,19 +4354,17 @@
         </p:nvSpPr>
         <p:spPr>
           <a:xfrm>
-            <a:off x="6176772" y="4299966"/>
-            <a:ext cx="5463540" cy="2237994"/>
+            <a:off x="6176772" y="3499104"/>
+            <a:ext cx="5463540" cy="1437132"/>
           </a:xfrm>
           <a:prstGeom prst="rect">
             <a:avLst/>
           </a:prstGeom>
           <a:solidFill>
-            <a:srgbClr val="FFFFFF"/>
+            <a:srgbClr val="F5F5F5"/>
           </a:solidFill>
-          <a:ln w="9525">
-            <a:solidFill>
-              <a:srgbClr val="E0E0E0"/>
-            </a:solidFill>
+          <a:ln>
+            <a:noFill/>
           </a:ln>
         </p:spPr>
         <p:style>
@@ -5994,7 +4397,7 @@
         </p:nvSpPr>
         <p:spPr>
           <a:xfrm>
-            <a:off x="6341364" y="4464558"/>
+            <a:off x="6341364" y="3663696"/>
             <a:ext cx="5134356" cy="347472"/>
           </a:xfrm>
           <a:prstGeom prst="rect">
@@ -6014,7 +4417,7 @@
                 </a:solidFill>
                 <a:latin typeface="Noto Sans"/>
               </a:rPr>
-              <a:t>次のアクション</a:t>
+              <a:t>④インターフェース・技術方針の決定</a:t>
             </a:r>
           </a:p>
         </p:txBody>
@@ -6027,8 +4430,8 @@
         </p:nvSpPr>
         <p:spPr>
           <a:xfrm>
-            <a:off x="6341364" y="4848606"/>
-            <a:ext cx="5134356" cy="1524762"/>
+            <a:off x="6341364" y="4047744"/>
+            <a:ext cx="5134356" cy="723900"/>
           </a:xfrm>
           <a:prstGeom prst="rect">
             <a:avLst/>
@@ -6047,7 +4450,225 @@
                 </a:solidFill>
                 <a:latin typeface="Noto Sans"/>
               </a:rPr>
-              <a:t>4月頭に両社プロダクトのデモ・要件整理MTGを設定。PoC予算感も含めて議論</a:t>
+              <a:t>クライアントはNottaのUI/UXをそのまま使用（後者モデル）。CMGは独自UI開発コストを持たず、Notta APIでデータを受け取り後工程を自律稼働させるAPI連携型を採用。ハードウェア（Meeting Owl等）は情報管理コストの観点から対象外とし、ソフトウェアのみで完結させる方針に合意した。</a:t>
+            </a:r>
+          </a:p>
+        </p:txBody>
+      </p:sp>
+      <p:sp>
+        <p:nvSpPr>
+          <p:cNvPr id="17" name="Rectangle 16"/>
+          <p:cNvSpPr/>
+          <p:nvPr/>
+        </p:nvSpPr>
+        <p:spPr>
+          <a:xfrm>
+            <a:off x="548640" y="5100828"/>
+            <a:ext cx="5463540" cy="1437132"/>
+          </a:xfrm>
+          <a:prstGeom prst="rect">
+            <a:avLst/>
+          </a:prstGeom>
+          <a:solidFill>
+            <a:srgbClr val="F5F5F5"/>
+          </a:solidFill>
+          <a:ln>
+            <a:noFill/>
+          </a:ln>
+        </p:spPr>
+        <p:style>
+          <a:lnRef idx="1">
+            <a:schemeClr val="accent1"/>
+          </a:lnRef>
+          <a:fillRef idx="3">
+            <a:schemeClr val="accent1"/>
+          </a:fillRef>
+          <a:effectRef idx="2">
+            <a:schemeClr val="accent1"/>
+          </a:effectRef>
+          <a:fontRef idx="minor">
+            <a:schemeClr val="lt1"/>
+          </a:fontRef>
+        </p:style>
+        <p:txBody>
+          <a:bodyPr rtlCol="0" anchor="ctr"/>
+          <a:lstStyle/>
+          <a:p>
+            <a:pPr algn="ctr"/>
+          </a:p>
+        </p:txBody>
+      </p:sp>
+      <p:sp>
+        <p:nvSpPr>
+          <p:cNvPr id="18" name="TextBox 17"/>
+          <p:cNvSpPr txBox="1"/>
+          <p:nvPr/>
+        </p:nvSpPr>
+        <p:spPr>
+          <a:xfrm>
+            <a:off x="713232" y="5265420"/>
+            <a:ext cx="5134356" cy="347472"/>
+          </a:xfrm>
+          <a:prstGeom prst="rect">
+            <a:avLst/>
+          </a:prstGeom>
+          <a:noFill/>
+        </p:spPr>
+        <p:txBody>
+          <a:bodyPr wrap="square"/>
+          <a:lstStyle/>
+          <a:p>
+            <a:pPr algn="l"/>
+            <a:r>
+              <a:rPr sz="1800" b="1">
+                <a:solidFill>
+                  <a:srgbClr val="2180FF"/>
+                </a:solidFill>
+                <a:latin typeface="Noto Sans"/>
+              </a:rPr>
+              <a:t>⑤CMGの2プロダクト体制を確認</a:t>
+            </a:r>
+          </a:p>
+        </p:txBody>
+      </p:sp>
+      <p:sp>
+        <p:nvSpPr>
+          <p:cNvPr id="19" name="TextBox 18"/>
+          <p:cNvSpPr txBox="1"/>
+          <p:nvPr/>
+        </p:nvSpPr>
+        <p:spPr>
+          <a:xfrm>
+            <a:off x="713232" y="5649468"/>
+            <a:ext cx="5134356" cy="723900"/>
+          </a:xfrm>
+          <a:prstGeom prst="rect">
+            <a:avLst/>
+          </a:prstGeom>
+          <a:noFill/>
+        </p:spPr>
+        <p:txBody>
+          <a:bodyPr wrap="square"/>
+          <a:lstStyle/>
+          <a:p>
+            <a:pPr algn="l"/>
+            <a:r>
+              <a:rPr sz="1200" b="0">
+                <a:solidFill>
+                  <a:srgbClr val="262626"/>
+                </a:solidFill>
+                <a:latin typeface="Noto Sans"/>
+              </a:rPr>
+              <a:t>「秋雲（マーケター向けセルフアンケートツール）」と「リサーチャー専用システム（プロトタイプ完成済み）」の2プロダクトが連携対象。さらに顧客ポータル（受注管理・レポート納品・請求）とのデータ統合がプラットフォーム構想の中核を担う。Notta音声データはこの3レイヤーを横断するインプットとなる。</a:t>
+            </a:r>
+          </a:p>
+        </p:txBody>
+      </p:sp>
+      <p:sp>
+        <p:nvSpPr>
+          <p:cNvPr id="20" name="Rectangle 19"/>
+          <p:cNvSpPr/>
+          <p:nvPr/>
+        </p:nvSpPr>
+        <p:spPr>
+          <a:xfrm>
+            <a:off x="6176772" y="5100828"/>
+            <a:ext cx="5463540" cy="1437132"/>
+          </a:xfrm>
+          <a:prstGeom prst="rect">
+            <a:avLst/>
+          </a:prstGeom>
+          <a:solidFill>
+            <a:srgbClr val="F5F5F5"/>
+          </a:solidFill>
+          <a:ln>
+            <a:noFill/>
+          </a:ln>
+        </p:spPr>
+        <p:style>
+          <a:lnRef idx="1">
+            <a:schemeClr val="accent1"/>
+          </a:lnRef>
+          <a:fillRef idx="3">
+            <a:schemeClr val="accent1"/>
+          </a:fillRef>
+          <a:effectRef idx="2">
+            <a:schemeClr val="accent1"/>
+          </a:effectRef>
+          <a:fontRef idx="minor">
+            <a:schemeClr val="lt1"/>
+          </a:fontRef>
+        </p:style>
+        <p:txBody>
+          <a:bodyPr rtlCol="0" anchor="ctr"/>
+          <a:lstStyle/>
+          <a:p>
+            <a:pPr algn="ctr"/>
+          </a:p>
+        </p:txBody>
+      </p:sp>
+      <p:sp>
+        <p:nvSpPr>
+          <p:cNvPr id="21" name="TextBox 20"/>
+          <p:cNvSpPr txBox="1"/>
+          <p:nvPr/>
+        </p:nvSpPr>
+        <p:spPr>
+          <a:xfrm>
+            <a:off x="6341364" y="5265420"/>
+            <a:ext cx="5134356" cy="347472"/>
+          </a:xfrm>
+          <a:prstGeom prst="rect">
+            <a:avLst/>
+          </a:prstGeom>
+          <a:noFill/>
+        </p:spPr>
+        <p:txBody>
+          <a:bodyPr wrap="square"/>
+          <a:lstStyle/>
+          <a:p>
+            <a:pPr algn="l"/>
+            <a:r>
+              <a:rPr sz="1800" b="1">
+                <a:solidFill>
+                  <a:srgbClr val="2180FF"/>
+                </a:solidFill>
+                <a:latin typeface="Noto Sans"/>
+              </a:rPr>
+              <a:t>⑥PoC方針・次回MTGの合意</a:t>
+            </a:r>
+          </a:p>
+        </p:txBody>
+      </p:sp>
+      <p:sp>
+        <p:nvSpPr>
+          <p:cNvPr id="22" name="TextBox 21"/>
+          <p:cNvSpPr txBox="1"/>
+          <p:nvPr/>
+        </p:nvSpPr>
+        <p:spPr>
+          <a:xfrm>
+            <a:off x="6341364" y="5649468"/>
+            <a:ext cx="5134356" cy="723900"/>
+          </a:xfrm>
+          <a:prstGeom prst="rect">
+            <a:avLst/>
+          </a:prstGeom>
+          <a:noFill/>
+        </p:spPr>
+        <p:txBody>
+          <a:bodyPr wrap="square"/>
+          <a:lstStyle/>
+          <a:p>
+            <a:pPr algn="l"/>
+            <a:r>
+              <a:rPr sz="1200" b="0">
+                <a:solidFill>
+                  <a:srgbClr val="262626"/>
+                </a:solidFill>
+                <a:latin typeface="Noto Sans"/>
+              </a:rPr>
+              <a:t>「失敗しても数百万円で収まる」規模のスモールスタートでフロー技術検証を実施することを確認。4月第1週に両社プロダクトデモ＋要件整理MTGを設定。技術担当者レベルでのAPI仕様・データスキーマの詳細確認を並行実施し、予算感・開発分担も次回で合意する。</a:t>
             </a:r>
           </a:p>
         </p:txBody>
@@ -6106,7 +4727,7 @@
                 </a:solidFill>
                 <a:latin typeface="Noto Sans"/>
               </a:rPr>
-              <a:t>CMGを取り巻く市場環境</a:t>
+              <a:t>協業で実現する「音声起点リサーチ自動化フロー」</a:t>
             </a:r>
           </a:p>
         </p:txBody>
@@ -6182,7 +4803,7 @@
                 </a:solidFill>
                 <a:latin typeface="Noto Sans"/>
               </a:rPr>
-              <a:t>従来型リサーチ市場はAI・XMプラットフォームの台頭でシュリンク局面へ。プラットフォームへの転換が急務</a:t>
+              <a:t>クライアントの会議が終わった瞬間に調査設計が完成している世界。Notta × CMGのバリューチェーン統合で業界初のEnd-to-Endリサーチ自動化を実現する</a:t>
             </a:r>
           </a:p>
         </p:txBody>
@@ -6196,18 +4817,16 @@
         <p:spPr>
           <a:xfrm>
             <a:off x="548640" y="1897380"/>
-            <a:ext cx="5463540" cy="2237994"/>
+            <a:ext cx="5463540" cy="1437132"/>
           </a:xfrm>
           <a:prstGeom prst="rect">
             <a:avLst/>
           </a:prstGeom>
           <a:solidFill>
-            <a:srgbClr val="FFFFFF"/>
+            <a:srgbClr val="F5F5F5"/>
           </a:solidFill>
-          <a:ln w="9525">
-            <a:solidFill>
-              <a:srgbClr val="E0E0E0"/>
-            </a:solidFill>
+          <a:ln>
+            <a:noFill/>
           </a:ln>
         </p:spPr>
         <p:style>
@@ -6260,7 +4879,7 @@
                 </a:solidFill>
                 <a:latin typeface="Noto Sans"/>
               </a:rPr>
-              <a:t>定量調査のセルフ化加速</a:t>
+              <a:t>STEP 0｜クライアント会議データの取得</a:t>
             </a:r>
           </a:p>
         </p:txBody>
@@ -6274,7 +4893,7 @@
         <p:spPr>
           <a:xfrm>
             <a:off x="713232" y="2446020"/>
-            <a:ext cx="5134356" cy="1524762"/>
+            <a:ext cx="5134356" cy="723900"/>
           </a:xfrm>
           <a:prstGeom prst="rect">
             <a:avLst/>
@@ -6293,7 +4912,7 @@
                 </a:solidFill>
                 <a:latin typeface="Noto Sans"/>
               </a:rPr>
-              <a:t>Qualtrics等のXMプラットフォームが国内でも拡大。従来の受託アドホック調査のシェアが低下局面に入っている</a:t>
+              <a:t>商品企画会議・新規事業ブリーフィング・クライアントとのキックオフMTGをNottaで録音。Google Meet / Zoom / Teams とのネイティブ連携により既存インフラを変更不要で活用。話者自動分離（Diarization）で「誰が何を言ったか」をラベル付き構造化データとして保持。</a:t>
             </a:r>
           </a:p>
         </p:txBody>
@@ -6307,18 +4926,16 @@
         <p:spPr>
           <a:xfrm>
             <a:off x="6176772" y="1897380"/>
-            <a:ext cx="5463540" cy="2237994"/>
+            <a:ext cx="5463540" cy="1437132"/>
           </a:xfrm>
           <a:prstGeom prst="rect">
             <a:avLst/>
           </a:prstGeom>
           <a:solidFill>
-            <a:srgbClr val="FFFFFF"/>
+            <a:srgbClr val="F5F5F5"/>
           </a:solidFill>
-          <a:ln w="9525">
-            <a:solidFill>
-              <a:srgbClr val="E0E0E0"/>
-            </a:solidFill>
+          <a:ln>
+            <a:noFill/>
           </a:ln>
         </p:spPr>
         <p:style>
@@ -6371,7 +4988,7 @@
                 </a:solidFill>
                 <a:latin typeface="Noto Sans"/>
               </a:rPr>
-              <a:t>定性調査にも「速さ×深さ」要求</a:t>
+              <a:t>STEP 1｜高精度日本語ASR＋Brain構造化（Notta）</a:t>
             </a:r>
           </a:p>
         </p:txBody>
@@ -6385,7 +5002,7 @@
         <p:spPr>
           <a:xfrm>
             <a:off x="6341364" y="2446020"/>
-            <a:ext cx="5134356" cy="1524762"/>
+            <a:ext cx="5134356" cy="723900"/>
           </a:xfrm>
           <a:prstGeom prst="rect">
             <a:avLst/>
@@ -6404,7 +5021,7 @@
                 </a:solidFill>
                 <a:latin typeface="Noto Sans"/>
               </a:rPr>
-              <a:t>FGI・IDIの結果を待つ余裕がなくなり、リアルタイムに近い意思決定インサイトが求められている</a:t>
+              <a:t>日本語特化ASRで文字起こし精度WER 5%以下を確保。Notta Brainが会議テキストから「調査目的・課題仮説・論点・アクション」をJSON形式で自動抽出。CMGリサーチャー設計のプロンプトテンプレートを組み込み、アウトプットをリサーチ文脈に最適化する。過去調査データのRAG参照で業界固有の文脈も補完。</a:t>
             </a:r>
           </a:p>
         </p:txBody>
@@ -6417,19 +5034,17 @@
         </p:nvSpPr>
         <p:spPr>
           <a:xfrm>
-            <a:off x="548640" y="4299966"/>
-            <a:ext cx="5463540" cy="2237994"/>
+            <a:off x="548640" y="3499104"/>
+            <a:ext cx="5463540" cy="1437132"/>
           </a:xfrm>
           <a:prstGeom prst="rect">
             <a:avLst/>
           </a:prstGeom>
           <a:solidFill>
-            <a:srgbClr val="FFFFFF"/>
+            <a:srgbClr val="F5F5F5"/>
           </a:solidFill>
-          <a:ln w="9525">
-            <a:solidFill>
-              <a:srgbClr val="E0E0E0"/>
-            </a:solidFill>
+          <a:ln>
+            <a:noFill/>
           </a:ln>
         </p:spPr>
         <p:style>
@@ -6462,7 +5077,7 @@
         </p:nvSpPr>
         <p:spPr>
           <a:xfrm>
-            <a:off x="713232" y="4464558"/>
+            <a:off x="713232" y="3663696"/>
             <a:ext cx="5134356" cy="347472"/>
           </a:xfrm>
           <a:prstGeom prst="rect">
@@ -6482,7 +5097,7 @@
                 </a:solidFill>
                 <a:latin typeface="Noto Sans"/>
               </a:rPr>
-              <a:t>AIが調査設計を代替し始めた</a:t>
+              <a:t>STEP 2｜JSONデータをCMG調査設計AIへ受け渡し</a:t>
             </a:r>
           </a:p>
         </p:txBody>
@@ -6495,8 +5110,8 @@
         </p:nvSpPr>
         <p:spPr>
           <a:xfrm>
-            <a:off x="713232" y="4848606"/>
-            <a:ext cx="5134356" cy="1524762"/>
+            <a:off x="713232" y="4047744"/>
+            <a:ext cx="5134356" cy="723900"/>
           </a:xfrm>
           <a:prstGeom prst="rect">
             <a:avLst/>
@@ -6515,7 +5130,7 @@
                 </a:solidFill>
                 <a:latin typeface="Noto Sans"/>
               </a:rPr>
-              <a:t>CMG社内検証でも「10年のリサーチャーと同水準の調査設計」をAIが実現。高付加価値領域のAI代替が現実化</a:t>
+              <a:t>NottaがAPI Webhookで構造化JSONをCMG調査設計AIにリアルタイム送信。フィールドマッピング：会議目的→調査目的、仮説→設問軸、論点→選択肢候補。CMGが保有する数万件の過去調査データをベクターDBに格納したRAGシステムで類似調査のベストプラクティスを参照し設問品質を担保する。</a:t>
             </a:r>
           </a:p>
         </p:txBody>
@@ -6528,19 +5143,17 @@
         </p:nvSpPr>
         <p:spPr>
           <a:xfrm>
-            <a:off x="6176772" y="4299966"/>
-            <a:ext cx="5463540" cy="2237994"/>
+            <a:off x="6176772" y="3499104"/>
+            <a:ext cx="5463540" cy="1437132"/>
           </a:xfrm>
           <a:prstGeom prst="rect">
             <a:avLst/>
           </a:prstGeom>
           <a:solidFill>
-            <a:srgbClr val="FFFFFF"/>
+            <a:srgbClr val="F5F5F5"/>
           </a:solidFill>
-          <a:ln w="9525">
-            <a:solidFill>
-              <a:srgbClr val="E0E0E0"/>
-            </a:solidFill>
+          <a:ln>
+            <a:noFill/>
           </a:ln>
         </p:spPr>
         <p:style>
@@ -6573,7 +5186,7 @@
         </p:nvSpPr>
         <p:spPr>
           <a:xfrm>
-            <a:off x="6341364" y="4464558"/>
+            <a:off x="6341364" y="3663696"/>
             <a:ext cx="5134356" cy="347472"/>
           </a:xfrm>
           <a:prstGeom prst="rect">
@@ -6593,7 +5206,7 @@
                 </a:solidFill>
                 <a:latin typeface="Noto Sans"/>
               </a:rPr>
-              <a:t>リードタイムへの圧力</a:t>
+              <a:t>STEP 3｜調査設計の自動生成と人間承認（CMG AI）</a:t>
             </a:r>
           </a:p>
         </p:txBody>
@@ -6606,8 +5219,8 @@
         </p:nvSpPr>
         <p:spPr>
           <a:xfrm>
-            <a:off x="6341364" y="4848606"/>
-            <a:ext cx="5134356" cy="1524762"/>
+            <a:off x="6341364" y="4047744"/>
+            <a:ext cx="5134356" cy="723900"/>
           </a:xfrm>
           <a:prstGeom prst="rect">
             <a:avLst/>
@@ -6626,7 +5239,225 @@
                 </a:solidFill>
                 <a:latin typeface="Noto Sans"/>
               </a:rPr>
-              <a:t>調査企画から納品まで7ステップ以上・数週間を要する現状に対し、クライアントの意思決定スピードは加速。構造的なミスマッチ</a:t>
+              <a:t>調査手法選定（Webアンケート／会場型／IDI等）→設問文生成→選択肢・スクリーナー・分岐ロジック設定→サンプル条件定義まで全自動実行。生成AIが「85%層向け：全自動モード」と「15%層向け：仮説ドリブン提案モード」を自動判定して出力形式を切り替える。人間の関与は「承認 or 修正」の2択のみ。</a:t>
+            </a:r>
+          </a:p>
+        </p:txBody>
+      </p:sp>
+      <p:sp>
+        <p:nvSpPr>
+          <p:cNvPr id="17" name="Rectangle 16"/>
+          <p:cNvSpPr/>
+          <p:nvPr/>
+        </p:nvSpPr>
+        <p:spPr>
+          <a:xfrm>
+            <a:off x="548640" y="5100828"/>
+            <a:ext cx="5463540" cy="1437132"/>
+          </a:xfrm>
+          <a:prstGeom prst="rect">
+            <a:avLst/>
+          </a:prstGeom>
+          <a:solidFill>
+            <a:srgbClr val="F5F5F5"/>
+          </a:solidFill>
+          <a:ln>
+            <a:noFill/>
+          </a:ln>
+        </p:spPr>
+        <p:style>
+          <a:lnRef idx="1">
+            <a:schemeClr val="accent1"/>
+          </a:lnRef>
+          <a:fillRef idx="3">
+            <a:schemeClr val="accent1"/>
+          </a:fillRef>
+          <a:effectRef idx="2">
+            <a:schemeClr val="accent1"/>
+          </a:effectRef>
+          <a:fontRef idx="minor">
+            <a:schemeClr val="lt1"/>
+          </a:fontRef>
+        </p:style>
+        <p:txBody>
+          <a:bodyPr rtlCol="0" anchor="ctr"/>
+          <a:lstStyle/>
+          <a:p>
+            <a:pPr algn="ctr"/>
+          </a:p>
+        </p:txBody>
+      </p:sp>
+      <p:sp>
+        <p:nvSpPr>
+          <p:cNvPr id="18" name="TextBox 17"/>
+          <p:cNvSpPr txBox="1"/>
+          <p:nvPr/>
+        </p:nvSpPr>
+        <p:spPr>
+          <a:xfrm>
+            <a:off x="713232" y="5265420"/>
+            <a:ext cx="5134356" cy="347472"/>
+          </a:xfrm>
+          <a:prstGeom prst="rect">
+            <a:avLst/>
+          </a:prstGeom>
+          <a:noFill/>
+        </p:spPr>
+        <p:txBody>
+          <a:bodyPr wrap="square"/>
+          <a:lstStyle/>
+          <a:p>
+            <a:pPr algn="l"/>
+            <a:r>
+              <a:rPr sz="1800" b="1">
+                <a:solidFill>
+                  <a:srgbClr val="2180FF"/>
+                </a:solidFill>
+                <a:latin typeface="Noto Sans"/>
+              </a:rPr>
+              <a:t>STEP 4｜アンケート配信・回収（CMG「秋雲」）</a:t>
+            </a:r>
+          </a:p>
+        </p:txBody>
+      </p:sp>
+      <p:sp>
+        <p:nvSpPr>
+          <p:cNvPr id="19" name="TextBox 18"/>
+          <p:cNvSpPr txBox="1"/>
+          <p:nvPr/>
+        </p:nvSpPr>
+        <p:spPr>
+          <a:xfrm>
+            <a:off x="713232" y="5649468"/>
+            <a:ext cx="5134356" cy="723900"/>
+          </a:xfrm>
+          <a:prstGeom prst="rect">
+            <a:avLst/>
+          </a:prstGeom>
+          <a:noFill/>
+        </p:spPr>
+        <p:txBody>
+          <a:bodyPr wrap="square"/>
+          <a:lstStyle/>
+          <a:p>
+            <a:pPr algn="l"/>
+            <a:r>
+              <a:rPr sz="1200" b="0">
+                <a:solidFill>
+                  <a:srgbClr val="262626"/>
+                </a:solidFill>
+                <a:latin typeface="Noto Sans"/>
+              </a:rPr>
+              <a:t>承認済み調査設計を秋雲へ自動流し込み（APIインジェスト）。MAと連携してターゲットセグメントへ配信。N数管理・回収率リアルタイムモニタリング・不完全回答の自動除外・クォータ管理をシステムが自律稼働。会場型の場合はQRコード発行→タブレット入力→即時回収フローに切り替え。</a:t>
+            </a:r>
+          </a:p>
+        </p:txBody>
+      </p:sp>
+      <p:sp>
+        <p:nvSpPr>
+          <p:cNvPr id="20" name="Rectangle 19"/>
+          <p:cNvSpPr/>
+          <p:nvPr/>
+        </p:nvSpPr>
+        <p:spPr>
+          <a:xfrm>
+            <a:off x="6176772" y="5100828"/>
+            <a:ext cx="5463540" cy="1437132"/>
+          </a:xfrm>
+          <a:prstGeom prst="rect">
+            <a:avLst/>
+          </a:prstGeom>
+          <a:solidFill>
+            <a:srgbClr val="F5F5F5"/>
+          </a:solidFill>
+          <a:ln>
+            <a:noFill/>
+          </a:ln>
+        </p:spPr>
+        <p:style>
+          <a:lnRef idx="1">
+            <a:schemeClr val="accent1"/>
+          </a:lnRef>
+          <a:fillRef idx="3">
+            <a:schemeClr val="accent1"/>
+          </a:fillRef>
+          <a:effectRef idx="2">
+            <a:schemeClr val="accent1"/>
+          </a:effectRef>
+          <a:fontRef idx="minor">
+            <a:schemeClr val="lt1"/>
+          </a:fontRef>
+        </p:style>
+        <p:txBody>
+          <a:bodyPr rtlCol="0" anchor="ctr"/>
+          <a:lstStyle/>
+          <a:p>
+            <a:pPr algn="ctr"/>
+          </a:p>
+        </p:txBody>
+      </p:sp>
+      <p:sp>
+        <p:nvSpPr>
+          <p:cNvPr id="21" name="TextBox 20"/>
+          <p:cNvSpPr txBox="1"/>
+          <p:nvPr/>
+        </p:nvSpPr>
+        <p:spPr>
+          <a:xfrm>
+            <a:off x="6341364" y="5265420"/>
+            <a:ext cx="5134356" cy="347472"/>
+          </a:xfrm>
+          <a:prstGeom prst="rect">
+            <a:avLst/>
+          </a:prstGeom>
+          <a:noFill/>
+        </p:spPr>
+        <p:txBody>
+          <a:bodyPr wrap="square"/>
+          <a:lstStyle/>
+          <a:p>
+            <a:pPr algn="l"/>
+            <a:r>
+              <a:rPr sz="1800" b="1">
+                <a:solidFill>
+                  <a:srgbClr val="2180FF"/>
+                </a:solidFill>
+                <a:latin typeface="Noto Sans"/>
+              </a:rPr>
+              <a:t>STEP 5｜LLMレポート生成→顧客ポータル納品</a:t>
+            </a:r>
+          </a:p>
+        </p:txBody>
+      </p:sp>
+      <p:sp>
+        <p:nvSpPr>
+          <p:cNvPr id="22" name="TextBox 21"/>
+          <p:cNvSpPr txBox="1"/>
+          <p:nvPr/>
+        </p:nvSpPr>
+        <p:spPr>
+          <a:xfrm>
+            <a:off x="6341364" y="5649468"/>
+            <a:ext cx="5134356" cy="723900"/>
+          </a:xfrm>
+          <a:prstGeom prst="rect">
+            <a:avLst/>
+          </a:prstGeom>
+          <a:noFill/>
+        </p:spPr>
+        <p:txBody>
+          <a:bodyPr wrap="square"/>
+          <a:lstStyle/>
+          <a:p>
+            <a:pPr algn="l"/>
+            <a:r>
+              <a:rPr sz="1200" b="0">
+                <a:solidFill>
+                  <a:srgbClr val="262626"/>
+                </a:solidFill>
+                <a:latin typeface="Noto Sans"/>
+              </a:rPr>
+              <a:t>回収データからLLMがレポートのたたき台（示唆・インサイト・推奨アクション・クロス集計）を生成。CMGリサーチャーが品質確認後、顧客ポータルへアップロード。クライアントはポータルで確認・承認→請求管理へ自動連携。「会議終了→レポート確認」まで最短1〜2営業日を目指す。</a:t>
             </a:r>
           </a:p>
         </p:txBody>
@@ -6685,7 +5516,7 @@
                 </a:solidFill>
                 <a:latin typeface="Noto Sans"/>
               </a:rPr>
-              <a:t>CMGの戦略的方向性</a:t>
+              <a:t>技術連携方針：アーキテクチャ・セキュリティ・開発分担</a:t>
             </a:r>
           </a:p>
         </p:txBody>
@@ -6761,7 +5592,7 @@
                 </a:solidFill>
                 <a:latin typeface="Noto Sans"/>
               </a:rPr>
-              <a:t>受託リサーチからリサーチ・プラットフォームへ。クライアントの意思決定全プロセスを自動化する「国産XM」を目指す</a:t>
+              <a:t>CMG側のエンジニアリソースを最小化しつつ、エンタープライズ水準のセキュリティと拡張性を両立するAPI連携アーキテクチャを採用する</a:t>
             </a:r>
           </a:p>
         </p:txBody>
@@ -6775,18 +5606,16 @@
         <p:spPr>
           <a:xfrm>
             <a:off x="548640" y="1897380"/>
-            <a:ext cx="5463540" cy="2237994"/>
+            <a:ext cx="5463540" cy="1437132"/>
           </a:xfrm>
           <a:prstGeom prst="rect">
             <a:avLst/>
           </a:prstGeom>
           <a:solidFill>
-            <a:srgbClr val="FFFFFF"/>
+            <a:srgbClr val="F5F5F5"/>
           </a:solidFill>
-          <a:ln w="9525">
-            <a:solidFill>
-              <a:srgbClr val="E0E0E0"/>
-            </a:solidFill>
+          <a:ln>
+            <a:noFill/>
           </a:ln>
         </p:spPr>
         <p:style>
@@ -6839,7 +5668,7 @@
                 </a:solidFill>
                 <a:latin typeface="Noto Sans"/>
               </a:rPr>
-              <a:t>コンパウンドプロダクト戦略</a:t>
+              <a:t>連携方式：Notta API Webhook ＋ JSON</a:t>
             </a:r>
           </a:p>
         </p:txBody>
@@ -6853,7 +5682,7 @@
         <p:spPr>
           <a:xfrm>
             <a:off x="713232" y="2446020"/>
-            <a:ext cx="5134356" cy="1524762"/>
+            <a:ext cx="5134356" cy="723900"/>
           </a:xfrm>
           <a:prstGeom prst="rect">
             <a:avLst/>
@@ -6872,7 +5701,7 @@
                 </a:solidFill>
                 <a:latin typeface="Noto Sans"/>
               </a:rPr>
-              <a:t>「秋雲（セルフアンケート）」「リサーチャー向けプロダクト（プロト完成）」「顧客ポータル」を統合したプラットフォームへ</a:t>
+              <a:t>NottaはWebhookエンドポイントを公開し、会議終了トリガーで構造化JSONをCMGへPUSH配信。JSONスキーマ例：{meeting_id, objectives[], hypotheses[], key_topics[], participants[], action_items[], raw_transcript}。リアルタイム処理（会議中ストリーミング）とバッチ処理（終了後一括）の両モードをサポートし、用途に応じて切り替え可能。</a:t>
             </a:r>
           </a:p>
         </p:txBody>
@@ -6886,18 +5715,16 @@
         <p:spPr>
           <a:xfrm>
             <a:off x="6176772" y="1897380"/>
-            <a:ext cx="5463540" cy="2237994"/>
+            <a:ext cx="5463540" cy="1437132"/>
           </a:xfrm>
           <a:prstGeom prst="rect">
             <a:avLst/>
           </a:prstGeom>
           <a:solidFill>
-            <a:srgbClr val="FFFFFF"/>
+            <a:srgbClr val="F5F5F5"/>
           </a:solidFill>
-          <a:ln w="9525">
-            <a:solidFill>
-              <a:srgbClr val="E0E0E0"/>
-            </a:solidFill>
+          <a:ln>
+            <a:noFill/>
           </a:ln>
         </p:spPr>
         <p:style>
@@ -6950,7 +5777,7 @@
                 </a:solidFill>
                 <a:latin typeface="Noto Sans"/>
               </a:rPr>
-              <a:t>調査プロセスの自動化</a:t>
+              <a:t>CMG側システム構成：3レイヤー統合</a:t>
             </a:r>
           </a:p>
         </p:txBody>
@@ -6964,7 +5791,7 @@
         <p:spPr>
           <a:xfrm>
             <a:off x="6341364" y="2446020"/>
-            <a:ext cx="5134356" cy="1524762"/>
+            <a:ext cx="5134356" cy="723900"/>
           </a:xfrm>
           <a:prstGeom prst="rect">
             <a:avLst/>
@@ -6983,7 +5810,7 @@
                 </a:solidFill>
                 <a:latin typeface="Noto Sans"/>
               </a:rPr>
-              <a:t>現状7ステップ（課題認識→仮説化→調査設計→配信→回収→分析→レポート）を「設計確認」「結果確認」の2ステップに圧縮</a:t>
+              <a:t>【L1: データ受信】Notta APIから構造化JSONを受信し調査設計AIに渡すアダプター層。【L2: 業務処理】調査設計AI・秋雲・リサーチャーシステムが協調動作するオーケストレーション層。【L3: 顧客接点】受注管理・レポート納品・請求管理を提供する顧客ポータル。Notta音声データはL1に流入し3レイヤーを横断して最終的に顧客へ届く。</a:t>
             </a:r>
           </a:p>
         </p:txBody>
@@ -6996,19 +5823,17 @@
         </p:nvSpPr>
         <p:spPr>
           <a:xfrm>
-            <a:off x="548640" y="4299966"/>
-            <a:ext cx="5463540" cy="2237994"/>
+            <a:off x="548640" y="3499104"/>
+            <a:ext cx="5463540" cy="1437132"/>
           </a:xfrm>
           <a:prstGeom prst="rect">
             <a:avLst/>
           </a:prstGeom>
           <a:solidFill>
-            <a:srgbClr val="FFFFFF"/>
+            <a:srgbClr val="F5F5F5"/>
           </a:solidFill>
-          <a:ln w="9525">
-            <a:solidFill>
-              <a:srgbClr val="E0E0E0"/>
-            </a:solidFill>
+          <a:ln>
+            <a:noFill/>
           </a:ln>
         </p:spPr>
         <p:style>
@@ -7041,7 +5866,7 @@
         </p:nvSpPr>
         <p:spPr>
           <a:xfrm>
-            <a:off x="713232" y="4464558"/>
+            <a:off x="713232" y="3663696"/>
             <a:ext cx="5134356" cy="347472"/>
           </a:xfrm>
           <a:prstGeom prst="rect">
@@ -7061,7 +5886,7 @@
                 </a:solidFill>
                 <a:latin typeface="Noto Sans"/>
               </a:rPr>
-              <a:t>グループ30社への横展開</a:t>
+              <a:t>品質担保：RAG＋プロンプトテンプレート</a:t>
             </a:r>
           </a:p>
         </p:txBody>
@@ -7074,8 +5899,8 @@
         </p:nvSpPr>
         <p:spPr>
           <a:xfrm>
-            <a:off x="713232" y="4848606"/>
-            <a:ext cx="5134356" cy="1524762"/>
+            <a:off x="713232" y="4047744"/>
+            <a:ext cx="5134356" cy="723900"/>
           </a:xfrm>
           <a:prstGeom prst="rect">
             <a:avLst/>
@@ -7094,7 +5919,7 @@
                 </a:solidFill>
                 <a:latin typeface="Noto Sans"/>
               </a:rPr>
-              <a:t>子会社30社にわたるグループ会社のナレッジ・データを統合し、横断的な競争優位を構築</a:t>
+              <a:t>CMGが保有する過去調査テキスト（設計書・設問票・レポート群）をEmbeddingしてベクターDBに格納。新規会議JSONに対して類似案件を検索し「有効な設問パターン・過去の失敗事例・業界別ノウハウ」をコンテキストとして注入するRAG構成を実装。CMGリサーチャーが設計したプロンプトテンプレートをNotta Brainに組み込み、アウトプットの品質・方向性・粒度を標準化する。</a:t>
             </a:r>
           </a:p>
         </p:txBody>
@@ -7107,19 +5932,17 @@
         </p:nvSpPr>
         <p:spPr>
           <a:xfrm>
-            <a:off x="6176772" y="4299966"/>
-            <a:ext cx="5463540" cy="2237994"/>
+            <a:off x="6176772" y="3499104"/>
+            <a:ext cx="5463540" cy="1437132"/>
           </a:xfrm>
           <a:prstGeom prst="rect">
             <a:avLst/>
           </a:prstGeom>
           <a:solidFill>
-            <a:srgbClr val="FFFFFF"/>
+            <a:srgbClr val="F5F5F5"/>
           </a:solidFill>
-          <a:ln w="9525">
-            <a:solidFill>
-              <a:srgbClr val="E0E0E0"/>
-            </a:solidFill>
+          <a:ln>
+            <a:noFill/>
           </a:ln>
         </p:spPr>
         <p:style>
@@ -7152,7 +5975,7 @@
         </p:nvSpPr>
         <p:spPr>
           <a:xfrm>
-            <a:off x="6341364" y="4464558"/>
+            <a:off x="6341364" y="3663696"/>
             <a:ext cx="5134356" cy="347472"/>
           </a:xfrm>
           <a:prstGeom prst="rect">
@@ -7172,7 +5995,7 @@
                 </a:solidFill>
                 <a:latin typeface="Noto Sans"/>
               </a:rPr>
-              <a:t>収益モデルの転換</a:t>
+              <a:t>セキュリティ・データガバナンス</a:t>
             </a:r>
           </a:p>
         </p:txBody>
@@ -7185,8 +6008,8 @@
         </p:nvSpPr>
         <p:spPr>
           <a:xfrm>
-            <a:off x="6341364" y="4848606"/>
-            <a:ext cx="5134356" cy="1524762"/>
+            <a:off x="6341364" y="4047744"/>
+            <a:ext cx="5134356" cy="723900"/>
           </a:xfrm>
           <a:prstGeom prst="rect">
             <a:avLst/>
@@ -7205,7 +6028,225 @@
                 </a:solidFill>
                 <a:latin typeface="Noto Sans"/>
               </a:rPr>
-              <a:t>単発受託（数十万〜100万円）からSaaSプラットフォーム型の継続収益へ。クライアントの自走化を支援する新たなマネタイズ軸</a:t>
+              <a:t>クライアント会議データは最高機密。テナント分離（データの物理的or論理的分離）・転送時TLS 1.3暗号化・保存時AES-256暗号化を全層に適用。NottaとCMG間でDPA（データ処理契約）を締結し責任分界点を明確化。CMGのクライアントへはデータ取扱いポリシー改定・同意取得フローの整備が必要（CMG側対応）。データ保存地域は日本国内サーバーを指定可能。</a:t>
+            </a:r>
+          </a:p>
+        </p:txBody>
+      </p:sp>
+      <p:sp>
+        <p:nvSpPr>
+          <p:cNvPr id="17" name="Rectangle 16"/>
+          <p:cNvSpPr/>
+          <p:nvPr/>
+        </p:nvSpPr>
+        <p:spPr>
+          <a:xfrm>
+            <a:off x="548640" y="5100828"/>
+            <a:ext cx="5463540" cy="1437132"/>
+          </a:xfrm>
+          <a:prstGeom prst="rect">
+            <a:avLst/>
+          </a:prstGeom>
+          <a:solidFill>
+            <a:srgbClr val="F5F5F5"/>
+          </a:solidFill>
+          <a:ln>
+            <a:noFill/>
+          </a:ln>
+        </p:spPr>
+        <p:style>
+          <a:lnRef idx="1">
+            <a:schemeClr val="accent1"/>
+          </a:lnRef>
+          <a:fillRef idx="3">
+            <a:schemeClr val="accent1"/>
+          </a:fillRef>
+          <a:effectRef idx="2">
+            <a:schemeClr val="accent1"/>
+          </a:effectRef>
+          <a:fontRef idx="minor">
+            <a:schemeClr val="lt1"/>
+          </a:fontRef>
+        </p:style>
+        <p:txBody>
+          <a:bodyPr rtlCol="0" anchor="ctr"/>
+          <a:lstStyle/>
+          <a:p>
+            <a:pPr algn="ctr"/>
+          </a:p>
+        </p:txBody>
+      </p:sp>
+      <p:sp>
+        <p:nvSpPr>
+          <p:cNvPr id="18" name="TextBox 17"/>
+          <p:cNvSpPr txBox="1"/>
+          <p:nvPr/>
+        </p:nvSpPr>
+        <p:spPr>
+          <a:xfrm>
+            <a:off x="713232" y="5265420"/>
+            <a:ext cx="5134356" cy="347472"/>
+          </a:xfrm>
+          <a:prstGeom prst="rect">
+            <a:avLst/>
+          </a:prstGeom>
+          <a:noFill/>
+        </p:spPr>
+        <p:txBody>
+          <a:bodyPr wrap="square"/>
+          <a:lstStyle/>
+          <a:p>
+            <a:pPr algn="l"/>
+            <a:r>
+              <a:rPr sz="1800" b="1">
+                <a:solidFill>
+                  <a:srgbClr val="2180FF"/>
+                </a:solidFill>
+                <a:latin typeface="Noto Sans"/>
+              </a:rPr>
+              <a:t>開発分担と実装コスト最小化</a:t>
+            </a:r>
+          </a:p>
+        </p:txBody>
+      </p:sp>
+      <p:sp>
+        <p:nvSpPr>
+          <p:cNvPr id="19" name="TextBox 18"/>
+          <p:cNvSpPr txBox="1"/>
+          <p:nvPr/>
+        </p:nvSpPr>
+        <p:spPr>
+          <a:xfrm>
+            <a:off x="713232" y="5649468"/>
+            <a:ext cx="5134356" cy="723900"/>
+          </a:xfrm>
+          <a:prstGeom prst="rect">
+            <a:avLst/>
+          </a:prstGeom>
+          <a:noFill/>
+        </p:spPr>
+        <p:txBody>
+          <a:bodyPr wrap="square"/>
+          <a:lstStyle/>
+          <a:p>
+            <a:pPr algn="l"/>
+            <a:r>
+              <a:rPr sz="1200" b="0">
+                <a:solidFill>
+                  <a:srgbClr val="262626"/>
+                </a:solidFill>
+                <a:latin typeface="Noto Sans"/>
+              </a:rPr>
+              <a:t>【Notta側負担】①API拡張（リサーチ用JSONスキーマ実装）、②プロンプトテンプレートエンジン、③CMGユースケース向けBrainカスタマイズ設定、④APIドキュメント・SDK・サンプルコード整備。【CMG側負担】①Notta APIアダプター（受信〜調査設計AI連携）、②秋雲へのインジェスト機能。フロントエンド改修ゼロ。CMG側は最小限のバックエンド連携のみ。</a:t>
+            </a:r>
+          </a:p>
+        </p:txBody>
+      </p:sp>
+      <p:sp>
+        <p:nvSpPr>
+          <p:cNvPr id="20" name="Rectangle 19"/>
+          <p:cNvSpPr/>
+          <p:nvPr/>
+        </p:nvSpPr>
+        <p:spPr>
+          <a:xfrm>
+            <a:off x="6176772" y="5100828"/>
+            <a:ext cx="5463540" cy="1437132"/>
+          </a:xfrm>
+          <a:prstGeom prst="rect">
+            <a:avLst/>
+          </a:prstGeom>
+          <a:solidFill>
+            <a:srgbClr val="F5F5F5"/>
+          </a:solidFill>
+          <a:ln>
+            <a:noFill/>
+          </a:ln>
+        </p:spPr>
+        <p:style>
+          <a:lnRef idx="1">
+            <a:schemeClr val="accent1"/>
+          </a:lnRef>
+          <a:fillRef idx="3">
+            <a:schemeClr val="accent1"/>
+          </a:fillRef>
+          <a:effectRef idx="2">
+            <a:schemeClr val="accent1"/>
+          </a:effectRef>
+          <a:fontRef idx="minor">
+            <a:schemeClr val="lt1"/>
+          </a:fontRef>
+        </p:style>
+        <p:txBody>
+          <a:bodyPr rtlCol="0" anchor="ctr"/>
+          <a:lstStyle/>
+          <a:p>
+            <a:pPr algn="ctr"/>
+          </a:p>
+        </p:txBody>
+      </p:sp>
+      <p:sp>
+        <p:nvSpPr>
+          <p:cNvPr id="21" name="TextBox 20"/>
+          <p:cNvSpPr txBox="1"/>
+          <p:nvPr/>
+        </p:nvSpPr>
+        <p:spPr>
+          <a:xfrm>
+            <a:off x="6341364" y="5265420"/>
+            <a:ext cx="5134356" cy="347472"/>
+          </a:xfrm>
+          <a:prstGeom prst="rect">
+            <a:avLst/>
+          </a:prstGeom>
+          <a:noFill/>
+        </p:spPr>
+        <p:txBody>
+          <a:bodyPr wrap="square"/>
+          <a:lstStyle/>
+          <a:p>
+            <a:pPr algn="l"/>
+            <a:r>
+              <a:rPr sz="1800" b="1">
+                <a:solidFill>
+                  <a:srgbClr val="2180FF"/>
+                </a:solidFill>
+                <a:latin typeface="Noto Sans"/>
+              </a:rPr>
+              <a:t>将来拡張性：エコシステム化ロードマップ</a:t>
+            </a:r>
+          </a:p>
+        </p:txBody>
+      </p:sp>
+      <p:sp>
+        <p:nvSpPr>
+          <p:cNvPr id="22" name="TextBox 21"/>
+          <p:cNvSpPr txBox="1"/>
+          <p:nvPr/>
+        </p:nvSpPr>
+        <p:spPr>
+          <a:xfrm>
+            <a:off x="6341364" y="5649468"/>
+            <a:ext cx="5134356" cy="723900"/>
+          </a:xfrm>
+          <a:prstGeom prst="rect">
+            <a:avLst/>
+          </a:prstGeom>
+          <a:noFill/>
+        </p:spPr>
+        <p:txBody>
+          <a:bodyPr wrap="square"/>
+          <a:lstStyle/>
+          <a:p>
+            <a:pPr algn="l"/>
+            <a:r>
+              <a:rPr sz="1200" b="0">
+                <a:solidFill>
+                  <a:srgbClr val="262626"/>
+                </a:solidFill>
+                <a:latin typeface="Noto Sans"/>
+              </a:rPr>
+              <a:t>Phase 1（PoC）：音声→調査設計の単方向連携。Phase 2（β）：秋雲・顧客ポータルとの双方向データ同期、過去調査RAGの本番稼働。Phase 3（外販）：CMGクライアント企業が直接利用できるセルフサービス型の「音声×リサーチ統合API」をSaaS提供。Nottatの他業界（人材・コンサル・広告）への垂直統合パターンとして横展開する。</a:t>
             </a:r>
           </a:p>
         </p:txBody>
@@ -7264,7 +6305,7 @@
                 </a:solidFill>
                 <a:latin typeface="Noto Sans"/>
               </a:rPr>
-              <a:t>CMGの現場課題：音声データ周辺のボトルネック</a:t>
+              <a:t>PoC設計：スコープ・KPI・予算・リスク管理</a:t>
             </a:r>
           </a:p>
         </p:txBody>
@@ -7340,7 +6381,7 @@
                 </a:solidFill>
                 <a:latin typeface="Noto Sans"/>
               </a:rPr>
-              <a:t>調査の最上流「会議・ブリーフィング」のデータが構造化されないまま失われ、下流全体の品質とスピードを制約している</a:t>
+              <a:t>「失敗しても数百万円で収まる」スモールスタートで技術検証を完了。3ヶ月以内にプロトタイプを構築し、双方の本格協業可否を判断する</a:t>
             </a:r>
           </a:p>
         </p:txBody>
@@ -7354,18 +6395,16 @@
         <p:spPr>
           <a:xfrm>
             <a:off x="548640" y="1897380"/>
-            <a:ext cx="5463540" cy="2237994"/>
+            <a:ext cx="5463540" cy="1437132"/>
           </a:xfrm>
           <a:prstGeom prst="rect">
             <a:avLst/>
           </a:prstGeom>
           <a:solidFill>
-            <a:srgbClr val="FFFFFF"/>
+            <a:srgbClr val="F5F5F5"/>
           </a:solidFill>
-          <a:ln w="9525">
-            <a:solidFill>
-              <a:srgbClr val="E0E0E0"/>
-            </a:solidFill>
+          <a:ln>
+            <a:noFill/>
           </a:ln>
         </p:spPr>
         <p:style>
@@ -7418,7 +6457,7 @@
                 </a:solidFill>
                 <a:latin typeface="Noto Sans"/>
               </a:rPr>
-              <a:t>会議データが分断・消滅</a:t>
+              <a:t>PoCスコープ：上流フロー検証に集中</a:t>
             </a:r>
           </a:p>
         </p:txBody>
@@ -7432,7 +6471,7 @@
         <p:spPr>
           <a:xfrm>
             <a:off x="713232" y="2446020"/>
-            <a:ext cx="5134356" cy="1524762"/>
+            <a:ext cx="5134356" cy="723900"/>
           </a:xfrm>
           <a:prstGeom prst="rect">
             <a:avLst/>
@@ -7451,7 +6490,7 @@
                 </a:solidFill>
                 <a:latin typeface="Noto Sans"/>
               </a:rPr>
-              <a:t>商品企画会議・クライアントブリーフィングはGoogle Meet等で実施されるが、音声データは蓄積されず意思決定の文脈が失われる</a:t>
+              <a:t>検証対象：「録音済み会議音声（既存音源使用）→Notta文字起こし・JSON出力→CMG調査設計AI→秋雲での設問プレビュー表示」までの一気通貫フロー。配信・回収・レポートはPoC対象外とし複雑性を排除。ダミーデータ3〜5案件分で検証し、フロー技術的実現可能性・API仕様の妥当性・UX品質を確認する。</a:t>
             </a:r>
           </a:p>
         </p:txBody>
@@ -7465,18 +6504,16 @@
         <p:spPr>
           <a:xfrm>
             <a:off x="6176772" y="1897380"/>
-            <a:ext cx="5463540" cy="2237994"/>
+            <a:ext cx="5463540" cy="1437132"/>
           </a:xfrm>
           <a:prstGeom prst="rect">
             <a:avLst/>
           </a:prstGeom>
           <a:solidFill>
-            <a:srgbClr val="FFFFFF"/>
+            <a:srgbClr val="F5F5F5"/>
           </a:solidFill>
-          <a:ln w="9525">
-            <a:solidFill>
-              <a:srgbClr val="E0E0E0"/>
-            </a:solidFill>
+          <a:ln>
+            <a:noFill/>
           </a:ln>
         </p:spPr>
         <p:style>
@@ -7529,7 +6566,7 @@
                 </a:solidFill>
                 <a:latin typeface="Noto Sans"/>
               </a:rPr>
-              <a:t>調査設計の属人化</a:t>
+              <a:t>予算・期間・体制</a:t>
             </a:r>
           </a:p>
         </p:txBody>
@@ -7543,7 +6580,7 @@
         <p:spPr>
           <a:xfrm>
             <a:off x="6341364" y="2446020"/>
-            <a:ext cx="5134356" cy="1524762"/>
+            <a:ext cx="5134356" cy="723900"/>
           </a:xfrm>
           <a:prstGeom prst="rect">
             <a:avLst/>
@@ -7562,7 +6599,7 @@
                 </a:solidFill>
                 <a:latin typeface="Noto Sans"/>
               </a:rPr>
-              <a:t>録音→文字起こし→分析→コーディングの各工程が担当者依存。品質・スピードにばらつきが生じている</a:t>
+              <a:t>【予算】Notta側：API拡張・プロンプト設計・ドキュメント整備で200〜300万円。CMG側：アダプター実装・秋雲連携で100〜200万円。合計300〜500万円規模を想定（岡崎様言及：「数百万円で収まるレベル」）。【期間】PoC設計合意（4月）→実装（5〜6月）→検証・評価（6月末）の3ヶ月。【体制】Notta（河野・奥寺＋エンジニア1名）、CMG（岡崎様＋開発担当1〜2名）。</a:t>
             </a:r>
           </a:p>
         </p:txBody>
@@ -7575,19 +6612,17 @@
         </p:nvSpPr>
         <p:spPr>
           <a:xfrm>
-            <a:off x="548640" y="4299966"/>
-            <a:ext cx="5463540" cy="2237994"/>
+            <a:off x="548640" y="3499104"/>
+            <a:ext cx="5463540" cy="1437132"/>
           </a:xfrm>
           <a:prstGeom prst="rect">
             <a:avLst/>
           </a:prstGeom>
           <a:solidFill>
-            <a:srgbClr val="FFFFFF"/>
+            <a:srgbClr val="F5F5F5"/>
           </a:solidFill>
-          <a:ln w="9525">
-            <a:solidFill>
-              <a:srgbClr val="E0E0E0"/>
-            </a:solidFill>
+          <a:ln>
+            <a:noFill/>
           </a:ln>
         </p:spPr>
         <p:style>
@@ -7620,7 +6655,7 @@
         </p:nvSpPr>
         <p:spPr>
           <a:xfrm>
-            <a:off x="713232" y="4464558"/>
+            <a:off x="713232" y="3663696"/>
             <a:ext cx="5134356" cy="347472"/>
           </a:xfrm>
           <a:prstGeom prst="rect">
@@ -7640,7 +6675,7 @@
                 </a:solidFill>
                 <a:latin typeface="Noto Sans"/>
               </a:rPr>
-              <a:t>調査票の質が不安定</a:t>
+              <a:t>検証KPI①：スピード・品質</a:t>
             </a:r>
           </a:p>
         </p:txBody>
@@ -7653,8 +6688,8 @@
         </p:nvSpPr>
         <p:spPr>
           <a:xfrm>
-            <a:off x="713232" y="4848606"/>
-            <a:ext cx="5134356" cy="1524762"/>
+            <a:off x="713232" y="4047744"/>
+            <a:ext cx="5134356" cy="723900"/>
           </a:xfrm>
           <a:prstGeom prst="rect">
             <a:avLst/>
@@ -7673,7 +6708,7 @@
                 </a:solidFill>
                 <a:latin typeface="Noto Sans"/>
               </a:rPr>
-              <a:t>マーケター・新規事業担当はリサーチの専門家ではないため、聞きたいことが適切に質問化できていないケースが多い</a:t>
+              <a:t>【KPI-1】調査設計リードタイム：現状（会議〜設計完成まで平均5〜7営業日）→PoC目標（会議終了当日中＝0.5営業日以内）。【KPI-2】設問品質スコア：CMGリサーチャーによる5段階評価で平均4.0以上。【KPI-3】クライアント意図合致率：会議での発言意図と生成設問のベクトル一致度を定性評価で80%以上。</a:t>
             </a:r>
           </a:p>
         </p:txBody>
@@ -7686,19 +6721,17 @@
         </p:nvSpPr>
         <p:spPr>
           <a:xfrm>
-            <a:off x="6176772" y="4299966"/>
-            <a:ext cx="5463540" cy="2237994"/>
+            <a:off x="6176772" y="3499104"/>
+            <a:ext cx="5463540" cy="1437132"/>
           </a:xfrm>
           <a:prstGeom prst="rect">
             <a:avLst/>
           </a:prstGeom>
           <a:solidFill>
-            <a:srgbClr val="FFFFFF"/>
+            <a:srgbClr val="F5F5F5"/>
           </a:solidFill>
-          <a:ln w="9525">
-            <a:solidFill>
-              <a:srgbClr val="E0E0E0"/>
-            </a:solidFill>
+          <a:ln>
+            <a:noFill/>
           </a:ln>
         </p:spPr>
         <p:style>
@@ -7731,7 +6764,7 @@
         </p:nvSpPr>
         <p:spPr>
           <a:xfrm>
-            <a:off x="6341364" y="4464558"/>
+            <a:off x="6341364" y="3663696"/>
             <a:ext cx="5134356" cy="347472"/>
           </a:xfrm>
           <a:prstGeom prst="rect">
@@ -7751,7 +6784,7 @@
                 </a:solidFill>
                 <a:latin typeface="Noto Sans"/>
               </a:rPr>
-              <a:t>上流の意思決定のベクトルズレ</a:t>
+              <a:t>検証KPI②：技術・UX</a:t>
             </a:r>
           </a:p>
         </p:txBody>
@@ -7764,8 +6797,8 @@
         </p:nvSpPr>
         <p:spPr>
           <a:xfrm>
-            <a:off x="6341364" y="4848606"/>
-            <a:ext cx="5134356" cy="1524762"/>
+            <a:off x="6341364" y="4047744"/>
+            <a:ext cx="5134356" cy="723900"/>
           </a:xfrm>
           <a:prstGeom prst="rect">
             <a:avLst/>
@@ -7784,86 +6817,27 @@
                 </a:solidFill>
                 <a:latin typeface="Noto Sans"/>
               </a:rPr>
-              <a:t>部長以上が求めるインサイトと、下流で設計された調査票のベクトルがずれて納品されるケースが頻発</a:t>
-            </a:r>
-          </a:p>
-        </p:txBody>
-      </p:sp>
-    </p:spTree>
-  </p:cSld>
-  <p:clrMapOvr>
-    <a:masterClrMapping/>
-  </p:clrMapOvr>
-</p:sld>
-</file>
-
-<file path=ppt/slides/slide6.xml><?xml version="1.0" encoding="utf-8"?>
-<p:sld xmlns:a="http://schemas.openxmlformats.org/drawingml/2006/main" xmlns:p="http://schemas.openxmlformats.org/presentationml/2006/main" xmlns:r="http://schemas.openxmlformats.org/officeDocument/2006/relationships">
-  <p:cSld>
-    <p:bg>
-      <p:bgPr>
-        <a:solidFill>
-          <a:srgbClr val="FFFFFF"/>
-        </a:solidFill>
-        <a:effectLst/>
-      </p:bgPr>
-    </p:bg>
-    <p:spTree>
-      <p:nvGrpSpPr>
-        <p:cNvPr id="1" name=""/>
-        <p:cNvGrpSpPr/>
-        <p:nvPr/>
-      </p:nvGrpSpPr>
-      <p:grpSpPr/>
-      <p:sp>
-        <p:nvSpPr>
-          <p:cNvPr id="2" name="TextBox 1"/>
-          <p:cNvSpPr txBox="1"/>
-          <p:nvPr/>
-        </p:nvSpPr>
-        <p:spPr>
-          <a:xfrm>
-            <a:off x="548640" y="320040"/>
-            <a:ext cx="11091672" cy="411480"/>
-          </a:xfrm>
-          <a:prstGeom prst="rect">
-            <a:avLst/>
-          </a:prstGeom>
-          <a:noFill/>
-        </p:spPr>
-        <p:txBody>
-          <a:bodyPr wrap="square"/>
-          <a:lstStyle/>
-          <a:p>
-            <a:pPr algn="l"/>
-            <a:r>
-              <a:rPr sz="1600" b="0">
-                <a:solidFill>
-                  <a:srgbClr val="2180FF"/>
-                </a:solidFill>
-                <a:latin typeface="Noto Sans"/>
-              </a:rPr>
-              <a:t>協業で実現する「音声起点リサーチ自動化フロー」</a:t>
-            </a:r>
-          </a:p>
-        </p:txBody>
-      </p:sp>
-      <p:sp>
-        <p:nvSpPr>
-          <p:cNvPr id="3" name="Rectangle 2"/>
+              <a:t>【KPI-4】API応答速度：音声テキスト送信〜調査設計AI返答まで30秒以内（30分会議の場合）。【KPI-5】文字起こし精度：日本語WER（単語誤り率）5%以下。【KPI-6】マーケター層操作完結率：介入なしで設問プレビューまで到達できる割合80%以上（非リサーチャー5名によるユーザーテスト）。</a:t>
+            </a:r>
+          </a:p>
+        </p:txBody>
+      </p:sp>
+      <p:sp>
+        <p:nvSpPr>
+          <p:cNvPr id="17" name="Rectangle 16"/>
           <p:cNvSpPr/>
           <p:nvPr/>
         </p:nvSpPr>
         <p:spPr>
           <a:xfrm>
-            <a:off x="548640" y="841248"/>
-            <a:ext cx="11091672" cy="13716"/>
+            <a:off x="548640" y="5100828"/>
+            <a:ext cx="5463540" cy="1437132"/>
           </a:xfrm>
           <a:prstGeom prst="rect">
             <a:avLst/>
           </a:prstGeom>
           <a:solidFill>
-            <a:srgbClr val="D0D0D0"/>
+            <a:srgbClr val="F5F5F5"/>
           </a:solidFill>
           <a:ln>
             <a:noFill/>
@@ -7893,14 +6867,14 @@
       </p:sp>
       <p:sp>
         <p:nvSpPr>
-          <p:cNvPr id="4" name="TextBox 3"/>
+          <p:cNvPr id="18" name="TextBox 17"/>
           <p:cNvSpPr txBox="1"/>
           <p:nvPr/>
         </p:nvSpPr>
         <p:spPr>
           <a:xfrm>
-            <a:off x="548640" y="982980"/>
-            <a:ext cx="11091672" cy="685800"/>
+            <a:off x="713232" y="5265420"/>
+            <a:ext cx="5134356" cy="347472"/>
           </a:xfrm>
           <a:prstGeom prst="rect">
             <a:avLst/>
@@ -7913,38 +6887,69 @@
           <a:p>
             <a:pPr algn="l"/>
             <a:r>
-              <a:rPr sz="2000" b="1">
-                <a:solidFill>
-                  <a:srgbClr val="262626"/>
+              <a:rPr sz="1800" b="1">
+                <a:solidFill>
+                  <a:srgbClr val="2180FF"/>
                 </a:solidFill>
                 <a:latin typeface="Noto Sans"/>
               </a:rPr>
-              <a:t>会議の音声データをNottaが構造化し、CMGの調査設計AIに渡すことで、ミーティング終了即・調査設計完成を実現する</a:t>
-            </a:r>
-          </a:p>
-        </p:txBody>
-      </p:sp>
-      <p:sp>
-        <p:nvSpPr>
-          <p:cNvPr id="5" name="Rectangle 4"/>
+              <a:t>リスクと対応策</a:t>
+            </a:r>
+          </a:p>
+        </p:txBody>
+      </p:sp>
+      <p:sp>
+        <p:nvSpPr>
+          <p:cNvPr id="19" name="TextBox 18"/>
+          <p:cNvSpPr txBox="1"/>
+          <p:nvPr/>
+        </p:nvSpPr>
+        <p:spPr>
+          <a:xfrm>
+            <a:off x="713232" y="5649468"/>
+            <a:ext cx="5134356" cy="723900"/>
+          </a:xfrm>
+          <a:prstGeom prst="rect">
+            <a:avLst/>
+          </a:prstGeom>
+          <a:noFill/>
+        </p:spPr>
+        <p:txBody>
+          <a:bodyPr wrap="square"/>
+          <a:lstStyle/>
+          <a:p>
+            <a:pPr algn="l"/>
+            <a:r>
+              <a:rPr sz="1200" b="0">
+                <a:solidFill>
+                  <a:srgbClr val="262626"/>
+                </a:solidFill>
+                <a:latin typeface="Noto Sans"/>
+              </a:rPr>
+              <a:t>【R1】CMG調査設計AIの入力仕様が未確定→モックAPIで並行開発、4月MTGで仕様書確定。【R2】過去調査データの社内承認が遅延→ダミーデータでフロー先行検証、RAGは後フェーズで組み込み。【R3】CMG側エンジニアリソース不足→Notta側がサンプル実装（Python/TypeScript）を提供し実装工数を圧縮。【R4】後戻りできない大規模開発化→フェーズ分割を厳守し各フェーズ終了時にGo/No-Goを判断する。</a:t>
+            </a:r>
+          </a:p>
+        </p:txBody>
+      </p:sp>
+      <p:sp>
+        <p:nvSpPr>
+          <p:cNvPr id="20" name="Rectangle 19"/>
           <p:cNvSpPr/>
           <p:nvPr/>
         </p:nvSpPr>
         <p:spPr>
           <a:xfrm>
-            <a:off x="548640" y="1897380"/>
-            <a:ext cx="5463540" cy="2237994"/>
+            <a:off x="6176772" y="5100828"/>
+            <a:ext cx="5463540" cy="1437132"/>
           </a:xfrm>
           <a:prstGeom prst="rect">
             <a:avLst/>
           </a:prstGeom>
           <a:solidFill>
-            <a:srgbClr val="FFFFFF"/>
+            <a:srgbClr val="F5F5F5"/>
           </a:solidFill>
-          <a:ln w="9525">
-            <a:solidFill>
-              <a:srgbClr val="E0E0E0"/>
-            </a:solidFill>
+          <a:ln>
+            <a:noFill/>
           </a:ln>
         </p:spPr>
         <p:style>
@@ -7971,13 +6976,13 @@
       </p:sp>
       <p:sp>
         <p:nvSpPr>
-          <p:cNvPr id="6" name="TextBox 5"/>
+          <p:cNvPr id="21" name="TextBox 20"/>
           <p:cNvSpPr txBox="1"/>
           <p:nvPr/>
         </p:nvSpPr>
         <p:spPr>
           <a:xfrm>
-            <a:off x="713232" y="2061972"/>
+            <a:off x="6341364" y="5265420"/>
             <a:ext cx="5134356" cy="347472"/>
           </a:xfrm>
           <a:prstGeom prst="rect">
@@ -7997,21 +7002,21 @@
                 </a:solidFill>
                 <a:latin typeface="Noto Sans"/>
               </a:rPr>
-              <a:t>STEP 1｜音声取得・構造化（Notta）</a:t>
-            </a:r>
-          </a:p>
-        </p:txBody>
-      </p:sp>
-      <p:sp>
-        <p:nvSpPr>
-          <p:cNvPr id="7" name="TextBox 6"/>
+              <a:t>PoC成功後のロードマップ</a:t>
+            </a:r>
+          </a:p>
+        </p:txBody>
+      </p:sp>
+      <p:sp>
+        <p:nvSpPr>
+          <p:cNvPr id="22" name="TextBox 21"/>
           <p:cNvSpPr txBox="1"/>
           <p:nvPr/>
         </p:nvSpPr>
         <p:spPr>
           <a:xfrm>
-            <a:off x="713232" y="2446020"/>
-            <a:ext cx="5134356" cy="1524762"/>
+            <a:off x="6341364" y="5649468"/>
+            <a:ext cx="5134356" cy="723900"/>
           </a:xfrm>
           <a:prstGeom prst="rect">
             <a:avLst/>
@@ -8030,2077 +7035,7 @@
                 </a:solidFill>
                 <a:latin typeface="Noto Sans"/>
               </a:rPr>
-              <a:t>クライアントの商品企画会議・ブリーフィングをNottaで録音→高精度日本語ASRで文字起こし→話者分離・要約・示唆抽出</a:t>
-            </a:r>
-          </a:p>
-        </p:txBody>
-      </p:sp>
-      <p:sp>
-        <p:nvSpPr>
-          <p:cNvPr id="8" name="Rectangle 7"/>
-          <p:cNvSpPr/>
-          <p:nvPr/>
-        </p:nvSpPr>
-        <p:spPr>
-          <a:xfrm>
-            <a:off x="6176772" y="1897380"/>
-            <a:ext cx="5463540" cy="2237994"/>
-          </a:xfrm>
-          <a:prstGeom prst="rect">
-            <a:avLst/>
-          </a:prstGeom>
-          <a:solidFill>
-            <a:srgbClr val="FFFFFF"/>
-          </a:solidFill>
-          <a:ln w="9525">
-            <a:solidFill>
-              <a:srgbClr val="E0E0E0"/>
-            </a:solidFill>
-          </a:ln>
-        </p:spPr>
-        <p:style>
-          <a:lnRef idx="1">
-            <a:schemeClr val="accent1"/>
-          </a:lnRef>
-          <a:fillRef idx="3">
-            <a:schemeClr val="accent1"/>
-          </a:fillRef>
-          <a:effectRef idx="2">
-            <a:schemeClr val="accent1"/>
-          </a:effectRef>
-          <a:fontRef idx="minor">
-            <a:schemeClr val="lt1"/>
-          </a:fontRef>
-        </p:style>
-        <p:txBody>
-          <a:bodyPr rtlCol="0" anchor="ctr"/>
-          <a:lstStyle/>
-          <a:p>
-            <a:pPr algn="ctr"/>
-          </a:p>
-        </p:txBody>
-      </p:sp>
-      <p:sp>
-        <p:nvSpPr>
-          <p:cNvPr id="9" name="TextBox 8"/>
-          <p:cNvSpPr txBox="1"/>
-          <p:nvPr/>
-        </p:nvSpPr>
-        <p:spPr>
-          <a:xfrm>
-            <a:off x="6341364" y="2061972"/>
-            <a:ext cx="5134356" cy="347472"/>
-          </a:xfrm>
-          <a:prstGeom prst="rect">
-            <a:avLst/>
-          </a:prstGeom>
-          <a:noFill/>
-        </p:spPr>
-        <p:txBody>
-          <a:bodyPr wrap="square"/>
-          <a:lstStyle/>
-          <a:p>
-            <a:pPr algn="l"/>
-            <a:r>
-              <a:rPr sz="1800" b="1">
-                <a:solidFill>
-                  <a:srgbClr val="2180FF"/>
-                </a:solidFill>
-                <a:latin typeface="Noto Sans"/>
-              </a:rPr>
-              <a:t>STEP 2｜調査設計AI連携（CMG）</a:t>
-            </a:r>
-          </a:p>
-        </p:txBody>
-      </p:sp>
-      <p:sp>
-        <p:nvSpPr>
-          <p:cNvPr id="10" name="TextBox 9"/>
-          <p:cNvSpPr txBox="1"/>
-          <p:nvPr/>
-        </p:nvSpPr>
-        <p:spPr>
-          <a:xfrm>
-            <a:off x="6341364" y="2446020"/>
-            <a:ext cx="5134356" cy="1524762"/>
-          </a:xfrm>
-          <a:prstGeom prst="rect">
-            <a:avLst/>
-          </a:prstGeom>
-          <a:noFill/>
-        </p:spPr>
-        <p:txBody>
-          <a:bodyPr wrap="square"/>
-          <a:lstStyle/>
-          <a:p>
-            <a:pPr algn="l"/>
-            <a:r>
-              <a:rPr sz="1200" b="0">
-                <a:solidFill>
-                  <a:srgbClr val="262626"/>
-                </a:solidFill>
-                <a:latin typeface="Noto Sans"/>
-              </a:rPr>
-              <a:t>Nottaが出力したテキスト/JSONをCMGの調査設計AIに渡し、調査手法・設問・分岐ロジックを自動生成。人間は「承認」のみ</a:t>
-            </a:r>
-          </a:p>
-        </p:txBody>
-      </p:sp>
-      <p:sp>
-        <p:nvSpPr>
-          <p:cNvPr id="11" name="Rectangle 10"/>
-          <p:cNvSpPr/>
-          <p:nvPr/>
-        </p:nvSpPr>
-        <p:spPr>
-          <a:xfrm>
-            <a:off x="548640" y="4299966"/>
-            <a:ext cx="5463540" cy="2237994"/>
-          </a:xfrm>
-          <a:prstGeom prst="rect">
-            <a:avLst/>
-          </a:prstGeom>
-          <a:solidFill>
-            <a:srgbClr val="FFFFFF"/>
-          </a:solidFill>
-          <a:ln w="9525">
-            <a:solidFill>
-              <a:srgbClr val="E0E0E0"/>
-            </a:solidFill>
-          </a:ln>
-        </p:spPr>
-        <p:style>
-          <a:lnRef idx="1">
-            <a:schemeClr val="accent1"/>
-          </a:lnRef>
-          <a:fillRef idx="3">
-            <a:schemeClr val="accent1"/>
-          </a:fillRef>
-          <a:effectRef idx="2">
-            <a:schemeClr val="accent1"/>
-          </a:effectRef>
-          <a:fontRef idx="minor">
-            <a:schemeClr val="lt1"/>
-          </a:fontRef>
-        </p:style>
-        <p:txBody>
-          <a:bodyPr rtlCol="0" anchor="ctr"/>
-          <a:lstStyle/>
-          <a:p>
-            <a:pPr algn="ctr"/>
-          </a:p>
-        </p:txBody>
-      </p:sp>
-      <p:sp>
-        <p:nvSpPr>
-          <p:cNvPr id="12" name="TextBox 11"/>
-          <p:cNvSpPr txBox="1"/>
-          <p:nvPr/>
-        </p:nvSpPr>
-        <p:spPr>
-          <a:xfrm>
-            <a:off x="713232" y="4464558"/>
-            <a:ext cx="5134356" cy="347472"/>
-          </a:xfrm>
-          <a:prstGeom prst="rect">
-            <a:avLst/>
-          </a:prstGeom>
-          <a:noFill/>
-        </p:spPr>
-        <p:txBody>
-          <a:bodyPr wrap="square"/>
-          <a:lstStyle/>
-          <a:p>
-            <a:pPr algn="l"/>
-            <a:r>
-              <a:rPr sz="1800" b="1">
-                <a:solidFill>
-                  <a:srgbClr val="2180FF"/>
-                </a:solidFill>
-                <a:latin typeface="Noto Sans"/>
-              </a:rPr>
-              <a:t>STEP 3｜配信・回収（CMG「秋雲」等）</a:t>
-            </a:r>
-          </a:p>
-        </p:txBody>
-      </p:sp>
-      <p:sp>
-        <p:nvSpPr>
-          <p:cNvPr id="13" name="TextBox 12"/>
-          <p:cNvSpPr txBox="1"/>
-          <p:nvPr/>
-        </p:nvSpPr>
-        <p:spPr>
-          <a:xfrm>
-            <a:off x="713232" y="4848606"/>
-            <a:ext cx="5134356" cy="1524762"/>
-          </a:xfrm>
-          <a:prstGeom prst="rect">
-            <a:avLst/>
-          </a:prstGeom>
-          <a:noFill/>
-        </p:spPr>
-        <p:txBody>
-          <a:bodyPr wrap="square"/>
-          <a:lstStyle/>
-          <a:p>
-            <a:pPr algn="l"/>
-            <a:r>
-              <a:rPr sz="1200" b="0">
-                <a:solidFill>
-                  <a:srgbClr val="262626"/>
-                </a:solidFill>
-                <a:latin typeface="Noto Sans"/>
-              </a:rPr>
-              <a:t>設計済みアンケートをMA/秋雲で自動配信。N数確保・回収も自動化。インターフェースはCMGの既存サービスをそのまま活用</a:t>
-            </a:r>
-          </a:p>
-        </p:txBody>
-      </p:sp>
-      <p:sp>
-        <p:nvSpPr>
-          <p:cNvPr id="14" name="Rectangle 13"/>
-          <p:cNvSpPr/>
-          <p:nvPr/>
-        </p:nvSpPr>
-        <p:spPr>
-          <a:xfrm>
-            <a:off x="6176772" y="4299966"/>
-            <a:ext cx="5463540" cy="2237994"/>
-          </a:xfrm>
-          <a:prstGeom prst="rect">
-            <a:avLst/>
-          </a:prstGeom>
-          <a:solidFill>
-            <a:srgbClr val="FFFFFF"/>
-          </a:solidFill>
-          <a:ln w="9525">
-            <a:solidFill>
-              <a:srgbClr val="E0E0E0"/>
-            </a:solidFill>
-          </a:ln>
-        </p:spPr>
-        <p:style>
-          <a:lnRef idx="1">
-            <a:schemeClr val="accent1"/>
-          </a:lnRef>
-          <a:fillRef idx="3">
-            <a:schemeClr val="accent1"/>
-          </a:fillRef>
-          <a:effectRef idx="2">
-            <a:schemeClr val="accent1"/>
-          </a:effectRef>
-          <a:fontRef idx="minor">
-            <a:schemeClr val="lt1"/>
-          </a:fontRef>
-        </p:style>
-        <p:txBody>
-          <a:bodyPr rtlCol="0" anchor="ctr"/>
-          <a:lstStyle/>
-          <a:p>
-            <a:pPr algn="ctr"/>
-          </a:p>
-        </p:txBody>
-      </p:sp>
-      <p:sp>
-        <p:nvSpPr>
-          <p:cNvPr id="15" name="TextBox 14"/>
-          <p:cNvSpPr txBox="1"/>
-          <p:nvPr/>
-        </p:nvSpPr>
-        <p:spPr>
-          <a:xfrm>
-            <a:off x="6341364" y="4464558"/>
-            <a:ext cx="5134356" cy="347472"/>
-          </a:xfrm>
-          <a:prstGeom prst="rect">
-            <a:avLst/>
-          </a:prstGeom>
-          <a:noFill/>
-        </p:spPr>
-        <p:txBody>
-          <a:bodyPr wrap="square"/>
-          <a:lstStyle/>
-          <a:p>
-            <a:pPr algn="l"/>
-            <a:r>
-              <a:rPr sz="1800" b="1">
-                <a:solidFill>
-                  <a:srgbClr val="2180FF"/>
-                </a:solidFill>
-                <a:latin typeface="Noto Sans"/>
-              </a:rPr>
-              <a:t>STEP 4｜レポート・意思決定（クライアント）</a:t>
-            </a:r>
-          </a:p>
-        </p:txBody>
-      </p:sp>
-      <p:sp>
-        <p:nvSpPr>
-          <p:cNvPr id="16" name="TextBox 15"/>
-          <p:cNvSpPr txBox="1"/>
-          <p:nvPr/>
-        </p:nvSpPr>
-        <p:spPr>
-          <a:xfrm>
-            <a:off x="6341364" y="4848606"/>
-            <a:ext cx="5134356" cy="1524762"/>
-          </a:xfrm>
-          <a:prstGeom prst="rect">
-            <a:avLst/>
-          </a:prstGeom>
-          <a:noFill/>
-        </p:spPr>
-        <p:txBody>
-          <a:bodyPr wrap="square"/>
-          <a:lstStyle/>
-          <a:p>
-            <a:pPr algn="l"/>
-            <a:r>
-              <a:rPr sz="1200" b="0">
-                <a:solidFill>
-                  <a:srgbClr val="262626"/>
-                </a:solidFill>
-                <a:latin typeface="Noto Sans"/>
-              </a:rPr>
-              <a:t>回答データからLLMがレポートのたたき台を自動生成。クライアントが確認・意思決定→次の企画サイクルへ即座に移行</a:t>
-            </a:r>
-          </a:p>
-        </p:txBody>
-      </p:sp>
-    </p:spTree>
-  </p:cSld>
-  <p:clrMapOvr>
-    <a:masterClrMapping/>
-  </p:clrMapOvr>
-</p:sld>
-</file>
-
-<file path=ppt/slides/slide7.xml><?xml version="1.0" encoding="utf-8"?>
-<p:sld xmlns:a="http://schemas.openxmlformats.org/drawingml/2006/main" xmlns:p="http://schemas.openxmlformats.org/presentationml/2006/main" xmlns:r="http://schemas.openxmlformats.org/officeDocument/2006/relationships">
-  <p:cSld>
-    <p:bg>
-      <p:bgPr>
-        <a:solidFill>
-          <a:srgbClr val="FFFFFF"/>
-        </a:solidFill>
-        <a:effectLst/>
-      </p:bgPr>
-    </p:bg>
-    <p:spTree>
-      <p:nvGrpSpPr>
-        <p:cNvPr id="1" name=""/>
-        <p:cNvGrpSpPr/>
-        <p:nvPr/>
-      </p:nvGrpSpPr>
-      <p:grpSpPr/>
-      <p:sp>
-        <p:nvSpPr>
-          <p:cNvPr id="2" name="TextBox 1"/>
-          <p:cNvSpPr txBox="1"/>
-          <p:nvPr/>
-        </p:nvSpPr>
-        <p:spPr>
-          <a:xfrm>
-            <a:off x="548640" y="320040"/>
-            <a:ext cx="11091672" cy="411480"/>
-          </a:xfrm>
-          <a:prstGeom prst="rect">
-            <a:avLst/>
-          </a:prstGeom>
-          <a:noFill/>
-        </p:spPr>
-        <p:txBody>
-          <a:bodyPr wrap="square"/>
-          <a:lstStyle/>
-          <a:p>
-            <a:pPr algn="l"/>
-            <a:r>
-              <a:rPr sz="1600" b="0">
-                <a:solidFill>
-                  <a:srgbClr val="2180FF"/>
-                </a:solidFill>
-                <a:latin typeface="Noto Sans"/>
-              </a:rPr>
-              <a:t>ユーザーセグメント別の価値提供</a:t>
-            </a:r>
-          </a:p>
-        </p:txBody>
-      </p:sp>
-      <p:sp>
-        <p:nvSpPr>
-          <p:cNvPr id="3" name="Rectangle 2"/>
-          <p:cNvSpPr/>
-          <p:nvPr/>
-        </p:nvSpPr>
-        <p:spPr>
-          <a:xfrm>
-            <a:off x="548640" y="841248"/>
-            <a:ext cx="11091672" cy="13716"/>
-          </a:xfrm>
-          <a:prstGeom prst="rect">
-            <a:avLst/>
-          </a:prstGeom>
-          <a:solidFill>
-            <a:srgbClr val="D0D0D0"/>
-          </a:solidFill>
-          <a:ln>
-            <a:noFill/>
-          </a:ln>
-        </p:spPr>
-        <p:style>
-          <a:lnRef idx="1">
-            <a:schemeClr val="accent1"/>
-          </a:lnRef>
-          <a:fillRef idx="3">
-            <a:schemeClr val="accent1"/>
-          </a:fillRef>
-          <a:effectRef idx="2">
-            <a:schemeClr val="accent1"/>
-          </a:effectRef>
-          <a:fontRef idx="minor">
-            <a:schemeClr val="lt1"/>
-          </a:fontRef>
-        </p:style>
-        <p:txBody>
-          <a:bodyPr rtlCol="0" anchor="ctr"/>
-          <a:lstStyle/>
-          <a:p>
-            <a:pPr algn="ctr"/>
-          </a:p>
-        </p:txBody>
-      </p:sp>
-      <p:sp>
-        <p:nvSpPr>
-          <p:cNvPr id="4" name="TextBox 3"/>
-          <p:cNvSpPr txBox="1"/>
-          <p:nvPr/>
-        </p:nvSpPr>
-        <p:spPr>
-          <a:xfrm>
-            <a:off x="548640" y="982980"/>
-            <a:ext cx="11091672" cy="685800"/>
-          </a:xfrm>
-          <a:prstGeom prst="rect">
-            <a:avLst/>
-          </a:prstGeom>
-          <a:noFill/>
-        </p:spPr>
-        <p:txBody>
-          <a:bodyPr wrap="square"/>
-          <a:lstStyle/>
-          <a:p>
-            <a:pPr algn="l"/>
-            <a:r>
-              <a:rPr sz="2000" b="1">
-                <a:solidFill>
-                  <a:srgbClr val="262626"/>
-                </a:solidFill>
-                <a:latin typeface="Noto Sans"/>
-              </a:rPr>
-              <a:t>85%の「自動化ニーズ」層と15%の「コントロールニーズ」層に対し、テンプレートとカスタム設定で対応を分ける</a:t>
-            </a:r>
-          </a:p>
-        </p:txBody>
-      </p:sp>
-      <p:sp>
-        <p:nvSpPr>
-          <p:cNvPr id="5" name="Rectangle 4"/>
-          <p:cNvSpPr/>
-          <p:nvPr/>
-        </p:nvSpPr>
-        <p:spPr>
-          <a:xfrm>
-            <a:off x="548640" y="1897380"/>
-            <a:ext cx="5463540" cy="2237994"/>
-          </a:xfrm>
-          <a:prstGeom prst="rect">
-            <a:avLst/>
-          </a:prstGeom>
-          <a:solidFill>
-            <a:srgbClr val="FFFFFF"/>
-          </a:solidFill>
-          <a:ln w="9525">
-            <a:solidFill>
-              <a:srgbClr val="E0E0E0"/>
-            </a:solidFill>
-          </a:ln>
-        </p:spPr>
-        <p:style>
-          <a:lnRef idx="1">
-            <a:schemeClr val="accent1"/>
-          </a:lnRef>
-          <a:fillRef idx="3">
-            <a:schemeClr val="accent1"/>
-          </a:fillRef>
-          <a:effectRef idx="2">
-            <a:schemeClr val="accent1"/>
-          </a:effectRef>
-          <a:fontRef idx="minor">
-            <a:schemeClr val="lt1"/>
-          </a:fontRef>
-        </p:style>
-        <p:txBody>
-          <a:bodyPr rtlCol="0" anchor="ctr"/>
-          <a:lstStyle/>
-          <a:p>
-            <a:pPr algn="ctr"/>
-          </a:p>
-        </p:txBody>
-      </p:sp>
-      <p:sp>
-        <p:nvSpPr>
-          <p:cNvPr id="6" name="TextBox 5"/>
-          <p:cNvSpPr txBox="1"/>
-          <p:nvPr/>
-        </p:nvSpPr>
-        <p:spPr>
-          <a:xfrm>
-            <a:off x="713232" y="2061972"/>
-            <a:ext cx="5134356" cy="347472"/>
-          </a:xfrm>
-          <a:prstGeom prst="rect">
-            <a:avLst/>
-          </a:prstGeom>
-          <a:noFill/>
-        </p:spPr>
-        <p:txBody>
-          <a:bodyPr wrap="square"/>
-          <a:lstStyle/>
-          <a:p>
-            <a:pPr algn="l"/>
-            <a:r>
-              <a:rPr sz="1800" b="1">
-                <a:solidFill>
-                  <a:srgbClr val="2180FF"/>
-                </a:solidFill>
-                <a:latin typeface="Noto Sans"/>
-              </a:rPr>
-              <a:t>85%｜マーケター・新規事業担当</a:t>
-            </a:r>
-          </a:p>
-        </p:txBody>
-      </p:sp>
-      <p:sp>
-        <p:nvSpPr>
-          <p:cNvPr id="7" name="TextBox 6"/>
-          <p:cNvSpPr txBox="1"/>
-          <p:nvPr/>
-        </p:nvSpPr>
-        <p:spPr>
-          <a:xfrm>
-            <a:off x="713232" y="2446020"/>
-            <a:ext cx="5134356" cy="1524762"/>
-          </a:xfrm>
-          <a:prstGeom prst="rect">
-            <a:avLst/>
-          </a:prstGeom>
-          <a:noFill/>
-        </p:spPr>
-        <p:txBody>
-          <a:bodyPr wrap="square"/>
-          <a:lstStyle/>
-          <a:p>
-            <a:pPr algn="l"/>
-            <a:r>
-              <a:rPr sz="1200" b="0">
-                <a:solidFill>
-                  <a:srgbClr val="262626"/>
-                </a:solidFill>
-                <a:latin typeface="Noto Sans"/>
-              </a:rPr>
-              <a:t>調査のプロではない層。「目的・背景・経緯を入力したら調査設計が自動完成」を求める。テンプレート化されたフローで完全自動化</a:t>
-            </a:r>
-          </a:p>
-        </p:txBody>
-      </p:sp>
-      <p:sp>
-        <p:nvSpPr>
-          <p:cNvPr id="8" name="Rectangle 7"/>
-          <p:cNvSpPr/>
-          <p:nvPr/>
-        </p:nvSpPr>
-        <p:spPr>
-          <a:xfrm>
-            <a:off x="6176772" y="1897380"/>
-            <a:ext cx="5463540" cy="2237994"/>
-          </a:xfrm>
-          <a:prstGeom prst="rect">
-            <a:avLst/>
-          </a:prstGeom>
-          <a:solidFill>
-            <a:srgbClr val="FFFFFF"/>
-          </a:solidFill>
-          <a:ln w="9525">
-            <a:solidFill>
-              <a:srgbClr val="E0E0E0"/>
-            </a:solidFill>
-          </a:ln>
-        </p:spPr>
-        <p:style>
-          <a:lnRef idx="1">
-            <a:schemeClr val="accent1"/>
-          </a:lnRef>
-          <a:fillRef idx="3">
-            <a:schemeClr val="accent1"/>
-          </a:fillRef>
-          <a:effectRef idx="2">
-            <a:schemeClr val="accent1"/>
-          </a:effectRef>
-          <a:fontRef idx="minor">
-            <a:schemeClr val="lt1"/>
-          </a:fontRef>
-        </p:style>
-        <p:txBody>
-          <a:bodyPr rtlCol="0" anchor="ctr"/>
-          <a:lstStyle/>
-          <a:p>
-            <a:pPr algn="ctr"/>
-          </a:p>
-        </p:txBody>
-      </p:sp>
-      <p:sp>
-        <p:nvSpPr>
-          <p:cNvPr id="9" name="TextBox 8"/>
-          <p:cNvSpPr txBox="1"/>
-          <p:nvPr/>
-        </p:nvSpPr>
-        <p:spPr>
-          <a:xfrm>
-            <a:off x="6341364" y="2061972"/>
-            <a:ext cx="5134356" cy="347472"/>
-          </a:xfrm>
-          <a:prstGeom prst="rect">
-            <a:avLst/>
-          </a:prstGeom>
-          <a:noFill/>
-        </p:spPr>
-        <p:txBody>
-          <a:bodyPr wrap="square"/>
-          <a:lstStyle/>
-          <a:p>
-            <a:pPr algn="l"/>
-            <a:r>
-              <a:rPr sz="1800" b="1">
-                <a:solidFill>
-                  <a:srgbClr val="2180FF"/>
-                </a:solidFill>
-                <a:latin typeface="Noto Sans"/>
-              </a:rPr>
-              <a:t>15%｜リサーチャー・コンサル上位層</a:t>
-            </a:r>
-          </a:p>
-        </p:txBody>
-      </p:sp>
-      <p:sp>
-        <p:nvSpPr>
-          <p:cNvPr id="10" name="TextBox 9"/>
-          <p:cNvSpPr txBox="1"/>
-          <p:nvPr/>
-        </p:nvSpPr>
-        <p:spPr>
-          <a:xfrm>
-            <a:off x="6341364" y="2446020"/>
-            <a:ext cx="5134356" cy="1524762"/>
-          </a:xfrm>
-          <a:prstGeom prst="rect">
-            <a:avLst/>
-          </a:prstGeom>
-          <a:noFill/>
-        </p:spPr>
-        <p:txBody>
-          <a:bodyPr wrap="square"/>
-          <a:lstStyle/>
-          <a:p>
-            <a:pPr algn="l"/>
-            <a:r>
-              <a:rPr sz="1200" b="0">
-                <a:solidFill>
-                  <a:srgbClr val="262626"/>
-                </a:solidFill>
-                <a:latin typeface="Noto Sans"/>
-              </a:rPr>
-              <a:t>仮説検証のプロ。LLMのアウトプットに対して自ら仮説を立てて検証したい。Nottaブレインのプロンプトカスタマイズで対応</a:t>
-            </a:r>
-          </a:p>
-        </p:txBody>
-      </p:sp>
-      <p:sp>
-        <p:nvSpPr>
-          <p:cNvPr id="11" name="Rectangle 10"/>
-          <p:cNvSpPr/>
-          <p:nvPr/>
-        </p:nvSpPr>
-        <p:spPr>
-          <a:xfrm>
-            <a:off x="548640" y="4299966"/>
-            <a:ext cx="5463540" cy="2237994"/>
-          </a:xfrm>
-          <a:prstGeom prst="rect">
-            <a:avLst/>
-          </a:prstGeom>
-          <a:solidFill>
-            <a:srgbClr val="FFFFFF"/>
-          </a:solidFill>
-          <a:ln w="9525">
-            <a:solidFill>
-              <a:srgbClr val="E0E0E0"/>
-            </a:solidFill>
-          </a:ln>
-        </p:spPr>
-        <p:style>
-          <a:lnRef idx="1">
-            <a:schemeClr val="accent1"/>
-          </a:lnRef>
-          <a:fillRef idx="3">
-            <a:schemeClr val="accent1"/>
-          </a:fillRef>
-          <a:effectRef idx="2">
-            <a:schemeClr val="accent1"/>
-          </a:effectRef>
-          <a:fontRef idx="minor">
-            <a:schemeClr val="lt1"/>
-          </a:fontRef>
-        </p:style>
-        <p:txBody>
-          <a:bodyPr rtlCol="0" anchor="ctr"/>
-          <a:lstStyle/>
-          <a:p>
-            <a:pPr algn="ctr"/>
-          </a:p>
-        </p:txBody>
-      </p:sp>
-      <p:sp>
-        <p:nvSpPr>
-          <p:cNvPr id="12" name="TextBox 11"/>
-          <p:cNvSpPr txBox="1"/>
-          <p:nvPr/>
-        </p:nvSpPr>
-        <p:spPr>
-          <a:xfrm>
-            <a:off x="713232" y="4464558"/>
-            <a:ext cx="5134356" cy="347472"/>
-          </a:xfrm>
-          <a:prstGeom prst="rect">
-            <a:avLst/>
-          </a:prstGeom>
-          <a:noFill/>
-        </p:spPr>
-        <p:txBody>
-          <a:bodyPr wrap="square"/>
-          <a:lstStyle/>
-          <a:p>
-            <a:pPr algn="l"/>
-            <a:r>
-              <a:rPr sz="1800" b="1">
-                <a:solidFill>
-                  <a:srgbClr val="2180FF"/>
-                </a:solidFill>
-                <a:latin typeface="Noto Sans"/>
-              </a:rPr>
-              <a:t>Notta側のプロンプトテンプレ活用</a:t>
-            </a:r>
-          </a:p>
-        </p:txBody>
-      </p:sp>
-      <p:sp>
-        <p:nvSpPr>
-          <p:cNvPr id="13" name="TextBox 12"/>
-          <p:cNvSpPr txBox="1"/>
-          <p:nvPr/>
-        </p:nvSpPr>
-        <p:spPr>
-          <a:xfrm>
-            <a:off x="713232" y="4848606"/>
-            <a:ext cx="5134356" cy="1524762"/>
-          </a:xfrm>
-          <a:prstGeom prst="rect">
-            <a:avLst/>
-          </a:prstGeom>
-          <a:noFill/>
-        </p:spPr>
-        <p:txBody>
-          <a:bodyPr wrap="square"/>
-          <a:lstStyle/>
-          <a:p>
-            <a:pPr algn="l"/>
-            <a:r>
-              <a:rPr sz="1200" b="0">
-                <a:solidFill>
-                  <a:srgbClr val="262626"/>
-                </a:solidFill>
-                <a:latin typeface="Noto Sans"/>
-              </a:rPr>
-              <a:t>CMGリサーチャーが設計済みのプロンプトテンプレートをNottaブレインに組み込み、アウトプットの方向性・粒度を標準化</a:t>
-            </a:r>
-          </a:p>
-        </p:txBody>
-      </p:sp>
-      <p:sp>
-        <p:nvSpPr>
-          <p:cNvPr id="14" name="Rectangle 13"/>
-          <p:cNvSpPr/>
-          <p:nvPr/>
-        </p:nvSpPr>
-        <p:spPr>
-          <a:xfrm>
-            <a:off x="6176772" y="4299966"/>
-            <a:ext cx="5463540" cy="2237994"/>
-          </a:xfrm>
-          <a:prstGeom prst="rect">
-            <a:avLst/>
-          </a:prstGeom>
-          <a:solidFill>
-            <a:srgbClr val="FFFFFF"/>
-          </a:solidFill>
-          <a:ln w="9525">
-            <a:solidFill>
-              <a:srgbClr val="E0E0E0"/>
-            </a:solidFill>
-          </a:ln>
-        </p:spPr>
-        <p:style>
-          <a:lnRef idx="1">
-            <a:schemeClr val="accent1"/>
-          </a:lnRef>
-          <a:fillRef idx="3">
-            <a:schemeClr val="accent1"/>
-          </a:fillRef>
-          <a:effectRef idx="2">
-            <a:schemeClr val="accent1"/>
-          </a:effectRef>
-          <a:fontRef idx="minor">
-            <a:schemeClr val="lt1"/>
-          </a:fontRef>
-        </p:style>
-        <p:txBody>
-          <a:bodyPr rtlCol="0" anchor="ctr"/>
-          <a:lstStyle/>
-          <a:p>
-            <a:pPr algn="ctr"/>
-          </a:p>
-        </p:txBody>
-      </p:sp>
-      <p:sp>
-        <p:nvSpPr>
-          <p:cNvPr id="15" name="TextBox 14"/>
-          <p:cNvSpPr txBox="1"/>
-          <p:nvPr/>
-        </p:nvSpPr>
-        <p:spPr>
-          <a:xfrm>
-            <a:off x="6341364" y="4464558"/>
-            <a:ext cx="5134356" cy="347472"/>
-          </a:xfrm>
-          <a:prstGeom prst="rect">
-            <a:avLst/>
-          </a:prstGeom>
-          <a:noFill/>
-        </p:spPr>
-        <p:txBody>
-          <a:bodyPr wrap="square"/>
-          <a:lstStyle/>
-          <a:p>
-            <a:pPr algn="l"/>
-            <a:r>
-              <a:rPr sz="1800" b="1">
-                <a:solidFill>
-                  <a:srgbClr val="2180FF"/>
-                </a:solidFill>
-                <a:latin typeface="Noto Sans"/>
-              </a:rPr>
-              <a:t>過去データによる品質担保</a:t>
-            </a:r>
-          </a:p>
-        </p:txBody>
-      </p:sp>
-      <p:sp>
-        <p:nvSpPr>
-          <p:cNvPr id="16" name="TextBox 15"/>
-          <p:cNvSpPr txBox="1"/>
-          <p:nvPr/>
-        </p:nvSpPr>
-        <p:spPr>
-          <a:xfrm>
-            <a:off x="6341364" y="4848606"/>
-            <a:ext cx="5134356" cy="1524762"/>
-          </a:xfrm>
-          <a:prstGeom prst="rect">
-            <a:avLst/>
-          </a:prstGeom>
-          <a:noFill/>
-        </p:spPr>
-        <p:txBody>
-          <a:bodyPr wrap="square"/>
-          <a:lstStyle/>
-          <a:p>
-            <a:pPr algn="l"/>
-            <a:r>
-              <a:rPr sz="1200" b="0">
-                <a:solidFill>
-                  <a:srgbClr val="262626"/>
-                </a:solidFill>
-                <a:latin typeface="Noto Sans"/>
-              </a:rPr>
-              <a:t>CMGが保有する過去調査テキストデータをRAG的に活用。「同種調査ならこの設計が有効」という経験則をAIに継承</a:t>
-            </a:r>
-          </a:p>
-        </p:txBody>
-      </p:sp>
-    </p:spTree>
-  </p:cSld>
-  <p:clrMapOvr>
-    <a:masterClrMapping/>
-  </p:clrMapOvr>
-</p:sld>
-</file>
-
-<file path=ppt/slides/slide8.xml><?xml version="1.0" encoding="utf-8"?>
-<p:sld xmlns:a="http://schemas.openxmlformats.org/drawingml/2006/main" xmlns:p="http://schemas.openxmlformats.org/presentationml/2006/main" xmlns:r="http://schemas.openxmlformats.org/officeDocument/2006/relationships">
-  <p:cSld>
-    <p:bg>
-      <p:bgPr>
-        <a:solidFill>
-          <a:srgbClr val="FFFFFF"/>
-        </a:solidFill>
-        <a:effectLst/>
-      </p:bgPr>
-    </p:bg>
-    <p:spTree>
-      <p:nvGrpSpPr>
-        <p:cNvPr id="1" name=""/>
-        <p:cNvGrpSpPr/>
-        <p:nvPr/>
-      </p:nvGrpSpPr>
-      <p:grpSpPr/>
-      <p:sp>
-        <p:nvSpPr>
-          <p:cNvPr id="2" name="TextBox 1"/>
-          <p:cNvSpPr txBox="1"/>
-          <p:nvPr/>
-        </p:nvSpPr>
-        <p:spPr>
-          <a:xfrm>
-            <a:off x="548640" y="320040"/>
-            <a:ext cx="11091672" cy="411480"/>
-          </a:xfrm>
-          <a:prstGeom prst="rect">
-            <a:avLst/>
-          </a:prstGeom>
-          <a:noFill/>
-        </p:spPr>
-        <p:txBody>
-          <a:bodyPr wrap="square"/>
-          <a:lstStyle/>
-          <a:p>
-            <a:pPr algn="l"/>
-            <a:r>
-              <a:rPr sz="1600" b="0">
-                <a:solidFill>
-                  <a:srgbClr val="2180FF"/>
-                </a:solidFill>
-                <a:latin typeface="Noto Sans"/>
-              </a:rPr>
-              <a:t>インターフェース・技術連携方針</a:t>
-            </a:r>
-          </a:p>
-        </p:txBody>
-      </p:sp>
-      <p:sp>
-        <p:nvSpPr>
-          <p:cNvPr id="3" name="Rectangle 2"/>
-          <p:cNvSpPr/>
-          <p:nvPr/>
-        </p:nvSpPr>
-        <p:spPr>
-          <a:xfrm>
-            <a:off x="548640" y="841248"/>
-            <a:ext cx="11091672" cy="13716"/>
-          </a:xfrm>
-          <a:prstGeom prst="rect">
-            <a:avLst/>
-          </a:prstGeom>
-          <a:solidFill>
-            <a:srgbClr val="D0D0D0"/>
-          </a:solidFill>
-          <a:ln>
-            <a:noFill/>
-          </a:ln>
-        </p:spPr>
-        <p:style>
-          <a:lnRef idx="1">
-            <a:schemeClr val="accent1"/>
-          </a:lnRef>
-          <a:fillRef idx="3">
-            <a:schemeClr val="accent1"/>
-          </a:fillRef>
-          <a:effectRef idx="2">
-            <a:schemeClr val="accent1"/>
-          </a:effectRef>
-          <a:fontRef idx="minor">
-            <a:schemeClr val="lt1"/>
-          </a:fontRef>
-        </p:style>
-        <p:txBody>
-          <a:bodyPr rtlCol="0" anchor="ctr"/>
-          <a:lstStyle/>
-          <a:p>
-            <a:pPr algn="ctr"/>
-          </a:p>
-        </p:txBody>
-      </p:sp>
-      <p:sp>
-        <p:nvSpPr>
-          <p:cNvPr id="4" name="TextBox 3"/>
-          <p:cNvSpPr txBox="1"/>
-          <p:nvPr/>
-        </p:nvSpPr>
-        <p:spPr>
-          <a:xfrm>
-            <a:off x="548640" y="982980"/>
-            <a:ext cx="11091672" cy="685800"/>
-          </a:xfrm>
-          <a:prstGeom prst="rect">
-            <a:avLst/>
-          </a:prstGeom>
-          <a:noFill/>
-        </p:spPr>
-        <p:txBody>
-          <a:bodyPr wrap="square"/>
-          <a:lstStyle/>
-          <a:p>
-            <a:pPr algn="l"/>
-            <a:r>
-              <a:rPr sz="2000" b="1">
-                <a:solidFill>
-                  <a:srgbClr val="262626"/>
-                </a:solidFill>
-                <a:latin typeface="Noto Sans"/>
-              </a:rPr>
-              <a:t>NottaのUI/UXをそのままクライアントに提供。CMGはAPIでデータを受け取り後工程を自走させるエコシステム型連携</a:t>
-            </a:r>
-          </a:p>
-        </p:txBody>
-      </p:sp>
-      <p:sp>
-        <p:nvSpPr>
-          <p:cNvPr id="5" name="Rectangle 4"/>
-          <p:cNvSpPr/>
-          <p:nvPr/>
-        </p:nvSpPr>
-        <p:spPr>
-          <a:xfrm>
-            <a:off x="548640" y="1897380"/>
-            <a:ext cx="5463540" cy="2237994"/>
-          </a:xfrm>
-          <a:prstGeom prst="rect">
-            <a:avLst/>
-          </a:prstGeom>
-          <a:solidFill>
-            <a:srgbClr val="FFFFFF"/>
-          </a:solidFill>
-          <a:ln w="9525">
-            <a:solidFill>
-              <a:srgbClr val="E0E0E0"/>
-            </a:solidFill>
-          </a:ln>
-        </p:spPr>
-        <p:style>
-          <a:lnRef idx="1">
-            <a:schemeClr val="accent1"/>
-          </a:lnRef>
-          <a:fillRef idx="3">
-            <a:schemeClr val="accent1"/>
-          </a:fillRef>
-          <a:effectRef idx="2">
-            <a:schemeClr val="accent1"/>
-          </a:effectRef>
-          <a:fontRef idx="minor">
-            <a:schemeClr val="lt1"/>
-          </a:fontRef>
-        </p:style>
-        <p:txBody>
-          <a:bodyPr rtlCol="0" anchor="ctr"/>
-          <a:lstStyle/>
-          <a:p>
-            <a:pPr algn="ctr"/>
-          </a:p>
-        </p:txBody>
-      </p:sp>
-      <p:sp>
-        <p:nvSpPr>
-          <p:cNvPr id="6" name="TextBox 5"/>
-          <p:cNvSpPr txBox="1"/>
-          <p:nvPr/>
-        </p:nvSpPr>
-        <p:spPr>
-          <a:xfrm>
-            <a:off x="713232" y="2061972"/>
-            <a:ext cx="5134356" cy="347472"/>
-          </a:xfrm>
-          <a:prstGeom prst="rect">
-            <a:avLst/>
-          </a:prstGeom>
-          <a:noFill/>
-        </p:spPr>
-        <p:txBody>
-          <a:bodyPr wrap="square"/>
-          <a:lstStyle/>
-          <a:p>
-            <a:pPr algn="l"/>
-            <a:r>
-              <a:rPr sz="1800" b="1">
-                <a:solidFill>
-                  <a:srgbClr val="2180FF"/>
-                </a:solidFill>
-                <a:latin typeface="Noto Sans"/>
-              </a:rPr>
-              <a:t>UI：Notta as Front-end</a:t>
-            </a:r>
-          </a:p>
-        </p:txBody>
-      </p:sp>
-      <p:sp>
-        <p:nvSpPr>
-          <p:cNvPr id="7" name="TextBox 6"/>
-          <p:cNvSpPr txBox="1"/>
-          <p:nvPr/>
-        </p:nvSpPr>
-        <p:spPr>
-          <a:xfrm>
-            <a:off x="713232" y="2446020"/>
-            <a:ext cx="5134356" cy="1524762"/>
-          </a:xfrm>
-          <a:prstGeom prst="rect">
-            <a:avLst/>
-          </a:prstGeom>
-          <a:noFill/>
-        </p:spPr>
-        <p:txBody>
-          <a:bodyPr wrap="square"/>
-          <a:lstStyle/>
-          <a:p>
-            <a:pPr algn="l"/>
-            <a:r>
-              <a:rPr sz="1200" b="0">
-                <a:solidFill>
-                  <a:srgbClr val="262626"/>
-                </a:solidFill>
-                <a:latin typeface="Noto Sans"/>
-              </a:rPr>
-              <a:t>クライアントはNottaをそのまま使用。CMGが独自UIを開発するコストを削減し、Nottaの既存ユーザーベースもそのまま活用可能</a:t>
-            </a:r>
-          </a:p>
-        </p:txBody>
-      </p:sp>
-      <p:sp>
-        <p:nvSpPr>
-          <p:cNvPr id="8" name="Rectangle 7"/>
-          <p:cNvSpPr/>
-          <p:nvPr/>
-        </p:nvSpPr>
-        <p:spPr>
-          <a:xfrm>
-            <a:off x="6176772" y="1897380"/>
-            <a:ext cx="5463540" cy="2237994"/>
-          </a:xfrm>
-          <a:prstGeom prst="rect">
-            <a:avLst/>
-          </a:prstGeom>
-          <a:solidFill>
-            <a:srgbClr val="FFFFFF"/>
-          </a:solidFill>
-          <a:ln w="9525">
-            <a:solidFill>
-              <a:srgbClr val="E0E0E0"/>
-            </a:solidFill>
-          </a:ln>
-        </p:spPr>
-        <p:style>
-          <a:lnRef idx="1">
-            <a:schemeClr val="accent1"/>
-          </a:lnRef>
-          <a:fillRef idx="3">
-            <a:schemeClr val="accent1"/>
-          </a:fillRef>
-          <a:effectRef idx="2">
-            <a:schemeClr val="accent1"/>
-          </a:effectRef>
-          <a:fontRef idx="minor">
-            <a:schemeClr val="lt1"/>
-          </a:fontRef>
-        </p:style>
-        <p:txBody>
-          <a:bodyPr rtlCol="0" anchor="ctr"/>
-          <a:lstStyle/>
-          <a:p>
-            <a:pPr algn="ctr"/>
-          </a:p>
-        </p:txBody>
-      </p:sp>
-      <p:sp>
-        <p:nvSpPr>
-          <p:cNvPr id="9" name="TextBox 8"/>
-          <p:cNvSpPr txBox="1"/>
-          <p:nvPr/>
-        </p:nvSpPr>
-        <p:spPr>
-          <a:xfrm>
-            <a:off x="6341364" y="2061972"/>
-            <a:ext cx="5134356" cy="347472"/>
-          </a:xfrm>
-          <a:prstGeom prst="rect">
-            <a:avLst/>
-          </a:prstGeom>
-          <a:noFill/>
-        </p:spPr>
-        <p:txBody>
-          <a:bodyPr wrap="square"/>
-          <a:lstStyle/>
-          <a:p>
-            <a:pPr algn="l"/>
-            <a:r>
-              <a:rPr sz="1800" b="1">
-                <a:solidFill>
-                  <a:srgbClr val="2180FF"/>
-                </a:solidFill>
-                <a:latin typeface="Noto Sans"/>
-              </a:rPr>
-              <a:t>データ連携：API/データ出力</a:t>
-            </a:r>
-          </a:p>
-        </p:txBody>
-      </p:sp>
-      <p:sp>
-        <p:nvSpPr>
-          <p:cNvPr id="10" name="TextBox 9"/>
-          <p:cNvSpPr txBox="1"/>
-          <p:nvPr/>
-        </p:nvSpPr>
-        <p:spPr>
-          <a:xfrm>
-            <a:off x="6341364" y="2446020"/>
-            <a:ext cx="5134356" cy="1524762"/>
-          </a:xfrm>
-          <a:prstGeom prst="rect">
-            <a:avLst/>
-          </a:prstGeom>
-          <a:noFill/>
-        </p:spPr>
-        <p:txBody>
-          <a:bodyPr wrap="square"/>
-          <a:lstStyle/>
-          <a:p>
-            <a:pPr algn="l"/>
-            <a:r>
-              <a:rPr sz="1200" b="0">
-                <a:solidFill>
-                  <a:srgbClr val="262626"/>
-                </a:solidFill>
-                <a:latin typeface="Noto Sans"/>
-              </a:rPr>
-              <a:t>NottaがテキストデータをAPI・JSONで出力→CMGの調査設計AI・秋雲・顧客ポータルに連携。後工程はCMG側システムが自律稼働</a:t>
-            </a:r>
-          </a:p>
-        </p:txBody>
-      </p:sp>
-      <p:sp>
-        <p:nvSpPr>
-          <p:cNvPr id="11" name="Rectangle 10"/>
-          <p:cNvSpPr/>
-          <p:nvPr/>
-        </p:nvSpPr>
-        <p:spPr>
-          <a:xfrm>
-            <a:off x="548640" y="4299966"/>
-            <a:ext cx="5463540" cy="2237994"/>
-          </a:xfrm>
-          <a:prstGeom prst="rect">
-            <a:avLst/>
-          </a:prstGeom>
-          <a:solidFill>
-            <a:srgbClr val="FFFFFF"/>
-          </a:solidFill>
-          <a:ln w="9525">
-            <a:solidFill>
-              <a:srgbClr val="E0E0E0"/>
-            </a:solidFill>
-          </a:ln>
-        </p:spPr>
-        <p:style>
-          <a:lnRef idx="1">
-            <a:schemeClr val="accent1"/>
-          </a:lnRef>
-          <a:fillRef idx="3">
-            <a:schemeClr val="accent1"/>
-          </a:fillRef>
-          <a:effectRef idx="2">
-            <a:schemeClr val="accent1"/>
-          </a:effectRef>
-          <a:fontRef idx="minor">
-            <a:schemeClr val="lt1"/>
-          </a:fontRef>
-        </p:style>
-        <p:txBody>
-          <a:bodyPr rtlCol="0" anchor="ctr"/>
-          <a:lstStyle/>
-          <a:p>
-            <a:pPr algn="ctr"/>
-          </a:p>
-        </p:txBody>
-      </p:sp>
-      <p:sp>
-        <p:nvSpPr>
-          <p:cNvPr id="12" name="TextBox 11"/>
-          <p:cNvSpPr txBox="1"/>
-          <p:nvPr/>
-        </p:nvSpPr>
-        <p:spPr>
-          <a:xfrm>
-            <a:off x="713232" y="4464558"/>
-            <a:ext cx="5134356" cy="347472"/>
-          </a:xfrm>
-          <a:prstGeom prst="rect">
-            <a:avLst/>
-          </a:prstGeom>
-          <a:noFill/>
-        </p:spPr>
-        <p:txBody>
-          <a:bodyPr wrap="square"/>
-          <a:lstStyle/>
-          <a:p>
-            <a:pPr algn="l"/>
-            <a:r>
-              <a:rPr sz="1800" b="1">
-                <a:solidFill>
-                  <a:srgbClr val="2180FF"/>
-                </a:solidFill>
-                <a:latin typeface="Noto Sans"/>
-              </a:rPr>
-              <a:t>ハードウェアはスコープ外</a:t>
-            </a:r>
-          </a:p>
-        </p:txBody>
-      </p:sp>
-      <p:sp>
-        <p:nvSpPr>
-          <p:cNvPr id="13" name="TextBox 12"/>
-          <p:cNvSpPr txBox="1"/>
-          <p:nvPr/>
-        </p:nvSpPr>
-        <p:spPr>
-          <a:xfrm>
-            <a:off x="713232" y="4848606"/>
-            <a:ext cx="5134356" cy="1524762"/>
-          </a:xfrm>
-          <a:prstGeom prst="rect">
-            <a:avLst/>
-          </a:prstGeom>
-          <a:noFill/>
-        </p:spPr>
-        <p:txBody>
-          <a:bodyPr wrap="square"/>
-          <a:lstStyle/>
-          <a:p>
-            <a:pPr algn="l"/>
-            <a:r>
-              <a:rPr sz="1200" b="0">
-                <a:solidFill>
-                  <a:srgbClr val="262626"/>
-                </a:solidFill>
-                <a:latin typeface="Noto Sans"/>
-              </a:rPr>
-              <a:t>Meeting Owl等のハードウェア連携はコスト・情報管理の観点から現段階ではスコープ外。ソフトウェアレイヤーで解決する方針に合意</a:t>
-            </a:r>
-          </a:p>
-        </p:txBody>
-      </p:sp>
-      <p:sp>
-        <p:nvSpPr>
-          <p:cNvPr id="14" name="Rectangle 13"/>
-          <p:cNvSpPr/>
-          <p:nvPr/>
-        </p:nvSpPr>
-        <p:spPr>
-          <a:xfrm>
-            <a:off x="6176772" y="4299966"/>
-            <a:ext cx="5463540" cy="2237994"/>
-          </a:xfrm>
-          <a:prstGeom prst="rect">
-            <a:avLst/>
-          </a:prstGeom>
-          <a:solidFill>
-            <a:srgbClr val="FFFFFF"/>
-          </a:solidFill>
-          <a:ln w="9525">
-            <a:solidFill>
-              <a:srgbClr val="E0E0E0"/>
-            </a:solidFill>
-          </a:ln>
-        </p:spPr>
-        <p:style>
-          <a:lnRef idx="1">
-            <a:schemeClr val="accent1"/>
-          </a:lnRef>
-          <a:fillRef idx="3">
-            <a:schemeClr val="accent1"/>
-          </a:fillRef>
-          <a:effectRef idx="2">
-            <a:schemeClr val="accent1"/>
-          </a:effectRef>
-          <a:fontRef idx="minor">
-            <a:schemeClr val="lt1"/>
-          </a:fontRef>
-        </p:style>
-        <p:txBody>
-          <a:bodyPr rtlCol="0" anchor="ctr"/>
-          <a:lstStyle/>
-          <a:p>
-            <a:pPr algn="ctr"/>
-          </a:p>
-        </p:txBody>
-      </p:sp>
-      <p:sp>
-        <p:nvSpPr>
-          <p:cNvPr id="15" name="TextBox 14"/>
-          <p:cNvSpPr txBox="1"/>
-          <p:nvPr/>
-        </p:nvSpPr>
-        <p:spPr>
-          <a:xfrm>
-            <a:off x="6341364" y="4464558"/>
-            <a:ext cx="5134356" cy="347472"/>
-          </a:xfrm>
-          <a:prstGeom prst="rect">
-            <a:avLst/>
-          </a:prstGeom>
-          <a:noFill/>
-        </p:spPr>
-        <p:txBody>
-          <a:bodyPr wrap="square"/>
-          <a:lstStyle/>
-          <a:p>
-            <a:pPr algn="l"/>
-            <a:r>
-              <a:rPr sz="1800" b="1">
-                <a:solidFill>
-                  <a:srgbClr val="2180FF"/>
-                </a:solidFill>
-                <a:latin typeface="Noto Sans"/>
-              </a:rPr>
-              <a:t>開発スピードへの配慮</a:t>
-            </a:r>
-          </a:p>
-        </p:txBody>
-      </p:sp>
-      <p:sp>
-        <p:nvSpPr>
-          <p:cNvPr id="16" name="TextBox 15"/>
-          <p:cNvSpPr txBox="1"/>
-          <p:nvPr/>
-        </p:nvSpPr>
-        <p:spPr>
-          <a:xfrm>
-            <a:off x="6341364" y="4848606"/>
-            <a:ext cx="5134356" cy="1524762"/>
-          </a:xfrm>
-          <a:prstGeom prst="rect">
-            <a:avLst/>
-          </a:prstGeom>
-          <a:noFill/>
-        </p:spPr>
-        <p:txBody>
-          <a:bodyPr wrap="square"/>
-          <a:lstStyle/>
-          <a:p>
-            <a:pPr algn="l"/>
-            <a:r>
-              <a:rPr sz="1200" b="0">
-                <a:solidFill>
-                  <a:srgbClr val="262626"/>
-                </a:solidFill>
-                <a:latin typeface="Noto Sans"/>
-              </a:rPr>
-              <a:t>CMG側のエンジニアリソースは限定的。Notta側はAPI・SDK・プロンプトテンプレートを提供し、CMG側の実装コストを最小化</a:t>
-            </a:r>
-          </a:p>
-        </p:txBody>
-      </p:sp>
-    </p:spTree>
-  </p:cSld>
-  <p:clrMapOvr>
-    <a:masterClrMapping/>
-  </p:clrMapOvr>
-</p:sld>
-</file>
-
-<file path=ppt/slides/slide9.xml><?xml version="1.0" encoding="utf-8"?>
-<p:sld xmlns:a="http://schemas.openxmlformats.org/drawingml/2006/main" xmlns:p="http://schemas.openxmlformats.org/presentationml/2006/main" xmlns:r="http://schemas.openxmlformats.org/officeDocument/2006/relationships">
-  <p:cSld>
-    <p:bg>
-      <p:bgPr>
-        <a:solidFill>
-          <a:srgbClr val="FFFFFF"/>
-        </a:solidFill>
-        <a:effectLst/>
-      </p:bgPr>
-    </p:bg>
-    <p:spTree>
-      <p:nvGrpSpPr>
-        <p:cNvPr id="1" name=""/>
-        <p:cNvGrpSpPr/>
-        <p:nvPr/>
-      </p:nvGrpSpPr>
-      <p:grpSpPr/>
-      <p:sp>
-        <p:nvSpPr>
-          <p:cNvPr id="2" name="TextBox 1"/>
-          <p:cNvSpPr txBox="1"/>
-          <p:nvPr/>
-        </p:nvSpPr>
-        <p:spPr>
-          <a:xfrm>
-            <a:off x="548640" y="320040"/>
-            <a:ext cx="11091672" cy="411480"/>
-          </a:xfrm>
-          <a:prstGeom prst="rect">
-            <a:avLst/>
-          </a:prstGeom>
-          <a:noFill/>
-        </p:spPr>
-        <p:txBody>
-          <a:bodyPr wrap="square"/>
-          <a:lstStyle/>
-          <a:p>
-            <a:pPr algn="l"/>
-            <a:r>
-              <a:rPr sz="1600" b="0">
-                <a:solidFill>
-                  <a:srgbClr val="2180FF"/>
-                </a:solidFill>
-                <a:latin typeface="Noto Sans"/>
-              </a:rPr>
-              <a:t>協業がもたらす競争優位性</a:t>
-            </a:r>
-          </a:p>
-        </p:txBody>
-      </p:sp>
-      <p:sp>
-        <p:nvSpPr>
-          <p:cNvPr id="3" name="Rectangle 2"/>
-          <p:cNvSpPr/>
-          <p:nvPr/>
-        </p:nvSpPr>
-        <p:spPr>
-          <a:xfrm>
-            <a:off x="548640" y="841248"/>
-            <a:ext cx="11091672" cy="13716"/>
-          </a:xfrm>
-          <a:prstGeom prst="rect">
-            <a:avLst/>
-          </a:prstGeom>
-          <a:solidFill>
-            <a:srgbClr val="D0D0D0"/>
-          </a:solidFill>
-          <a:ln>
-            <a:noFill/>
-          </a:ln>
-        </p:spPr>
-        <p:style>
-          <a:lnRef idx="1">
-            <a:schemeClr val="accent1"/>
-          </a:lnRef>
-          <a:fillRef idx="3">
-            <a:schemeClr val="accent1"/>
-          </a:fillRef>
-          <a:effectRef idx="2">
-            <a:schemeClr val="accent1"/>
-          </a:effectRef>
-          <a:fontRef idx="minor">
-            <a:schemeClr val="lt1"/>
-          </a:fontRef>
-        </p:style>
-        <p:txBody>
-          <a:bodyPr rtlCol="0" anchor="ctr"/>
-          <a:lstStyle/>
-          <a:p>
-            <a:pPr algn="ctr"/>
-          </a:p>
-        </p:txBody>
-      </p:sp>
-      <p:sp>
-        <p:nvSpPr>
-          <p:cNvPr id="4" name="TextBox 3"/>
-          <p:cNvSpPr txBox="1"/>
-          <p:nvPr/>
-        </p:nvSpPr>
-        <p:spPr>
-          <a:xfrm>
-            <a:off x="548640" y="982980"/>
-            <a:ext cx="11091672" cy="685800"/>
-          </a:xfrm>
-          <a:prstGeom prst="rect">
-            <a:avLst/>
-          </a:prstGeom>
-          <a:noFill/>
-        </p:spPr>
-        <p:txBody>
-          <a:bodyPr wrap="square"/>
-          <a:lstStyle/>
-          <a:p>
-            <a:pPr algn="l"/>
-            <a:r>
-              <a:rPr sz="2000" b="1">
-                <a:solidFill>
-                  <a:srgbClr val="262626"/>
-                </a:solidFill>
-                <a:latin typeface="Noto Sans"/>
-              </a:rPr>
-              <a:t>Notta × CMGで「国産XMプラットフォーム」のファーストペンギンとなり、リサーチ業界のAI活用をリードする</a:t>
-            </a:r>
-          </a:p>
-        </p:txBody>
-      </p:sp>
-      <p:sp>
-        <p:nvSpPr>
-          <p:cNvPr id="5" name="Rectangle 4"/>
-          <p:cNvSpPr/>
-          <p:nvPr/>
-        </p:nvSpPr>
-        <p:spPr>
-          <a:xfrm>
-            <a:off x="548640" y="1897380"/>
-            <a:ext cx="5463540" cy="2237994"/>
-          </a:xfrm>
-          <a:prstGeom prst="rect">
-            <a:avLst/>
-          </a:prstGeom>
-          <a:solidFill>
-            <a:srgbClr val="FFFFFF"/>
-          </a:solidFill>
-          <a:ln w="9525">
-            <a:solidFill>
-              <a:srgbClr val="E0E0E0"/>
-            </a:solidFill>
-          </a:ln>
-        </p:spPr>
-        <p:style>
-          <a:lnRef idx="1">
-            <a:schemeClr val="accent1"/>
-          </a:lnRef>
-          <a:fillRef idx="3">
-            <a:schemeClr val="accent1"/>
-          </a:fillRef>
-          <a:effectRef idx="2">
-            <a:schemeClr val="accent1"/>
-          </a:effectRef>
-          <a:fontRef idx="minor">
-            <a:schemeClr val="lt1"/>
-          </a:fontRef>
-        </p:style>
-        <p:txBody>
-          <a:bodyPr rtlCol="0" anchor="ctr"/>
-          <a:lstStyle/>
-          <a:p>
-            <a:pPr algn="ctr"/>
-          </a:p>
-        </p:txBody>
-      </p:sp>
-      <p:sp>
-        <p:nvSpPr>
-          <p:cNvPr id="6" name="TextBox 5"/>
-          <p:cNvSpPr txBox="1"/>
-          <p:nvPr/>
-        </p:nvSpPr>
-        <p:spPr>
-          <a:xfrm>
-            <a:off x="713232" y="2061972"/>
-            <a:ext cx="5134356" cy="347472"/>
-          </a:xfrm>
-          <a:prstGeom prst="rect">
-            <a:avLst/>
-          </a:prstGeom>
-          <a:noFill/>
-        </p:spPr>
-        <p:txBody>
-          <a:bodyPr wrap="square"/>
-          <a:lstStyle/>
-          <a:p>
-            <a:pPr algn="l"/>
-            <a:r>
-              <a:rPr sz="1800" b="1">
-                <a:solidFill>
-                  <a:srgbClr val="2180FF"/>
-                </a:solidFill>
-                <a:latin typeface="Noto Sans"/>
-              </a:rPr>
-              <a:t>CMGへのインパクト①｜新収益軸</a:t>
-            </a:r>
-          </a:p>
-        </p:txBody>
-      </p:sp>
-      <p:sp>
-        <p:nvSpPr>
-          <p:cNvPr id="7" name="TextBox 6"/>
-          <p:cNvSpPr txBox="1"/>
-          <p:nvPr/>
-        </p:nvSpPr>
-        <p:spPr>
-          <a:xfrm>
-            <a:off x="713232" y="2446020"/>
-            <a:ext cx="5134356" cy="1524762"/>
-          </a:xfrm>
-          <a:prstGeom prst="rect">
-            <a:avLst/>
-          </a:prstGeom>
-          <a:noFill/>
-        </p:spPr>
-        <p:txBody>
-          <a:bodyPr wrap="square"/>
-          <a:lstStyle/>
-          <a:p>
-            <a:pPr algn="l"/>
-            <a:r>
-              <a:rPr sz="1200" b="0">
-                <a:solidFill>
-                  <a:srgbClr val="262626"/>
-                </a:solidFill>
-                <a:latin typeface="Noto Sans"/>
-              </a:rPr>
-              <a:t>受託リサーチのシュリンクを補完する「プラットフォームSaaS」収益を確立。クライアントの自走化を支援する新マネタイズモデル</a:t>
-            </a:r>
-          </a:p>
-        </p:txBody>
-      </p:sp>
-      <p:sp>
-        <p:nvSpPr>
-          <p:cNvPr id="8" name="Rectangle 7"/>
-          <p:cNvSpPr/>
-          <p:nvPr/>
-        </p:nvSpPr>
-        <p:spPr>
-          <a:xfrm>
-            <a:off x="6176772" y="1897380"/>
-            <a:ext cx="5463540" cy="2237994"/>
-          </a:xfrm>
-          <a:prstGeom prst="rect">
-            <a:avLst/>
-          </a:prstGeom>
-          <a:solidFill>
-            <a:srgbClr val="FFFFFF"/>
-          </a:solidFill>
-          <a:ln w="9525">
-            <a:solidFill>
-              <a:srgbClr val="E0E0E0"/>
-            </a:solidFill>
-          </a:ln>
-        </p:spPr>
-        <p:style>
-          <a:lnRef idx="1">
-            <a:schemeClr val="accent1"/>
-          </a:lnRef>
-          <a:fillRef idx="3">
-            <a:schemeClr val="accent1"/>
-          </a:fillRef>
-          <a:effectRef idx="2">
-            <a:schemeClr val="accent1"/>
-          </a:effectRef>
-          <a:fontRef idx="minor">
-            <a:schemeClr val="lt1"/>
-          </a:fontRef>
-        </p:style>
-        <p:txBody>
-          <a:bodyPr rtlCol="0" anchor="ctr"/>
-          <a:lstStyle/>
-          <a:p>
-            <a:pPr algn="ctr"/>
-          </a:p>
-        </p:txBody>
-      </p:sp>
-      <p:sp>
-        <p:nvSpPr>
-          <p:cNvPr id="9" name="TextBox 8"/>
-          <p:cNvSpPr txBox="1"/>
-          <p:nvPr/>
-        </p:nvSpPr>
-        <p:spPr>
-          <a:xfrm>
-            <a:off x="6341364" y="2061972"/>
-            <a:ext cx="5134356" cy="347472"/>
-          </a:xfrm>
-          <a:prstGeom prst="rect">
-            <a:avLst/>
-          </a:prstGeom>
-          <a:noFill/>
-        </p:spPr>
-        <p:txBody>
-          <a:bodyPr wrap="square"/>
-          <a:lstStyle/>
-          <a:p>
-            <a:pPr algn="l"/>
-            <a:r>
-              <a:rPr sz="1800" b="1">
-                <a:solidFill>
-                  <a:srgbClr val="2180FF"/>
-                </a:solidFill>
-                <a:latin typeface="Noto Sans"/>
-              </a:rPr>
-              <a:t>CMGへのインパクト②｜競争優位</a:t>
-            </a:r>
-          </a:p>
-        </p:txBody>
-      </p:sp>
-      <p:sp>
-        <p:nvSpPr>
-          <p:cNvPr id="10" name="TextBox 9"/>
-          <p:cNvSpPr txBox="1"/>
-          <p:nvPr/>
-        </p:nvSpPr>
-        <p:spPr>
-          <a:xfrm>
-            <a:off x="6341364" y="2446020"/>
-            <a:ext cx="5134356" cy="1524762"/>
-          </a:xfrm>
-          <a:prstGeom prst="rect">
-            <a:avLst/>
-          </a:prstGeom>
-          <a:noFill/>
-        </p:spPr>
-        <p:txBody>
-          <a:bodyPr wrap="square"/>
-          <a:lstStyle/>
-          <a:p>
-            <a:pPr algn="l"/>
-            <a:r>
-              <a:rPr sz="1200" b="0">
-                <a:solidFill>
-                  <a:srgbClr val="262626"/>
-                </a:solidFill>
-                <a:latin typeface="Noto Sans"/>
-              </a:rPr>
-              <a:t>音声→調査→レポートの完全自動フローを業界で初めて実装。国内リサーチ業界での「AI活用ファーストペンギン」としてのプレゼンス獲得</a:t>
-            </a:r>
-          </a:p>
-        </p:txBody>
-      </p:sp>
-      <p:sp>
-        <p:nvSpPr>
-          <p:cNvPr id="11" name="Rectangle 10"/>
-          <p:cNvSpPr/>
-          <p:nvPr/>
-        </p:nvSpPr>
-        <p:spPr>
-          <a:xfrm>
-            <a:off x="548640" y="4299966"/>
-            <a:ext cx="5463540" cy="2237994"/>
-          </a:xfrm>
-          <a:prstGeom prst="rect">
-            <a:avLst/>
-          </a:prstGeom>
-          <a:solidFill>
-            <a:srgbClr val="FFFFFF"/>
-          </a:solidFill>
-          <a:ln w="9525">
-            <a:solidFill>
-              <a:srgbClr val="E0E0E0"/>
-            </a:solidFill>
-          </a:ln>
-        </p:spPr>
-        <p:style>
-          <a:lnRef idx="1">
-            <a:schemeClr val="accent1"/>
-          </a:lnRef>
-          <a:fillRef idx="3">
-            <a:schemeClr val="accent1"/>
-          </a:fillRef>
-          <a:effectRef idx="2">
-            <a:schemeClr val="accent1"/>
-          </a:effectRef>
-          <a:fontRef idx="minor">
-            <a:schemeClr val="lt1"/>
-          </a:fontRef>
-        </p:style>
-        <p:txBody>
-          <a:bodyPr rtlCol="0" anchor="ctr"/>
-          <a:lstStyle/>
-          <a:p>
-            <a:pPr algn="ctr"/>
-          </a:p>
-        </p:txBody>
-      </p:sp>
-      <p:sp>
-        <p:nvSpPr>
-          <p:cNvPr id="12" name="TextBox 11"/>
-          <p:cNvSpPr txBox="1"/>
-          <p:nvPr/>
-        </p:nvSpPr>
-        <p:spPr>
-          <a:xfrm>
-            <a:off x="713232" y="4464558"/>
-            <a:ext cx="5134356" cy="347472"/>
-          </a:xfrm>
-          <a:prstGeom prst="rect">
-            <a:avLst/>
-          </a:prstGeom>
-          <a:noFill/>
-        </p:spPr>
-        <p:txBody>
-          <a:bodyPr wrap="square"/>
-          <a:lstStyle/>
-          <a:p>
-            <a:pPr algn="l"/>
-            <a:r>
-              <a:rPr sz="1800" b="1">
-                <a:solidFill>
-                  <a:srgbClr val="2180FF"/>
-                </a:solidFill>
-                <a:latin typeface="Noto Sans"/>
-              </a:rPr>
-              <a:t>Nottaへのインパクト①｜垂直統合</a:t>
-            </a:r>
-          </a:p>
-        </p:txBody>
-      </p:sp>
-      <p:sp>
-        <p:nvSpPr>
-          <p:cNvPr id="13" name="TextBox 12"/>
-          <p:cNvSpPr txBox="1"/>
-          <p:nvPr/>
-        </p:nvSpPr>
-        <p:spPr>
-          <a:xfrm>
-            <a:off x="713232" y="4848606"/>
-            <a:ext cx="5134356" cy="1524762"/>
-          </a:xfrm>
-          <a:prstGeom prst="rect">
-            <a:avLst/>
-          </a:prstGeom>
-          <a:noFill/>
-        </p:spPr>
-        <p:txBody>
-          <a:bodyPr wrap="square"/>
-          <a:lstStyle/>
-          <a:p>
-            <a:pPr algn="l"/>
-            <a:r>
-              <a:rPr sz="1200" b="0">
-                <a:solidFill>
-                  <a:srgbClr val="262626"/>
-                </a:solidFill>
-                <a:latin typeface="Noto Sans"/>
-              </a:rPr>
-              <a:t>リサーチ業界への深い垂直統合。単なる文字起こしツールからリサーチバリューチェーンの中核インフラへの進化</a:t>
-            </a:r>
-          </a:p>
-        </p:txBody>
-      </p:sp>
-      <p:sp>
-        <p:nvSpPr>
-          <p:cNvPr id="14" name="Rectangle 13"/>
-          <p:cNvSpPr/>
-          <p:nvPr/>
-        </p:nvSpPr>
-        <p:spPr>
-          <a:xfrm>
-            <a:off x="6176772" y="4299966"/>
-            <a:ext cx="5463540" cy="2237994"/>
-          </a:xfrm>
-          <a:prstGeom prst="rect">
-            <a:avLst/>
-          </a:prstGeom>
-          <a:solidFill>
-            <a:srgbClr val="FFFFFF"/>
-          </a:solidFill>
-          <a:ln w="9525">
-            <a:solidFill>
-              <a:srgbClr val="E0E0E0"/>
-            </a:solidFill>
-          </a:ln>
-        </p:spPr>
-        <p:style>
-          <a:lnRef idx="1">
-            <a:schemeClr val="accent1"/>
-          </a:lnRef>
-          <a:fillRef idx="3">
-            <a:schemeClr val="accent1"/>
-          </a:fillRef>
-          <a:effectRef idx="2">
-            <a:schemeClr val="accent1"/>
-          </a:effectRef>
-          <a:fontRef idx="minor">
-            <a:schemeClr val="lt1"/>
-          </a:fontRef>
-        </p:style>
-        <p:txBody>
-          <a:bodyPr rtlCol="0" anchor="ctr"/>
-          <a:lstStyle/>
-          <a:p>
-            <a:pPr algn="ctr"/>
-          </a:p>
-        </p:txBody>
-      </p:sp>
-      <p:sp>
-        <p:nvSpPr>
-          <p:cNvPr id="15" name="TextBox 14"/>
-          <p:cNvSpPr txBox="1"/>
-          <p:nvPr/>
-        </p:nvSpPr>
-        <p:spPr>
-          <a:xfrm>
-            <a:off x="6341364" y="4464558"/>
-            <a:ext cx="5134356" cy="347472"/>
-          </a:xfrm>
-          <a:prstGeom prst="rect">
-            <a:avLst/>
-          </a:prstGeom>
-          <a:noFill/>
-        </p:spPr>
-        <p:txBody>
-          <a:bodyPr wrap="square"/>
-          <a:lstStyle/>
-          <a:p>
-            <a:pPr algn="l"/>
-            <a:r>
-              <a:rPr sz="1800" b="1">
-                <a:solidFill>
-                  <a:srgbClr val="2180FF"/>
-                </a:solidFill>
-                <a:latin typeface="Noto Sans"/>
-              </a:rPr>
-              <a:t>Nottaへのインパクト②｜市場拡大</a:t>
-            </a:r>
-          </a:p>
-        </p:txBody>
-      </p:sp>
-      <p:sp>
-        <p:nvSpPr>
-          <p:cNvPr id="16" name="TextBox 15"/>
-          <p:cNvSpPr txBox="1"/>
-          <p:nvPr/>
-        </p:nvSpPr>
-        <p:spPr>
-          <a:xfrm>
-            <a:off x="6341364" y="4848606"/>
-            <a:ext cx="5134356" cy="1524762"/>
-          </a:xfrm>
-          <a:prstGeom prst="rect">
-            <a:avLst/>
-          </a:prstGeom>
-          <a:noFill/>
-        </p:spPr>
-        <p:txBody>
-          <a:bodyPr wrap="square"/>
-          <a:lstStyle/>
-          <a:p>
-            <a:pPr algn="l"/>
-            <a:r>
-              <a:rPr sz="1200" b="0">
-                <a:solidFill>
-                  <a:srgbClr val="262626"/>
-                </a:solidFill>
-                <a:latin typeface="Noto Sans"/>
-              </a:rPr>
-              <a:t>CMGの顧客基盤（事業会社マーケター・新規事業担当）への販路拡大。CMGとのジョイントソリューションで新規開拓を加速</a:t>
+              <a:t>【Phase 2：β版（〜Q3 2026）】CMGの一部クライアントへのβ提供、秋雲との本番API連携、過去調査RAGの稼働。【Phase 3：正式リリース（〜Q4 2026）】CMGクライアント全社への展開、課金モデル設計（Notta従量課金＋CMGサービス料）。【Phase 4：外販（2027〜）】「音声×リサーチ自動化」を国産XMプラットフォームとして他業界・他社へ展開。Nottaは他垂直市場への統合パターンとして横展開。</a:t>
             </a:r>
           </a:p>
         </p:txBody>
